--- a/exports/pptx/lessons/middle-module-02-panchabhuta/day-02-creation-sequence.pptx
+++ b/exports/pptx/lessons/middle-module-02-panchabhuta/day-02-creation-sequence.pptx
@@ -5243,8 +5243,8 @@
         </p:nvSpPr>
         <p:spPr>
           <a:xfrm>
-            <a:off x="406301" y="5780782"/>
-            <a:ext cx="8498026" cy="426541"/>
+            <a:off x="406301" y="4089202"/>
+            <a:ext cx="8498026" cy="213271"/>
           </a:xfrm>
           <a:prstGeom prst="rect">
             <a:avLst/>
@@ -5269,15 +5269,15 @@
               <a:buNone/>
             </a:pPr>
             <a:r>
-              <a:rPr lang="en-US" sz="1200" dirty="0">
-                <a:solidFill>
-                  <a:srgbClr val="1C2833"/>
-                </a:solidFill>
-                <a:latin typeface="Arial" pitchFamily="34" charset="0"/>
-                <a:ea typeface="Arial" pitchFamily="34" charset="-122"/>
-                <a:cs typeface="Arial" pitchFamily="34" charset="-120"/>
-              </a:rPr>
-              <a:t>Source paraphrase: "Earth has five qualities, water has four, fire has three, air has two, and the sky has only one quality, sound."    — Śrīmad-Bhāgavatam 3.26.50</a:t>
+              <a:rPr lang="en-US" sz="1200" i="1" dirty="0">
+                <a:solidFill>
+                  <a:srgbClr val="1C2833"/>
+                </a:solidFill>
+                <a:latin typeface="Arial" pitchFamily="34" charset="0"/>
+                <a:ea typeface="Arial" pitchFamily="34" charset="-122"/>
+                <a:cs typeface="Arial" pitchFamily="34" charset="-120"/>
+              </a:rPr>
+              <a:t>Each row: Element · Qualities.</a:t>
             </a:r>
             <a:endParaRPr lang="en-US" sz="1200" dirty="0"/>
           </a:p>
@@ -5291,8 +5291,8 @@
         </p:nvSpPr>
         <p:spPr>
           <a:xfrm>
-            <a:off x="634901" y="6296174"/>
-            <a:ext cx="8102798" cy="281880"/>
+            <a:off x="634901" y="4391323"/>
+            <a:ext cx="8102798" cy="1257002"/>
           </a:xfrm>
           <a:prstGeom prst="rect">
             <a:avLst/>
@@ -5315,15 +5315,15 @@
               <a:buChar char="•"/>
             </a:pPr>
             <a:r>
-              <a:rPr lang="en-US" sz="1200" b="1" dirty="0">
-                <a:solidFill>
-                  <a:srgbClr val="1C2833"/>
-                </a:solidFill>
-                <a:latin typeface="Arial" pitchFamily="34" charset="0"/>
-                <a:ea typeface="Arial" pitchFamily="34" charset="-122"/>
-                <a:cs typeface="Arial" pitchFamily="34" charset="-120"/>
-              </a:rPr>
-              <a:t>Check:</a:t>
+              <a:rPr lang="en-US" sz="1200" i="1" dirty="0">
+                <a:solidFill>
+                  <a:srgbClr val="1C2833"/>
+                </a:solidFill>
+                <a:latin typeface="Arial" pitchFamily="34" charset="0"/>
+                <a:ea typeface="Arial" pitchFamily="34" charset="-122"/>
+                <a:cs typeface="Arial" pitchFamily="34" charset="-120"/>
+              </a:rPr>
+              <a:t>ākāśa</a:t>
             </a:r>
             <a:pPr algn="l" indent="0" marL="0">
               <a:lnSpc>
@@ -5343,16 +5343,20 @@
                 <a:ea typeface="Arial" pitchFamily="34" charset="-122"/>
                 <a:cs typeface="Arial" pitchFamily="34" charset="-120"/>
               </a:rPr>
-              <a:t> "Why does it make sense that </a:t>
-            </a:r>
-            <a:pPr algn="l" indent="0" marL="0">
+              <a:t> (space) — 1 — sound</a:t>
+            </a:r>
+            <a:endParaRPr lang="en-US" sz="1200" dirty="0"/>
+          </a:p>
+          <a:p>
+            <a:pPr algn="l" marL="342900" indent="-342900">
               <a:lnSpc>
                 <a:spcPts val="1620"/>
               </a:lnSpc>
               <a:spcAft>
                 <a:spcPts val="300"/>
               </a:spcAft>
-              <a:buNone/>
+              <a:buSzPct val="100000"/>
+              <a:buChar char="•"/>
             </a:pPr>
             <a:r>
               <a:rPr lang="en-US" sz="1200" i="1" dirty="0">
@@ -5363,7 +5367,7 @@
                 <a:ea typeface="Arial" pitchFamily="34" charset="-122"/>
                 <a:cs typeface="Arial" pitchFamily="34" charset="-120"/>
               </a:rPr>
-              <a:t>earth</a:t>
+              <a:t>vāyu</a:t>
             </a:r>
             <a:pPr algn="l" indent="0" marL="0">
               <a:lnSpc>
@@ -5383,16 +5387,20 @@
                 <a:ea typeface="Arial" pitchFamily="34" charset="-122"/>
                 <a:cs typeface="Arial" pitchFamily="34" charset="-120"/>
               </a:rPr>
-              <a:t> has all five qualities? Why does it make sense that </a:t>
-            </a:r>
-            <a:pPr algn="l" indent="0" marL="0">
+              <a:t> (air) — 2 — sound, touch</a:t>
+            </a:r>
+            <a:endParaRPr lang="en-US" sz="1200" dirty="0"/>
+          </a:p>
+          <a:p>
+            <a:pPr algn="l" marL="342900" indent="-342900">
               <a:lnSpc>
                 <a:spcPts val="1620"/>
               </a:lnSpc>
               <a:spcAft>
                 <a:spcPts val="300"/>
               </a:spcAft>
-              <a:buNone/>
+              <a:buSzPct val="100000"/>
+              <a:buChar char="•"/>
             </a:pPr>
             <a:r>
               <a:rPr lang="en-US" sz="1200" i="1" dirty="0">
@@ -5403,7 +5411,7 @@
                 <a:ea typeface="Arial" pitchFamily="34" charset="-122"/>
                 <a:cs typeface="Arial" pitchFamily="34" charset="-120"/>
               </a:rPr>
-              <a:t>space</a:t>
+              <a:t>tejas</a:t>
             </a:r>
             <a:pPr algn="l" indent="0" marL="0">
               <a:lnSpc>
@@ -5423,7 +5431,95 @@
                 <a:ea typeface="Arial" pitchFamily="34" charset="-122"/>
                 <a:cs typeface="Arial" pitchFamily="34" charset="-120"/>
               </a:rPr>
-              <a:t> has only one?"</a:t>
+              <a:t> (fire) — 3 — sound, touch, form</a:t>
+            </a:r>
+            <a:endParaRPr lang="en-US" sz="1200" dirty="0"/>
+          </a:p>
+          <a:p>
+            <a:pPr algn="l" marL="342900" indent="-342900">
+              <a:lnSpc>
+                <a:spcPts val="1620"/>
+              </a:lnSpc>
+              <a:spcAft>
+                <a:spcPts val="300"/>
+              </a:spcAft>
+              <a:buSzPct val="100000"/>
+              <a:buChar char="•"/>
+            </a:pPr>
+            <a:r>
+              <a:rPr lang="en-US" sz="1200" i="1" dirty="0">
+                <a:solidFill>
+                  <a:srgbClr val="1C2833"/>
+                </a:solidFill>
+                <a:latin typeface="Arial" pitchFamily="34" charset="0"/>
+                <a:ea typeface="Arial" pitchFamily="34" charset="-122"/>
+                <a:cs typeface="Arial" pitchFamily="34" charset="-120"/>
+              </a:rPr>
+              <a:t>ap</a:t>
+            </a:r>
+            <a:pPr algn="l" indent="0" marL="0">
+              <a:lnSpc>
+                <a:spcPts val="1620"/>
+              </a:lnSpc>
+              <a:spcAft>
+                <a:spcPts val="300"/>
+              </a:spcAft>
+              <a:buNone/>
+            </a:pPr>
+            <a:r>
+              <a:rPr lang="en-US" sz="1200" dirty="0">
+                <a:solidFill>
+                  <a:srgbClr val="1C2833"/>
+                </a:solidFill>
+                <a:latin typeface="Arial" pitchFamily="34" charset="0"/>
+                <a:ea typeface="Arial" pitchFamily="34" charset="-122"/>
+                <a:cs typeface="Arial" pitchFamily="34" charset="-120"/>
+              </a:rPr>
+              <a:t> (water) — 4 — sound, touch, form, taste</a:t>
+            </a:r>
+            <a:endParaRPr lang="en-US" sz="1200" dirty="0"/>
+          </a:p>
+          <a:p>
+            <a:pPr algn="l" marL="342900" indent="-342900">
+              <a:lnSpc>
+                <a:spcPts val="1620"/>
+              </a:lnSpc>
+              <a:spcAft>
+                <a:spcPts val="300"/>
+              </a:spcAft>
+              <a:buSzPct val="100000"/>
+              <a:buChar char="•"/>
+            </a:pPr>
+            <a:r>
+              <a:rPr lang="en-US" sz="1200" i="1" dirty="0">
+                <a:solidFill>
+                  <a:srgbClr val="1C2833"/>
+                </a:solidFill>
+                <a:latin typeface="Arial" pitchFamily="34" charset="0"/>
+                <a:ea typeface="Arial" pitchFamily="34" charset="-122"/>
+                <a:cs typeface="Arial" pitchFamily="34" charset="-120"/>
+              </a:rPr>
+              <a:t>pṛthvī</a:t>
+            </a:r>
+            <a:pPr algn="l" indent="0" marL="0">
+              <a:lnSpc>
+                <a:spcPts val="1620"/>
+              </a:lnSpc>
+              <a:spcAft>
+                <a:spcPts val="300"/>
+              </a:spcAft>
+              <a:buNone/>
+            </a:pPr>
+            <a:r>
+              <a:rPr lang="en-US" sz="1200" dirty="0">
+                <a:solidFill>
+                  <a:srgbClr val="1C2833"/>
+                </a:solidFill>
+                <a:latin typeface="Arial" pitchFamily="34" charset="0"/>
+                <a:ea typeface="Arial" pitchFamily="34" charset="-122"/>
+                <a:cs typeface="Arial" pitchFamily="34" charset="-120"/>
+              </a:rPr>
+              <a:t> (earth) — 5 — sound, touch, form, taste, smell</a:t>
             </a:r>
             <a:endParaRPr lang="en-US" sz="1200" dirty="0"/>
           </a:p>
@@ -5437,7 +5533,7 @@
         </p:nvSpPr>
         <p:spPr>
           <a:xfrm>
-            <a:off x="406301" y="6666905"/>
+            <a:off x="406301" y="5737175"/>
             <a:ext cx="8498026" cy="426541"/>
           </a:xfrm>
           <a:prstGeom prst="rect">
@@ -5471,53 +5567,7 @@
                 <a:ea typeface="Arial" pitchFamily="34" charset="-122"/>
                 <a:cs typeface="Arial" pitchFamily="34" charset="-120"/>
               </a:rPr>
-              <a:t>– Push toward: solid things are perceivable in </a:t>
-            </a:r>
-            <a:pPr algn="l" indent="0" marL="0">
-              <a:lnSpc>
-                <a:spcPts val="1680"/>
-              </a:lnSpc>
-              <a:spcBef>
-                <a:spcPts val="300"/>
-              </a:spcBef>
-              <a:spcAft>
-                <a:spcPts val="300"/>
-              </a:spcAft>
-              <a:buNone/>
-            </a:pPr>
-            <a:r>
-              <a:rPr lang="en-US" sz="1200" i="1" dirty="0">
-                <a:solidFill>
-                  <a:srgbClr val="1C2833"/>
-                </a:solidFill>
-                <a:latin typeface="Arial" pitchFamily="34" charset="0"/>
-                <a:ea typeface="Arial" pitchFamily="34" charset="-122"/>
-                <a:cs typeface="Arial" pitchFamily="34" charset="-120"/>
-              </a:rPr>
-              <a:t>every</a:t>
-            </a:r>
-            <a:pPr algn="l" indent="0" marL="0">
-              <a:lnSpc>
-                <a:spcPts val="1680"/>
-              </a:lnSpc>
-              <a:spcBef>
-                <a:spcPts val="300"/>
-              </a:spcBef>
-              <a:spcAft>
-                <a:spcPts val="300"/>
-              </a:spcAft>
-              <a:buNone/>
-            </a:pPr>
-            <a:r>
-              <a:rPr lang="en-US" sz="1200" dirty="0">
-                <a:solidFill>
-                  <a:srgbClr val="1C2833"/>
-                </a:solidFill>
-                <a:latin typeface="Arial" pitchFamily="34" charset="0"/>
-                <a:ea typeface="Arial" pitchFamily="34" charset="-122"/>
-                <a:cs typeface="Arial" pitchFamily="34" charset="-120"/>
-              </a:rPr>
-              <a:t> way — you can hear, touch, see, taste, smell soil. Empty space has no smell, taste, form, or touch — but you can hear sound in it.</a:t>
+              <a:t>Source paraphrase: "Earth has five qualities, water has four, fire has three, air has two, and the sky has only one quality, sound."    — Śrīmad-Bhāgavatam 3.26.50</a:t>
             </a:r>
             <a:endParaRPr lang="en-US" sz="1200" dirty="0"/>
           </a:p>
@@ -5531,7 +5581,247 @@
         </p:nvSpPr>
         <p:spPr>
           <a:xfrm>
-            <a:off x="406301" y="7245846"/>
+            <a:off x="634901" y="6252567"/>
+            <a:ext cx="8102798" cy="281880"/>
+          </a:xfrm>
+          <a:prstGeom prst="rect">
+            <a:avLst/>
+          </a:prstGeom>
+          <a:noFill/>
+          <a:ln/>
+        </p:spPr>
+        <p:txBody>
+          <a:bodyPr wrap="square" lIns="0" tIns="0" rIns="0" bIns="0" rtlCol="0" anchor="t"/>
+          <a:lstStyle/>
+          <a:p>
+            <a:pPr algn="l" marL="342900" indent="-342900">
+              <a:lnSpc>
+                <a:spcPts val="1620"/>
+              </a:lnSpc>
+              <a:spcAft>
+                <a:spcPts val="300"/>
+              </a:spcAft>
+              <a:buSzPct val="100000"/>
+              <a:buChar char="•"/>
+            </a:pPr>
+            <a:r>
+              <a:rPr lang="en-US" sz="1200" b="1" dirty="0">
+                <a:solidFill>
+                  <a:srgbClr val="1C2833"/>
+                </a:solidFill>
+                <a:latin typeface="Arial" pitchFamily="34" charset="0"/>
+                <a:ea typeface="Arial" pitchFamily="34" charset="-122"/>
+                <a:cs typeface="Arial" pitchFamily="34" charset="-120"/>
+              </a:rPr>
+              <a:t>Check:</a:t>
+            </a:r>
+            <a:pPr algn="l" indent="0" marL="0">
+              <a:lnSpc>
+                <a:spcPts val="1620"/>
+              </a:lnSpc>
+              <a:spcAft>
+                <a:spcPts val="300"/>
+              </a:spcAft>
+              <a:buNone/>
+            </a:pPr>
+            <a:r>
+              <a:rPr lang="en-US" sz="1200" dirty="0">
+                <a:solidFill>
+                  <a:srgbClr val="1C2833"/>
+                </a:solidFill>
+                <a:latin typeface="Arial" pitchFamily="34" charset="0"/>
+                <a:ea typeface="Arial" pitchFamily="34" charset="-122"/>
+                <a:cs typeface="Arial" pitchFamily="34" charset="-120"/>
+              </a:rPr>
+              <a:t> "Why does it make sense that </a:t>
+            </a:r>
+            <a:pPr algn="l" indent="0" marL="0">
+              <a:lnSpc>
+                <a:spcPts val="1620"/>
+              </a:lnSpc>
+              <a:spcAft>
+                <a:spcPts val="300"/>
+              </a:spcAft>
+              <a:buNone/>
+            </a:pPr>
+            <a:r>
+              <a:rPr lang="en-US" sz="1200" i="1" dirty="0">
+                <a:solidFill>
+                  <a:srgbClr val="1C2833"/>
+                </a:solidFill>
+                <a:latin typeface="Arial" pitchFamily="34" charset="0"/>
+                <a:ea typeface="Arial" pitchFamily="34" charset="-122"/>
+                <a:cs typeface="Arial" pitchFamily="34" charset="-120"/>
+              </a:rPr>
+              <a:t>earth</a:t>
+            </a:r>
+            <a:pPr algn="l" indent="0" marL="0">
+              <a:lnSpc>
+                <a:spcPts val="1620"/>
+              </a:lnSpc>
+              <a:spcAft>
+                <a:spcPts val="300"/>
+              </a:spcAft>
+              <a:buNone/>
+            </a:pPr>
+            <a:r>
+              <a:rPr lang="en-US" sz="1200" dirty="0">
+                <a:solidFill>
+                  <a:srgbClr val="1C2833"/>
+                </a:solidFill>
+                <a:latin typeface="Arial" pitchFamily="34" charset="0"/>
+                <a:ea typeface="Arial" pitchFamily="34" charset="-122"/>
+                <a:cs typeface="Arial" pitchFamily="34" charset="-120"/>
+              </a:rPr>
+              <a:t> has all five qualities? Why does it make sense that </a:t>
+            </a:r>
+            <a:pPr algn="l" indent="0" marL="0">
+              <a:lnSpc>
+                <a:spcPts val="1620"/>
+              </a:lnSpc>
+              <a:spcAft>
+                <a:spcPts val="300"/>
+              </a:spcAft>
+              <a:buNone/>
+            </a:pPr>
+            <a:r>
+              <a:rPr lang="en-US" sz="1200" i="1" dirty="0">
+                <a:solidFill>
+                  <a:srgbClr val="1C2833"/>
+                </a:solidFill>
+                <a:latin typeface="Arial" pitchFamily="34" charset="0"/>
+                <a:ea typeface="Arial" pitchFamily="34" charset="-122"/>
+                <a:cs typeface="Arial" pitchFamily="34" charset="-120"/>
+              </a:rPr>
+              <a:t>space</a:t>
+            </a:r>
+            <a:pPr algn="l" indent="0" marL="0">
+              <a:lnSpc>
+                <a:spcPts val="1620"/>
+              </a:lnSpc>
+              <a:spcAft>
+                <a:spcPts val="300"/>
+              </a:spcAft>
+              <a:buNone/>
+            </a:pPr>
+            <a:r>
+              <a:rPr lang="en-US" sz="1200" dirty="0">
+                <a:solidFill>
+                  <a:srgbClr val="1C2833"/>
+                </a:solidFill>
+                <a:latin typeface="Arial" pitchFamily="34" charset="0"/>
+                <a:ea typeface="Arial" pitchFamily="34" charset="-122"/>
+                <a:cs typeface="Arial" pitchFamily="34" charset="-120"/>
+              </a:rPr>
+              <a:t> has only one?"</a:t>
+            </a:r>
+            <a:endParaRPr lang="en-US" sz="1200" dirty="0"/>
+          </a:p>
+        </p:txBody>
+      </p:sp>
+      <p:sp>
+        <p:nvSpPr>
+          <p:cNvPr id="19" name="Text 17"/>
+          <p:cNvSpPr/>
+          <p:nvPr/>
+        </p:nvSpPr>
+        <p:spPr>
+          <a:xfrm>
+            <a:off x="406301" y="6623298"/>
+            <a:ext cx="8498026" cy="426541"/>
+          </a:xfrm>
+          <a:prstGeom prst="rect">
+            <a:avLst/>
+          </a:prstGeom>
+          <a:noFill/>
+          <a:ln/>
+        </p:spPr>
+        <p:txBody>
+          <a:bodyPr wrap="square" lIns="0" tIns="0" rIns="0" bIns="0" rtlCol="0" anchor="t"/>
+          <a:lstStyle/>
+          <a:p>
+            <a:pPr algn="l" indent="0" marL="0">
+              <a:lnSpc>
+                <a:spcPts val="1680"/>
+              </a:lnSpc>
+              <a:spcBef>
+                <a:spcPts val="300"/>
+              </a:spcBef>
+              <a:spcAft>
+                <a:spcPts val="300"/>
+              </a:spcAft>
+              <a:buNone/>
+            </a:pPr>
+            <a:r>
+              <a:rPr lang="en-US" sz="1200" dirty="0">
+                <a:solidFill>
+                  <a:srgbClr val="1C2833"/>
+                </a:solidFill>
+                <a:latin typeface="Arial" pitchFamily="34" charset="0"/>
+                <a:ea typeface="Arial" pitchFamily="34" charset="-122"/>
+                <a:cs typeface="Arial" pitchFamily="34" charset="-120"/>
+              </a:rPr>
+              <a:t>– Push toward: solid things are perceivable in </a:t>
+            </a:r>
+            <a:pPr algn="l" indent="0" marL="0">
+              <a:lnSpc>
+                <a:spcPts val="1680"/>
+              </a:lnSpc>
+              <a:spcBef>
+                <a:spcPts val="300"/>
+              </a:spcBef>
+              <a:spcAft>
+                <a:spcPts val="300"/>
+              </a:spcAft>
+              <a:buNone/>
+            </a:pPr>
+            <a:r>
+              <a:rPr lang="en-US" sz="1200" i="1" dirty="0">
+                <a:solidFill>
+                  <a:srgbClr val="1C2833"/>
+                </a:solidFill>
+                <a:latin typeface="Arial" pitchFamily="34" charset="0"/>
+                <a:ea typeface="Arial" pitchFamily="34" charset="-122"/>
+                <a:cs typeface="Arial" pitchFamily="34" charset="-120"/>
+              </a:rPr>
+              <a:t>every</a:t>
+            </a:r>
+            <a:pPr algn="l" indent="0" marL="0">
+              <a:lnSpc>
+                <a:spcPts val="1680"/>
+              </a:lnSpc>
+              <a:spcBef>
+                <a:spcPts val="300"/>
+              </a:spcBef>
+              <a:spcAft>
+                <a:spcPts val="300"/>
+              </a:spcAft>
+              <a:buNone/>
+            </a:pPr>
+            <a:r>
+              <a:rPr lang="en-US" sz="1200" dirty="0">
+                <a:solidFill>
+                  <a:srgbClr val="1C2833"/>
+                </a:solidFill>
+                <a:latin typeface="Arial" pitchFamily="34" charset="0"/>
+                <a:ea typeface="Arial" pitchFamily="34" charset="-122"/>
+                <a:cs typeface="Arial" pitchFamily="34" charset="-120"/>
+              </a:rPr>
+              <a:t> way — you can hear, touch, see, taste, smell soil. Empty space has no smell, taste, form, or touch — but you can hear sound in it.</a:t>
+            </a:r>
+            <a:endParaRPr lang="en-US" sz="1200" dirty="0"/>
+          </a:p>
+        </p:txBody>
+      </p:sp>
+      <p:sp>
+        <p:nvSpPr>
+          <p:cNvPr id="20" name="Text 18"/>
+          <p:cNvSpPr/>
+          <p:nvPr/>
+        </p:nvSpPr>
+        <p:spPr>
+          <a:xfrm>
+            <a:off x="406301" y="7202239"/>
             <a:ext cx="8498026" cy="213271"/>
           </a:xfrm>
           <a:prstGeom prst="rect">

--- a/exports/pptx/lessons/middle-module-02-panchabhuta/day-02-creation-sequence.pptx
+++ b/exports/pptx/lessons/middle-module-02-panchabhuta/day-02-creation-sequence.pptx
@@ -18,9 +18,15 @@
     <p:sldId id="266" r:id="rId12"/>
     <p:sldId id="267" r:id="rId13"/>
     <p:sldId id="268" r:id="rId14"/>
+    <p:sldId id="269" r:id="rId15"/>
+    <p:sldId id="270" r:id="rId16"/>
+    <p:sldId id="271" r:id="rId17"/>
+    <p:sldId id="272" r:id="rId18"/>
+    <p:sldId id="273" r:id="rId19"/>
+    <p:sldId id="274" r:id="rId20"/>
   </p:sldIdLst>
   <p:notesMasterIdLst>
-    <p:notesMasterId r:id="rId15"/>
+    <p:notesMasterId r:id="rId21"/>
   </p:notesMasterIdLst>
   <p:sldSz cx="9144000" cy="5143500"/>
   <p:notesSz cx="5143500" cy="9144000"/>
@@ -890,6 +896,534 @@
             <a:fld id="{F7021451-1387-4CA6-816F-3879F97B5CBC}" type="slidenum">
               <a:rPr lang="en-US"/>
               <a:t>13</a:t>
+            </a:fld>
+            <a:endParaRPr lang="en-US"/>
+          </a:p>
+        </p:txBody>
+      </p:sp>
+    </p:spTree>
+    <p:extLst>
+      <p:ext uri="{BB962C8B-B14F-4D97-AF65-F5344CB8AC3E}">
+        <p14:creationId xmlns:p14="http://schemas.microsoft.com/office/powerpoint/2010/main" val="1024086991"/>
+      </p:ext>
+    </p:extLst>
+  </p:cSld>
+  <p:clrMapOvr>
+    <a:masterClrMapping/>
+  </p:clrMapOvr>
+</p:notes>
+</file>
+
+<file path=ppt/notesSlides/notesSlide14.xml><?xml version="1.0" encoding="utf-8"?>
+<p:notes xmlns:a="http://schemas.openxmlformats.org/drawingml/2006/main" xmlns:r="http://schemas.openxmlformats.org/officeDocument/2006/relationships" xmlns:p="http://schemas.openxmlformats.org/presentationml/2006/main">
+  <p:cSld>
+    <p:spTree>
+      <p:nvGrpSpPr>
+        <p:cNvPr id="1" name=""/>
+        <p:cNvGrpSpPr/>
+        <p:nvPr/>
+      </p:nvGrpSpPr>
+      <p:grpSpPr>
+        <a:xfrm>
+          <a:off x="0" y="0"/>
+          <a:ext cx="0" cy="0"/>
+          <a:chOff x="0" y="0"/>
+          <a:chExt cx="0" cy="0"/>
+        </a:xfrm>
+      </p:grpSpPr>
+      <p:sp>
+        <p:nvSpPr>
+          <p:cNvPr id="2" name="Slide Image Placeholder 1"/>
+          <p:cNvSpPr>
+            <a:spLocks noGrp="1" noRot="1" noChangeAspect="1"/>
+          </p:cNvSpPr>
+          <p:nvPr>
+            <p:ph type="sldImg"/>
+          </p:nvPr>
+        </p:nvSpPr>
+        <p:spPr/>
+      </p:sp>
+      <p:sp>
+        <p:nvSpPr>
+          <p:cNvPr id="3" name="Notes Placeholder 2"/>
+          <p:cNvSpPr>
+            <a:spLocks noGrp="1"/>
+          </p:cNvSpPr>
+          <p:nvPr>
+            <p:ph type="body" idx="1"/>
+          </p:nvPr>
+        </p:nvSpPr>
+        <p:spPr/>
+        <p:txBody>
+          <a:bodyPr/>
+          <a:lstStyle/>
+          <a:p>
+            <a:r>
+              <a:rPr lang="en-US" dirty="0"/>
+              <a:t/>
+            </a:r>
+            <a:endParaRPr lang="en-US" dirty="0"/>
+          </a:p>
+        </p:txBody>
+      </p:sp>
+      <p:sp>
+        <p:nvSpPr>
+          <p:cNvPr id="4" name="Slide Number Placeholder 3"/>
+          <p:cNvSpPr>
+            <a:spLocks noGrp="1"/>
+          </p:cNvSpPr>
+          <p:nvPr>
+            <p:ph type="sldNum" sz="quarter" idx="10"/>
+          </p:nvPr>
+        </p:nvSpPr>
+        <p:spPr/>
+        <p:txBody>
+          <a:bodyPr/>
+          <a:lstStyle/>
+          <a:p>
+            <a:fld id="{F7021451-1387-4CA6-816F-3879F97B5CBC}" type="slidenum">
+              <a:rPr lang="en-US"/>
+              <a:t>14</a:t>
+            </a:fld>
+            <a:endParaRPr lang="en-US"/>
+          </a:p>
+        </p:txBody>
+      </p:sp>
+    </p:spTree>
+    <p:extLst>
+      <p:ext uri="{BB962C8B-B14F-4D97-AF65-F5344CB8AC3E}">
+        <p14:creationId xmlns:p14="http://schemas.microsoft.com/office/powerpoint/2010/main" val="1024086991"/>
+      </p:ext>
+    </p:extLst>
+  </p:cSld>
+  <p:clrMapOvr>
+    <a:masterClrMapping/>
+  </p:clrMapOvr>
+</p:notes>
+</file>
+
+<file path=ppt/notesSlides/notesSlide15.xml><?xml version="1.0" encoding="utf-8"?>
+<p:notes xmlns:a="http://schemas.openxmlformats.org/drawingml/2006/main" xmlns:r="http://schemas.openxmlformats.org/officeDocument/2006/relationships" xmlns:p="http://schemas.openxmlformats.org/presentationml/2006/main">
+  <p:cSld>
+    <p:spTree>
+      <p:nvGrpSpPr>
+        <p:cNvPr id="1" name=""/>
+        <p:cNvGrpSpPr/>
+        <p:nvPr/>
+      </p:nvGrpSpPr>
+      <p:grpSpPr>
+        <a:xfrm>
+          <a:off x="0" y="0"/>
+          <a:ext cx="0" cy="0"/>
+          <a:chOff x="0" y="0"/>
+          <a:chExt cx="0" cy="0"/>
+        </a:xfrm>
+      </p:grpSpPr>
+      <p:sp>
+        <p:nvSpPr>
+          <p:cNvPr id="2" name="Slide Image Placeholder 1"/>
+          <p:cNvSpPr>
+            <a:spLocks noGrp="1" noRot="1" noChangeAspect="1"/>
+          </p:cNvSpPr>
+          <p:nvPr>
+            <p:ph type="sldImg"/>
+          </p:nvPr>
+        </p:nvSpPr>
+        <p:spPr/>
+      </p:sp>
+      <p:sp>
+        <p:nvSpPr>
+          <p:cNvPr id="3" name="Notes Placeholder 2"/>
+          <p:cNvSpPr>
+            <a:spLocks noGrp="1"/>
+          </p:cNvSpPr>
+          <p:nvPr>
+            <p:ph type="body" idx="1"/>
+          </p:nvPr>
+        </p:nvSpPr>
+        <p:spPr/>
+        <p:txBody>
+          <a:bodyPr/>
+          <a:lstStyle/>
+          <a:p>
+            <a:r>
+              <a:rPr lang="en-US" dirty="0"/>
+              <a:t/>
+            </a:r>
+            <a:endParaRPr lang="en-US" dirty="0"/>
+          </a:p>
+        </p:txBody>
+      </p:sp>
+      <p:sp>
+        <p:nvSpPr>
+          <p:cNvPr id="4" name="Slide Number Placeholder 3"/>
+          <p:cNvSpPr>
+            <a:spLocks noGrp="1"/>
+          </p:cNvSpPr>
+          <p:nvPr>
+            <p:ph type="sldNum" sz="quarter" idx="10"/>
+          </p:nvPr>
+        </p:nvSpPr>
+        <p:spPr/>
+        <p:txBody>
+          <a:bodyPr/>
+          <a:lstStyle/>
+          <a:p>
+            <a:fld id="{F7021451-1387-4CA6-816F-3879F97B5CBC}" type="slidenum">
+              <a:rPr lang="en-US"/>
+              <a:t>15</a:t>
+            </a:fld>
+            <a:endParaRPr lang="en-US"/>
+          </a:p>
+        </p:txBody>
+      </p:sp>
+    </p:spTree>
+    <p:extLst>
+      <p:ext uri="{BB962C8B-B14F-4D97-AF65-F5344CB8AC3E}">
+        <p14:creationId xmlns:p14="http://schemas.microsoft.com/office/powerpoint/2010/main" val="1024086991"/>
+      </p:ext>
+    </p:extLst>
+  </p:cSld>
+  <p:clrMapOvr>
+    <a:masterClrMapping/>
+  </p:clrMapOvr>
+</p:notes>
+</file>
+
+<file path=ppt/notesSlides/notesSlide16.xml><?xml version="1.0" encoding="utf-8"?>
+<p:notes xmlns:a="http://schemas.openxmlformats.org/drawingml/2006/main" xmlns:r="http://schemas.openxmlformats.org/officeDocument/2006/relationships" xmlns:p="http://schemas.openxmlformats.org/presentationml/2006/main">
+  <p:cSld>
+    <p:spTree>
+      <p:nvGrpSpPr>
+        <p:cNvPr id="1" name=""/>
+        <p:cNvGrpSpPr/>
+        <p:nvPr/>
+      </p:nvGrpSpPr>
+      <p:grpSpPr>
+        <a:xfrm>
+          <a:off x="0" y="0"/>
+          <a:ext cx="0" cy="0"/>
+          <a:chOff x="0" y="0"/>
+          <a:chExt cx="0" cy="0"/>
+        </a:xfrm>
+      </p:grpSpPr>
+      <p:sp>
+        <p:nvSpPr>
+          <p:cNvPr id="2" name="Slide Image Placeholder 1"/>
+          <p:cNvSpPr>
+            <a:spLocks noGrp="1" noRot="1" noChangeAspect="1"/>
+          </p:cNvSpPr>
+          <p:nvPr>
+            <p:ph type="sldImg"/>
+          </p:nvPr>
+        </p:nvSpPr>
+        <p:spPr/>
+      </p:sp>
+      <p:sp>
+        <p:nvSpPr>
+          <p:cNvPr id="3" name="Notes Placeholder 2"/>
+          <p:cNvSpPr>
+            <a:spLocks noGrp="1"/>
+          </p:cNvSpPr>
+          <p:nvPr>
+            <p:ph type="body" idx="1"/>
+          </p:nvPr>
+        </p:nvSpPr>
+        <p:spPr/>
+        <p:txBody>
+          <a:bodyPr/>
+          <a:lstStyle/>
+          <a:p>
+            <a:r>
+              <a:rPr lang="en-US" dirty="0"/>
+              <a:t/>
+            </a:r>
+            <a:endParaRPr lang="en-US" dirty="0"/>
+          </a:p>
+        </p:txBody>
+      </p:sp>
+      <p:sp>
+        <p:nvSpPr>
+          <p:cNvPr id="4" name="Slide Number Placeholder 3"/>
+          <p:cNvSpPr>
+            <a:spLocks noGrp="1"/>
+          </p:cNvSpPr>
+          <p:nvPr>
+            <p:ph type="sldNum" sz="quarter" idx="10"/>
+          </p:nvPr>
+        </p:nvSpPr>
+        <p:spPr/>
+        <p:txBody>
+          <a:bodyPr/>
+          <a:lstStyle/>
+          <a:p>
+            <a:fld id="{F7021451-1387-4CA6-816F-3879F97B5CBC}" type="slidenum">
+              <a:rPr lang="en-US"/>
+              <a:t>16</a:t>
+            </a:fld>
+            <a:endParaRPr lang="en-US"/>
+          </a:p>
+        </p:txBody>
+      </p:sp>
+    </p:spTree>
+    <p:extLst>
+      <p:ext uri="{BB962C8B-B14F-4D97-AF65-F5344CB8AC3E}">
+        <p14:creationId xmlns:p14="http://schemas.microsoft.com/office/powerpoint/2010/main" val="1024086991"/>
+      </p:ext>
+    </p:extLst>
+  </p:cSld>
+  <p:clrMapOvr>
+    <a:masterClrMapping/>
+  </p:clrMapOvr>
+</p:notes>
+</file>
+
+<file path=ppt/notesSlides/notesSlide17.xml><?xml version="1.0" encoding="utf-8"?>
+<p:notes xmlns:a="http://schemas.openxmlformats.org/drawingml/2006/main" xmlns:r="http://schemas.openxmlformats.org/officeDocument/2006/relationships" xmlns:p="http://schemas.openxmlformats.org/presentationml/2006/main">
+  <p:cSld>
+    <p:spTree>
+      <p:nvGrpSpPr>
+        <p:cNvPr id="1" name=""/>
+        <p:cNvGrpSpPr/>
+        <p:nvPr/>
+      </p:nvGrpSpPr>
+      <p:grpSpPr>
+        <a:xfrm>
+          <a:off x="0" y="0"/>
+          <a:ext cx="0" cy="0"/>
+          <a:chOff x="0" y="0"/>
+          <a:chExt cx="0" cy="0"/>
+        </a:xfrm>
+      </p:grpSpPr>
+      <p:sp>
+        <p:nvSpPr>
+          <p:cNvPr id="2" name="Slide Image Placeholder 1"/>
+          <p:cNvSpPr>
+            <a:spLocks noGrp="1" noRot="1" noChangeAspect="1"/>
+          </p:cNvSpPr>
+          <p:nvPr>
+            <p:ph type="sldImg"/>
+          </p:nvPr>
+        </p:nvSpPr>
+        <p:spPr/>
+      </p:sp>
+      <p:sp>
+        <p:nvSpPr>
+          <p:cNvPr id="3" name="Notes Placeholder 2"/>
+          <p:cNvSpPr>
+            <a:spLocks noGrp="1"/>
+          </p:cNvSpPr>
+          <p:nvPr>
+            <p:ph type="body" idx="1"/>
+          </p:nvPr>
+        </p:nvSpPr>
+        <p:spPr/>
+        <p:txBody>
+          <a:bodyPr/>
+          <a:lstStyle/>
+          <a:p>
+            <a:r>
+              <a:rPr lang="en-US" dirty="0"/>
+              <a:t/>
+            </a:r>
+            <a:endParaRPr lang="en-US" dirty="0"/>
+          </a:p>
+        </p:txBody>
+      </p:sp>
+      <p:sp>
+        <p:nvSpPr>
+          <p:cNvPr id="4" name="Slide Number Placeholder 3"/>
+          <p:cNvSpPr>
+            <a:spLocks noGrp="1"/>
+          </p:cNvSpPr>
+          <p:nvPr>
+            <p:ph type="sldNum" sz="quarter" idx="10"/>
+          </p:nvPr>
+        </p:nvSpPr>
+        <p:spPr/>
+        <p:txBody>
+          <a:bodyPr/>
+          <a:lstStyle/>
+          <a:p>
+            <a:fld id="{F7021451-1387-4CA6-816F-3879F97B5CBC}" type="slidenum">
+              <a:rPr lang="en-US"/>
+              <a:t>17</a:t>
+            </a:fld>
+            <a:endParaRPr lang="en-US"/>
+          </a:p>
+        </p:txBody>
+      </p:sp>
+    </p:spTree>
+    <p:extLst>
+      <p:ext uri="{BB962C8B-B14F-4D97-AF65-F5344CB8AC3E}">
+        <p14:creationId xmlns:p14="http://schemas.microsoft.com/office/powerpoint/2010/main" val="1024086991"/>
+      </p:ext>
+    </p:extLst>
+  </p:cSld>
+  <p:clrMapOvr>
+    <a:masterClrMapping/>
+  </p:clrMapOvr>
+</p:notes>
+</file>
+
+<file path=ppt/notesSlides/notesSlide18.xml><?xml version="1.0" encoding="utf-8"?>
+<p:notes xmlns:a="http://schemas.openxmlformats.org/drawingml/2006/main" xmlns:r="http://schemas.openxmlformats.org/officeDocument/2006/relationships" xmlns:p="http://schemas.openxmlformats.org/presentationml/2006/main">
+  <p:cSld>
+    <p:spTree>
+      <p:nvGrpSpPr>
+        <p:cNvPr id="1" name=""/>
+        <p:cNvGrpSpPr/>
+        <p:nvPr/>
+      </p:nvGrpSpPr>
+      <p:grpSpPr>
+        <a:xfrm>
+          <a:off x="0" y="0"/>
+          <a:ext cx="0" cy="0"/>
+          <a:chOff x="0" y="0"/>
+          <a:chExt cx="0" cy="0"/>
+        </a:xfrm>
+      </p:grpSpPr>
+      <p:sp>
+        <p:nvSpPr>
+          <p:cNvPr id="2" name="Slide Image Placeholder 1"/>
+          <p:cNvSpPr>
+            <a:spLocks noGrp="1" noRot="1" noChangeAspect="1"/>
+          </p:cNvSpPr>
+          <p:nvPr>
+            <p:ph type="sldImg"/>
+          </p:nvPr>
+        </p:nvSpPr>
+        <p:spPr/>
+      </p:sp>
+      <p:sp>
+        <p:nvSpPr>
+          <p:cNvPr id="3" name="Notes Placeholder 2"/>
+          <p:cNvSpPr>
+            <a:spLocks noGrp="1"/>
+          </p:cNvSpPr>
+          <p:nvPr>
+            <p:ph type="body" idx="1"/>
+          </p:nvPr>
+        </p:nvSpPr>
+        <p:spPr/>
+        <p:txBody>
+          <a:bodyPr/>
+          <a:lstStyle/>
+          <a:p>
+            <a:r>
+              <a:rPr lang="en-US" dirty="0"/>
+              <a:t/>
+            </a:r>
+            <a:endParaRPr lang="en-US" dirty="0"/>
+          </a:p>
+        </p:txBody>
+      </p:sp>
+      <p:sp>
+        <p:nvSpPr>
+          <p:cNvPr id="4" name="Slide Number Placeholder 3"/>
+          <p:cNvSpPr>
+            <a:spLocks noGrp="1"/>
+          </p:cNvSpPr>
+          <p:nvPr>
+            <p:ph type="sldNum" sz="quarter" idx="10"/>
+          </p:nvPr>
+        </p:nvSpPr>
+        <p:spPr/>
+        <p:txBody>
+          <a:bodyPr/>
+          <a:lstStyle/>
+          <a:p>
+            <a:fld id="{F7021451-1387-4CA6-816F-3879F97B5CBC}" type="slidenum">
+              <a:rPr lang="en-US"/>
+              <a:t>18</a:t>
+            </a:fld>
+            <a:endParaRPr lang="en-US"/>
+          </a:p>
+        </p:txBody>
+      </p:sp>
+    </p:spTree>
+    <p:extLst>
+      <p:ext uri="{BB962C8B-B14F-4D97-AF65-F5344CB8AC3E}">
+        <p14:creationId xmlns:p14="http://schemas.microsoft.com/office/powerpoint/2010/main" val="1024086991"/>
+      </p:ext>
+    </p:extLst>
+  </p:cSld>
+  <p:clrMapOvr>
+    <a:masterClrMapping/>
+  </p:clrMapOvr>
+</p:notes>
+</file>
+
+<file path=ppt/notesSlides/notesSlide19.xml><?xml version="1.0" encoding="utf-8"?>
+<p:notes xmlns:a="http://schemas.openxmlformats.org/drawingml/2006/main" xmlns:r="http://schemas.openxmlformats.org/officeDocument/2006/relationships" xmlns:p="http://schemas.openxmlformats.org/presentationml/2006/main">
+  <p:cSld>
+    <p:spTree>
+      <p:nvGrpSpPr>
+        <p:cNvPr id="1" name=""/>
+        <p:cNvGrpSpPr/>
+        <p:nvPr/>
+      </p:nvGrpSpPr>
+      <p:grpSpPr>
+        <a:xfrm>
+          <a:off x="0" y="0"/>
+          <a:ext cx="0" cy="0"/>
+          <a:chOff x="0" y="0"/>
+          <a:chExt cx="0" cy="0"/>
+        </a:xfrm>
+      </p:grpSpPr>
+      <p:sp>
+        <p:nvSpPr>
+          <p:cNvPr id="2" name="Slide Image Placeholder 1"/>
+          <p:cNvSpPr>
+            <a:spLocks noGrp="1" noRot="1" noChangeAspect="1"/>
+          </p:cNvSpPr>
+          <p:nvPr>
+            <p:ph type="sldImg"/>
+          </p:nvPr>
+        </p:nvSpPr>
+        <p:spPr/>
+      </p:sp>
+      <p:sp>
+        <p:nvSpPr>
+          <p:cNvPr id="3" name="Notes Placeholder 2"/>
+          <p:cNvSpPr>
+            <a:spLocks noGrp="1"/>
+          </p:cNvSpPr>
+          <p:nvPr>
+            <p:ph type="body" idx="1"/>
+          </p:nvPr>
+        </p:nvSpPr>
+        <p:spPr/>
+        <p:txBody>
+          <a:bodyPr/>
+          <a:lstStyle/>
+          <a:p>
+            <a:r>
+              <a:rPr lang="en-US" dirty="0"/>
+              <a:t/>
+            </a:r>
+            <a:endParaRPr lang="en-US" dirty="0"/>
+          </a:p>
+        </p:txBody>
+      </p:sp>
+      <p:sp>
+        <p:nvSpPr>
+          <p:cNvPr id="4" name="Slide Number Placeholder 3"/>
+          <p:cNvSpPr>
+            <a:spLocks noGrp="1"/>
+          </p:cNvSpPr>
+          <p:nvPr>
+            <p:ph type="sldNum" sz="quarter" idx="10"/>
+          </p:nvPr>
+        </p:nvSpPr>
+        <p:spPr/>
+        <p:txBody>
+          <a:bodyPr/>
+          <a:lstStyle/>
+          <a:p>
+            <a:fld id="{F7021451-1387-4CA6-816F-3879F97B5CBC}" type="slidenum">
+              <a:rPr lang="en-US"/>
+              <a:t>19</a:t>
             </a:fld>
             <a:endParaRPr lang="en-US"/>
           </a:p>
@@ -2189,102 +2723,6 @@
         </p:nvSpPr>
         <p:spPr>
           <a:xfrm>
-            <a:off x="406301" y="1223963"/>
-            <a:ext cx="8498026" cy="274290"/>
-          </a:xfrm>
-          <a:prstGeom prst="rect">
-            <a:avLst/>
-          </a:prstGeom>
-          <a:noFill/>
-          <a:ln/>
-        </p:spPr>
-        <p:txBody>
-          <a:bodyPr wrap="square" lIns="0" tIns="0" rIns="0" bIns="0" rtlCol="0" anchor="t"/>
-          <a:lstStyle/>
-          <a:p>
-            <a:pPr algn="l" indent="0" marL="0">
-              <a:lnSpc>
-                <a:spcPts val="2160"/>
-              </a:lnSpc>
-              <a:spcBef>
-                <a:spcPts val="600"/>
-              </a:spcBef>
-              <a:spcAft>
-                <a:spcPts val="800"/>
-              </a:spcAft>
-              <a:buNone/>
-            </a:pPr>
-            <a:r>
-              <a:rPr lang="en-US" sz="1800" b="1" dirty="0">
-                <a:solidFill>
-                  <a:srgbClr val="FE4447"/>
-                </a:solidFill>
-                <a:latin typeface="Georgia" pitchFamily="34" charset="0"/>
-                <a:ea typeface="Georgia" pitchFamily="34" charset="-122"/>
-                <a:cs typeface="Georgia" pitchFamily="34" charset="-120"/>
-              </a:rPr>
-              <a:t>Learning objective</a:t>
-            </a:r>
-            <a:endParaRPr lang="en-US" sz="1800" dirty="0"/>
-          </a:p>
-        </p:txBody>
-      </p:sp>
-      <p:sp>
-        <p:nvSpPr>
-          <p:cNvPr id="6" name="Text 4"/>
-          <p:cNvSpPr/>
-          <p:nvPr/>
-        </p:nvSpPr>
-        <p:spPr>
-          <a:xfrm>
-            <a:off x="406301" y="1637854"/>
-            <a:ext cx="8498026" cy="426541"/>
-          </a:xfrm>
-          <a:prstGeom prst="rect">
-            <a:avLst/>
-          </a:prstGeom>
-          <a:noFill/>
-          <a:ln/>
-        </p:spPr>
-        <p:txBody>
-          <a:bodyPr wrap="square" lIns="0" tIns="0" rIns="0" bIns="0" rtlCol="0" anchor="t"/>
-          <a:lstStyle/>
-          <a:p>
-            <a:pPr algn="l" indent="0" marL="0">
-              <a:lnSpc>
-                <a:spcPts val="1680"/>
-              </a:lnSpc>
-              <a:spcBef>
-                <a:spcPts val="300"/>
-              </a:spcBef>
-              <a:spcAft>
-                <a:spcPts val="300"/>
-              </a:spcAft>
-              <a:buNone/>
-            </a:pPr>
-            <a:r>
-              <a:rPr lang="en-US" sz="1200" dirty="0">
-                <a:solidFill>
-                  <a:srgbClr val="1C2833"/>
-                </a:solidFill>
-                <a:latin typeface="Arial" pitchFamily="34" charset="0"/>
-                <a:ea typeface="Arial" pitchFamily="34" charset="-122"/>
-                <a:cs typeface="Arial" pitchFamily="34" charset="-120"/>
-              </a:rPr>
-              <a:t>By the end of this lesson, students will draw a diagram showing the five elements emerging in the Sāṅkhya creation sequence (space → air → fire → water → earth) and label what new quality each one adds.</a:t>
-            </a:r>
-            <a:endParaRPr lang="en-US" sz="1200" dirty="0"/>
-          </a:p>
-        </p:txBody>
-      </p:sp>
-      <p:sp>
-        <p:nvSpPr>
-          <p:cNvPr id="7" name="Text 5"/>
-          <p:cNvSpPr/>
-          <p:nvPr/>
-        </p:nvSpPr>
-        <p:spPr>
-          <a:xfrm>
             <a:off x="406301" y="4434929"/>
             <a:ext cx="8498026" cy="213271"/>
           </a:xfrm>
@@ -2429,7 +2867,7 @@
                 <a:ea typeface="Georgia" pitchFamily="34" charset="-122"/>
                 <a:cs typeface="Georgia" pitchFamily="34" charset="-120"/>
               </a:rPr>
-              <a:t>Homework</a:t>
+              <a:t>Core (20 min) (cont.)</a:t>
             </a:r>
             <a:endParaRPr lang="en-US" sz="1800" dirty="0"/>
           </a:p>
@@ -2443,8 +2881,8 @@
         </p:nvSpPr>
         <p:spPr>
           <a:xfrm>
-            <a:off x="406301" y="870942"/>
-            <a:ext cx="8498026" cy="426541"/>
+            <a:off x="634901" y="883593"/>
+            <a:ext cx="8102798" cy="1257002"/>
           </a:xfrm>
           <a:prstGeom prst="rect">
             <a:avLst/>
@@ -2456,13 +2894,31 @@
           <a:bodyPr wrap="square" lIns="0" tIns="0" rIns="0" bIns="0" rtlCol="0" anchor="t"/>
           <a:lstStyle/>
           <a:p>
-            <a:pPr algn="l" indent="0" marL="0">
-              <a:lnSpc>
-                <a:spcPts val="1680"/>
-              </a:lnSpc>
-              <a:spcBef>
-                <a:spcPts val="300"/>
-              </a:spcBef>
+            <a:pPr algn="l" marL="342900" indent="-342900">
+              <a:lnSpc>
+                <a:spcPts val="1620"/>
+              </a:lnSpc>
+              <a:spcAft>
+                <a:spcPts val="300"/>
+              </a:spcAft>
+              <a:buSzPct val="100000"/>
+              <a:buChar char="•"/>
+            </a:pPr>
+            <a:r>
+              <a:rPr lang="en-US" sz="1200" i="1" dirty="0">
+                <a:solidFill>
+                  <a:srgbClr val="1C2833"/>
+                </a:solidFill>
+                <a:latin typeface="Arial" pitchFamily="34" charset="0"/>
+                <a:ea typeface="Arial" pitchFamily="34" charset="-122"/>
+                <a:cs typeface="Arial" pitchFamily="34" charset="-120"/>
+              </a:rPr>
+              <a:t>ākāśa</a:t>
+            </a:r>
+            <a:pPr algn="l" indent="0" marL="0">
+              <a:lnSpc>
+                <a:spcPts val="1620"/>
+              </a:lnSpc>
               <a:spcAft>
                 <a:spcPts val="300"/>
               </a:spcAft>
@@ -2477,19 +2933,20 @@
                 <a:ea typeface="Arial" pitchFamily="34" charset="-122"/>
                 <a:cs typeface="Arial" pitchFamily="34" charset="-120"/>
               </a:rPr>
-              <a:t>– Find ONE thing in your home that perfectly demonstrates the "all five qualities" of </a:t>
-            </a:r>
-            <a:pPr algn="l" indent="0" marL="0">
-              <a:lnSpc>
-                <a:spcPts val="1680"/>
-              </a:lnSpc>
-              <a:spcBef>
-                <a:spcPts val="300"/>
-              </a:spcBef>
-              <a:spcAft>
-                <a:spcPts val="300"/>
-              </a:spcAft>
-              <a:buNone/>
+              <a:t> (space) — 1 — sound</a:t>
+            </a:r>
+            <a:endParaRPr lang="en-US" sz="1200" dirty="0"/>
+          </a:p>
+          <a:p>
+            <a:pPr algn="l" marL="342900" indent="-342900">
+              <a:lnSpc>
+                <a:spcPts val="1620"/>
+              </a:lnSpc>
+              <a:spcAft>
+                <a:spcPts val="300"/>
+              </a:spcAft>
+              <a:buSzPct val="100000"/>
+              <a:buChar char="•"/>
             </a:pPr>
             <a:r>
               <a:rPr lang="en-US" sz="1200" i="1" dirty="0">
@@ -2500,15 +2957,144 @@
                 <a:ea typeface="Arial" pitchFamily="34" charset="-122"/>
                 <a:cs typeface="Arial" pitchFamily="34" charset="-120"/>
               </a:rPr>
+              <a:t>vāyu</a:t>
+            </a:r>
+            <a:pPr algn="l" indent="0" marL="0">
+              <a:lnSpc>
+                <a:spcPts val="1620"/>
+              </a:lnSpc>
+              <a:spcAft>
+                <a:spcPts val="300"/>
+              </a:spcAft>
+              <a:buNone/>
+            </a:pPr>
+            <a:r>
+              <a:rPr lang="en-US" sz="1200" dirty="0">
+                <a:solidFill>
+                  <a:srgbClr val="1C2833"/>
+                </a:solidFill>
+                <a:latin typeface="Arial" pitchFamily="34" charset="0"/>
+                <a:ea typeface="Arial" pitchFamily="34" charset="-122"/>
+                <a:cs typeface="Arial" pitchFamily="34" charset="-120"/>
+              </a:rPr>
+              <a:t> (air) — 2 — sound, touch</a:t>
+            </a:r>
+            <a:endParaRPr lang="en-US" sz="1200" dirty="0"/>
+          </a:p>
+          <a:p>
+            <a:pPr algn="l" marL="342900" indent="-342900">
+              <a:lnSpc>
+                <a:spcPts val="1620"/>
+              </a:lnSpc>
+              <a:spcAft>
+                <a:spcPts val="300"/>
+              </a:spcAft>
+              <a:buSzPct val="100000"/>
+              <a:buChar char="•"/>
+            </a:pPr>
+            <a:r>
+              <a:rPr lang="en-US" sz="1200" i="1" dirty="0">
+                <a:solidFill>
+                  <a:srgbClr val="1C2833"/>
+                </a:solidFill>
+                <a:latin typeface="Arial" pitchFamily="34" charset="0"/>
+                <a:ea typeface="Arial" pitchFamily="34" charset="-122"/>
+                <a:cs typeface="Arial" pitchFamily="34" charset="-120"/>
+              </a:rPr>
+              <a:t>tejas</a:t>
+            </a:r>
+            <a:pPr algn="l" indent="0" marL="0">
+              <a:lnSpc>
+                <a:spcPts val="1620"/>
+              </a:lnSpc>
+              <a:spcAft>
+                <a:spcPts val="300"/>
+              </a:spcAft>
+              <a:buNone/>
+            </a:pPr>
+            <a:r>
+              <a:rPr lang="en-US" sz="1200" dirty="0">
+                <a:solidFill>
+                  <a:srgbClr val="1C2833"/>
+                </a:solidFill>
+                <a:latin typeface="Arial" pitchFamily="34" charset="0"/>
+                <a:ea typeface="Arial" pitchFamily="34" charset="-122"/>
+                <a:cs typeface="Arial" pitchFamily="34" charset="-120"/>
+              </a:rPr>
+              <a:t> (fire) — 3 — sound, touch, form</a:t>
+            </a:r>
+            <a:endParaRPr lang="en-US" sz="1200" dirty="0"/>
+          </a:p>
+          <a:p>
+            <a:pPr algn="l" marL="342900" indent="-342900">
+              <a:lnSpc>
+                <a:spcPts val="1620"/>
+              </a:lnSpc>
+              <a:spcAft>
+                <a:spcPts val="300"/>
+              </a:spcAft>
+              <a:buSzPct val="100000"/>
+              <a:buChar char="•"/>
+            </a:pPr>
+            <a:r>
+              <a:rPr lang="en-US" sz="1200" i="1" dirty="0">
+                <a:solidFill>
+                  <a:srgbClr val="1C2833"/>
+                </a:solidFill>
+                <a:latin typeface="Arial" pitchFamily="34" charset="0"/>
+                <a:ea typeface="Arial" pitchFamily="34" charset="-122"/>
+                <a:cs typeface="Arial" pitchFamily="34" charset="-120"/>
+              </a:rPr>
+              <a:t>ap</a:t>
+            </a:r>
+            <a:pPr algn="l" indent="0" marL="0">
+              <a:lnSpc>
+                <a:spcPts val="1620"/>
+              </a:lnSpc>
+              <a:spcAft>
+                <a:spcPts val="300"/>
+              </a:spcAft>
+              <a:buNone/>
+            </a:pPr>
+            <a:r>
+              <a:rPr lang="en-US" sz="1200" dirty="0">
+                <a:solidFill>
+                  <a:srgbClr val="1C2833"/>
+                </a:solidFill>
+                <a:latin typeface="Arial" pitchFamily="34" charset="0"/>
+                <a:ea typeface="Arial" pitchFamily="34" charset="-122"/>
+                <a:cs typeface="Arial" pitchFamily="34" charset="-120"/>
+              </a:rPr>
+              <a:t> (water) — 4 — sound, touch, form, taste</a:t>
+            </a:r>
+            <a:endParaRPr lang="en-US" sz="1200" dirty="0"/>
+          </a:p>
+          <a:p>
+            <a:pPr algn="l" marL="342900" indent="-342900">
+              <a:lnSpc>
+                <a:spcPts val="1620"/>
+              </a:lnSpc>
+              <a:spcAft>
+                <a:spcPts val="300"/>
+              </a:spcAft>
+              <a:buSzPct val="100000"/>
+              <a:buChar char="•"/>
+            </a:pPr>
+            <a:r>
+              <a:rPr lang="en-US" sz="1200" i="1" dirty="0">
+                <a:solidFill>
+                  <a:srgbClr val="1C2833"/>
+                </a:solidFill>
+                <a:latin typeface="Arial" pitchFamily="34" charset="0"/>
+                <a:ea typeface="Arial" pitchFamily="34" charset="-122"/>
+                <a:cs typeface="Arial" pitchFamily="34" charset="-120"/>
+              </a:rPr>
               <a:t>pṛthvī</a:t>
             </a:r>
             <a:pPr algn="l" indent="0" marL="0">
               <a:lnSpc>
-                <a:spcPts val="1680"/>
-              </a:lnSpc>
-              <a:spcBef>
-                <a:spcPts val="300"/>
-              </a:spcBef>
+                <a:spcPts val="1620"/>
+              </a:lnSpc>
               <a:spcAft>
                 <a:spcPts val="300"/>
               </a:spcAft>
@@ -2523,7 +3109,7 @@
                 <a:ea typeface="Arial" pitchFamily="34" charset="-122"/>
                 <a:cs typeface="Arial" pitchFamily="34" charset="-120"/>
               </a:rPr>
-              <a:t>. You should be able to hear it, touch it, see it, taste it (or imagine the taste), and smell it. Bring a 2-sentence description.</a:t>
+              <a:t> (earth) — 5 — sound, touch, form, taste, smell</a:t>
             </a:r>
             <a:endParaRPr lang="en-US" sz="1200" dirty="0"/>
           </a:p>
@@ -2681,7 +3267,7 @@
                 <a:ea typeface="Georgia" pitchFamily="34" charset="-122"/>
                 <a:cs typeface="Georgia" pitchFamily="34" charset="-120"/>
               </a:rPr>
-              <a:t>Differentiation</a:t>
+              <a:t>Core (20 min) (cont.)</a:t>
             </a:r>
             <a:endParaRPr lang="en-US" sz="1800" dirty="0"/>
           </a:p>
@@ -2695,8 +3281,8 @@
         </p:nvSpPr>
         <p:spPr>
           <a:xfrm>
-            <a:off x="634901" y="883593"/>
-            <a:ext cx="8102798" cy="937022"/>
+            <a:off x="406301" y="870942"/>
+            <a:ext cx="8498026" cy="426541"/>
           </a:xfrm>
           <a:prstGeom prst="rect">
             <a:avLst/>
@@ -2708,6 +3294,54 @@
           <a:bodyPr wrap="square" lIns="0" tIns="0" rIns="0" bIns="0" rtlCol="0" anchor="t"/>
           <a:lstStyle/>
           <a:p>
+            <a:pPr algn="l" indent="0" marL="0">
+              <a:lnSpc>
+                <a:spcPts val="1680"/>
+              </a:lnSpc>
+              <a:spcBef>
+                <a:spcPts val="300"/>
+              </a:spcBef>
+              <a:spcAft>
+                <a:spcPts val="300"/>
+              </a:spcAft>
+              <a:buNone/>
+            </a:pPr>
+            <a:r>
+              <a:rPr lang="en-US" sz="1200" dirty="0">
+                <a:solidFill>
+                  <a:srgbClr val="1C2833"/>
+                </a:solidFill>
+                <a:latin typeface="Arial" pitchFamily="34" charset="0"/>
+                <a:ea typeface="Arial" pitchFamily="34" charset="-122"/>
+                <a:cs typeface="Arial" pitchFamily="34" charset="-120"/>
+              </a:rPr>
+              <a:t>Source paraphrase: "Earth has five qualities, water has four, fire has three, air has two, and the sky has only one quality, sound."    — Śrīmad-Bhāgavatam 3.26.50</a:t>
+            </a:r>
+            <a:endParaRPr lang="en-US" sz="1200" dirty="0"/>
+          </a:p>
+        </p:txBody>
+      </p:sp>
+      <p:sp>
+        <p:nvSpPr>
+          <p:cNvPr id="5" name="Text 3"/>
+          <p:cNvSpPr/>
+          <p:nvPr/>
+        </p:nvSpPr>
+        <p:spPr>
+          <a:xfrm>
+            <a:off x="634901" y="1386334"/>
+            <a:ext cx="8102798" cy="281880"/>
+          </a:xfrm>
+          <a:prstGeom prst="rect">
+            <a:avLst/>
+          </a:prstGeom>
+          <a:noFill/>
+          <a:ln/>
+        </p:spPr>
+        <p:txBody>
+          <a:bodyPr wrap="square" lIns="0" tIns="0" rIns="0" bIns="0" rtlCol="0" anchor="t"/>
+          <a:lstStyle/>
+          <a:p>
             <a:pPr algn="l" marL="342900" indent="-342900">
               <a:lnSpc>
                 <a:spcPts val="1620"/>
@@ -2727,7 +3361,7 @@
                 <a:ea typeface="Arial" pitchFamily="34" charset="-122"/>
                 <a:cs typeface="Arial" pitchFamily="34" charset="-120"/>
               </a:rPr>
-              <a:t>One tier up:</a:t>
+              <a:t>Check:</a:t>
             </a:r>
             <a:pPr algn="l" indent="0" marL="0">
               <a:lnSpc>
@@ -2747,10 +3381,112 @@
                 <a:ea typeface="Arial" pitchFamily="34" charset="-122"/>
                 <a:cs typeface="Arial" pitchFamily="34" charset="-120"/>
               </a:rPr>
-              <a:t> Modern physics has electric and magnetic fields — would they fit into this sequence? If so, where? Defend your answer.</a:t>
+              <a:t> "Why does it make sense that </a:t>
+            </a:r>
+            <a:pPr algn="l" indent="0" marL="0">
+              <a:lnSpc>
+                <a:spcPts val="1620"/>
+              </a:lnSpc>
+              <a:spcAft>
+                <a:spcPts val="300"/>
+              </a:spcAft>
+              <a:buNone/>
+            </a:pPr>
+            <a:r>
+              <a:rPr lang="en-US" sz="1200" i="1" dirty="0">
+                <a:solidFill>
+                  <a:srgbClr val="1C2833"/>
+                </a:solidFill>
+                <a:latin typeface="Arial" pitchFamily="34" charset="0"/>
+                <a:ea typeface="Arial" pitchFamily="34" charset="-122"/>
+                <a:cs typeface="Arial" pitchFamily="34" charset="-120"/>
+              </a:rPr>
+              <a:t>earth</a:t>
+            </a:r>
+            <a:pPr algn="l" indent="0" marL="0">
+              <a:lnSpc>
+                <a:spcPts val="1620"/>
+              </a:lnSpc>
+              <a:spcAft>
+                <a:spcPts val="300"/>
+              </a:spcAft>
+              <a:buNone/>
+            </a:pPr>
+            <a:r>
+              <a:rPr lang="en-US" sz="1200" dirty="0">
+                <a:solidFill>
+                  <a:srgbClr val="1C2833"/>
+                </a:solidFill>
+                <a:latin typeface="Arial" pitchFamily="34" charset="0"/>
+                <a:ea typeface="Arial" pitchFamily="34" charset="-122"/>
+                <a:cs typeface="Arial" pitchFamily="34" charset="-120"/>
+              </a:rPr>
+              <a:t> has all five qualities? Why does it make sense that </a:t>
+            </a:r>
+            <a:pPr algn="l" indent="0" marL="0">
+              <a:lnSpc>
+                <a:spcPts val="1620"/>
+              </a:lnSpc>
+              <a:spcAft>
+                <a:spcPts val="300"/>
+              </a:spcAft>
+              <a:buNone/>
+            </a:pPr>
+            <a:r>
+              <a:rPr lang="en-US" sz="1200" i="1" dirty="0">
+                <a:solidFill>
+                  <a:srgbClr val="1C2833"/>
+                </a:solidFill>
+                <a:latin typeface="Arial" pitchFamily="34" charset="0"/>
+                <a:ea typeface="Arial" pitchFamily="34" charset="-122"/>
+                <a:cs typeface="Arial" pitchFamily="34" charset="-120"/>
+              </a:rPr>
+              <a:t>space</a:t>
+            </a:r>
+            <a:pPr algn="l" indent="0" marL="0">
+              <a:lnSpc>
+                <a:spcPts val="1620"/>
+              </a:lnSpc>
+              <a:spcAft>
+                <a:spcPts val="300"/>
+              </a:spcAft>
+              <a:buNone/>
+            </a:pPr>
+            <a:r>
+              <a:rPr lang="en-US" sz="1200" dirty="0">
+                <a:solidFill>
+                  <a:srgbClr val="1C2833"/>
+                </a:solidFill>
+                <a:latin typeface="Arial" pitchFamily="34" charset="0"/>
+                <a:ea typeface="Arial" pitchFamily="34" charset="-122"/>
+                <a:cs typeface="Arial" pitchFamily="34" charset="-120"/>
+              </a:rPr>
+              <a:t> has only one?"</a:t>
             </a:r>
             <a:endParaRPr lang="en-US" sz="1200" dirty="0"/>
           </a:p>
+        </p:txBody>
+      </p:sp>
+      <p:sp>
+        <p:nvSpPr>
+          <p:cNvPr id="6" name="Text 4"/>
+          <p:cNvSpPr/>
+          <p:nvPr/>
+        </p:nvSpPr>
+        <p:spPr>
+          <a:xfrm>
+            <a:off x="634901" y="1769715"/>
+            <a:ext cx="8102798" cy="487561"/>
+          </a:xfrm>
+          <a:prstGeom prst="rect">
+            <a:avLst/>
+          </a:prstGeom>
+          <a:noFill/>
+          <a:ln/>
+        </p:spPr>
+        <p:txBody>
+          <a:bodyPr wrap="square" lIns="0" tIns="0" rIns="0" bIns="0" rtlCol="0" anchor="t"/>
+          <a:lstStyle/>
           <a:p>
             <a:pPr algn="l" marL="342900" indent="-342900">
               <a:lnSpc>
@@ -2763,15 +3499,15 @@
               <a:buChar char="•"/>
             </a:pPr>
             <a:r>
-              <a:rPr lang="en-US" sz="1200" b="1" dirty="0">
-                <a:solidFill>
-                  <a:srgbClr val="1C2833"/>
-                </a:solidFill>
-                <a:latin typeface="Arial" pitchFamily="34" charset="0"/>
-                <a:ea typeface="Arial" pitchFamily="34" charset="-122"/>
-                <a:cs typeface="Arial" pitchFamily="34" charset="-120"/>
-              </a:rPr>
-              <a:t>One tier down:</a:t>
+              <a:rPr lang="en-US" sz="1200" dirty="0">
+                <a:solidFill>
+                  <a:srgbClr val="1C2833"/>
+                </a:solidFill>
+                <a:latin typeface="Arial" pitchFamily="34" charset="0"/>
+                <a:ea typeface="Arial" pitchFamily="34" charset="-122"/>
+                <a:cs typeface="Arial" pitchFamily="34" charset="-120"/>
+              </a:rPr>
+              <a:t>Push toward: solid things are perceivable in </a:t>
             </a:r>
             <a:pPr algn="l" indent="0" marL="0">
               <a:lnSpc>
@@ -2783,6 +3519,26 @@
               <a:buNone/>
             </a:pPr>
             <a:r>
+              <a:rPr lang="en-US" sz="1200" i="1" dirty="0">
+                <a:solidFill>
+                  <a:srgbClr val="1C2833"/>
+                </a:solidFill>
+                <a:latin typeface="Arial" pitchFamily="34" charset="0"/>
+                <a:ea typeface="Arial" pitchFamily="34" charset="-122"/>
+                <a:cs typeface="Arial" pitchFamily="34" charset="-120"/>
+              </a:rPr>
+              <a:t>every</a:t>
+            </a:r>
+            <a:pPr algn="l" indent="0" marL="0">
+              <a:lnSpc>
+                <a:spcPts val="1620"/>
+              </a:lnSpc>
+              <a:spcAft>
+                <a:spcPts val="300"/>
+              </a:spcAft>
+              <a:buNone/>
+            </a:pPr>
+            <a:r>
               <a:rPr lang="en-US" sz="1200" dirty="0">
                 <a:solidFill>
                   <a:srgbClr val="1C2833"/>
@@ -2791,7 +3547,7 @@
                 <a:ea typeface="Arial" pitchFamily="34" charset="-122"/>
                 <a:cs typeface="Arial" pitchFamily="34" charset="-120"/>
               </a:rPr>
-              <a:t> Just remember the order — space, air, fire, water, earth — and that earth has the most qualities. The "why" can come on Day 3.</a:t>
+              <a:t> way — you can hear, touch, see, taste, smell soil. Empty space has no smell, taste, form, or touch — but you can hear sound in it.</a:t>
             </a:r>
             <a:endParaRPr lang="en-US" sz="1200" dirty="0"/>
           </a:p>
@@ -2799,7 +3555,7 @@
       </p:sp>
       <p:sp>
         <p:nvSpPr>
-          <p:cNvPr id="5" name="Text 3"/>
+          <p:cNvPr id="7" name="Text 5"/>
           <p:cNvSpPr/>
           <p:nvPr/>
         </p:nvSpPr>
@@ -2949,7 +3705,7 @@
                 <a:ea typeface="Georgia" pitchFamily="34" charset="-122"/>
                 <a:cs typeface="Georgia" pitchFamily="34" charset="-120"/>
               </a:rPr>
-              <a:t>Teacher notes</a:t>
+              <a:t>Activity (15 min) — Draw your own diagram</a:t>
             </a:r>
             <a:endParaRPr lang="en-US" sz="1800" dirty="0"/>
           </a:p>
@@ -2963,8 +3719,8 @@
         </p:nvSpPr>
         <p:spPr>
           <a:xfrm>
-            <a:off x="406301" y="870942"/>
-            <a:ext cx="8498026" cy="1279624"/>
+            <a:off x="634901" y="883593"/>
+            <a:ext cx="8102798" cy="1218902"/>
           </a:xfrm>
           <a:prstGeom prst="rect">
             <a:avLst/>
@@ -2976,17 +3732,15 @@
           <a:bodyPr wrap="square" lIns="0" tIns="0" rIns="0" bIns="0" rtlCol="0" anchor="t"/>
           <a:lstStyle/>
           <a:p>
-            <a:pPr algn="l" indent="0" marL="0">
-              <a:lnSpc>
-                <a:spcPts val="1680"/>
-              </a:lnSpc>
-              <a:spcBef>
-                <a:spcPts val="300"/>
-              </a:spcBef>
-              <a:spcAft>
-                <a:spcPts val="300"/>
-              </a:spcAft>
-              <a:buNone/>
+            <a:pPr algn="l" marL="342900" indent="-342900">
+              <a:lnSpc>
+                <a:spcPts val="1620"/>
+              </a:lnSpc>
+              <a:spcAft>
+                <a:spcPts val="300"/>
+              </a:spcAft>
+              <a:buSzPct val="100000"/>
+              <a:buChar char="•"/>
             </a:pPr>
             <a:r>
               <a:rPr lang="en-US" sz="1200" dirty="0">
@@ -2997,15 +3751,84 @@
                 <a:ea typeface="Arial" pitchFamily="34" charset="-122"/>
                 <a:cs typeface="Arial" pitchFamily="34" charset="-120"/>
               </a:rPr>
-              <a:t>– The quality-counting rule is mathematically elegant and is the single best hook for students who like patterns. Linger here if your class is enjoying it. – A student may ask: "But doesn't fire have a smell? Doesn't water have a colour?" — Good question. The SB framework is talking about the </a:t>
-            </a:r>
-            <a:pPr algn="l" indent="0" marL="0">
-              <a:lnSpc>
-                <a:spcPts val="1680"/>
-              </a:lnSpc>
-              <a:spcBef>
-                <a:spcPts val="300"/>
-              </a:spcBef>
+              <a:t>Students draw the five elements in their notebooks as a nested set of expanding "rings" or "stacked layers" — whichever visual makes sense to them.</a:t>
+            </a:r>
+            <a:endParaRPr lang="en-US" sz="1200" dirty="0"/>
+          </a:p>
+          <a:p>
+            <a:pPr algn="l" marL="342900" indent="-342900">
+              <a:lnSpc>
+                <a:spcPts val="1620"/>
+              </a:lnSpc>
+              <a:spcAft>
+                <a:spcPts val="300"/>
+              </a:spcAft>
+              <a:buSzPct val="100000"/>
+              <a:buChar char="•"/>
+            </a:pPr>
+            <a:r>
+              <a:rPr lang="en-US" sz="1200" dirty="0">
+                <a:solidFill>
+                  <a:srgbClr val="1C2833"/>
+                </a:solidFill>
+                <a:latin typeface="Arial" pitchFamily="34" charset="0"/>
+                <a:ea typeface="Arial" pitchFamily="34" charset="-122"/>
+                <a:cs typeface="Arial" pitchFamily="34" charset="-120"/>
+              </a:rPr>
+              <a:t>Each layer is labelled with its element AND its quality-count.</a:t>
+            </a:r>
+            <a:endParaRPr lang="en-US" sz="1200" dirty="0"/>
+          </a:p>
+          <a:p>
+            <a:pPr algn="l" marL="342900" indent="-342900">
+              <a:lnSpc>
+                <a:spcPts val="1620"/>
+              </a:lnSpc>
+              <a:spcAft>
+                <a:spcPts val="300"/>
+              </a:spcAft>
+              <a:buSzPct val="100000"/>
+              <a:buChar char="•"/>
+            </a:pPr>
+            <a:r>
+              <a:rPr lang="en-US" sz="1200" dirty="0">
+                <a:solidFill>
+                  <a:srgbClr val="1C2833"/>
+                </a:solidFill>
+                <a:latin typeface="Arial" pitchFamily="34" charset="0"/>
+                <a:ea typeface="Arial" pitchFamily="34" charset="-122"/>
+                <a:cs typeface="Arial" pitchFamily="34" charset="-120"/>
+              </a:rPr>
+              <a:t>Use coloured markers if available.</a:t>
+            </a:r>
+            <a:endParaRPr lang="en-US" sz="1200" dirty="0"/>
+          </a:p>
+          <a:p>
+            <a:pPr algn="l" marL="342900" indent="-342900">
+              <a:lnSpc>
+                <a:spcPts val="1620"/>
+              </a:lnSpc>
+              <a:spcAft>
+                <a:spcPts val="300"/>
+              </a:spcAft>
+              <a:buSzPct val="100000"/>
+              <a:buChar char="•"/>
+            </a:pPr>
+            <a:r>
+              <a:rPr lang="en-US" sz="1200" dirty="0">
+                <a:solidFill>
+                  <a:srgbClr val="1C2833"/>
+                </a:solidFill>
+                <a:latin typeface="Arial" pitchFamily="34" charset="0"/>
+                <a:ea typeface="Arial" pitchFamily="34" charset="-122"/>
+                <a:cs typeface="Arial" pitchFamily="34" charset="-120"/>
+              </a:rPr>
+              <a:t>At the bottom, each student writes a one-sentence answer: </a:t>
+            </a:r>
+            <a:pPr algn="l" indent="0" marL="0">
+              <a:lnSpc>
+                <a:spcPts val="1620"/>
+              </a:lnSpc>
               <a:spcAft>
                 <a:spcPts val="300"/>
               </a:spcAft>
@@ -3020,214 +3843,7 @@
                 <a:ea typeface="Arial" pitchFamily="34" charset="-122"/>
                 <a:cs typeface="Arial" pitchFamily="34" charset="-120"/>
               </a:rPr>
-              <a:t>defining</a:t>
-            </a:r>
-            <a:pPr algn="l" indent="0" marL="0">
-              <a:lnSpc>
-                <a:spcPts val="1680"/>
-              </a:lnSpc>
-              <a:spcBef>
-                <a:spcPts val="300"/>
-              </a:spcBef>
-              <a:spcAft>
-                <a:spcPts val="300"/>
-              </a:spcAft>
-              <a:buNone/>
-            </a:pPr>
-            <a:r>
-              <a:rPr lang="en-US" sz="1200" dirty="0">
-                <a:solidFill>
-                  <a:srgbClr val="1C2833"/>
-                </a:solidFill>
-                <a:latin typeface="Arial" pitchFamily="34" charset="0"/>
-                <a:ea typeface="Arial" pitchFamily="34" charset="-122"/>
-                <a:cs typeface="Arial" pitchFamily="34" charset="-120"/>
-              </a:rPr>
-              <a:t> quality each element </a:t>
-            </a:r>
-            <a:pPr algn="l" indent="0" marL="0">
-              <a:lnSpc>
-                <a:spcPts val="1680"/>
-              </a:lnSpc>
-              <a:spcBef>
-                <a:spcPts val="300"/>
-              </a:spcBef>
-              <a:spcAft>
-                <a:spcPts val="300"/>
-              </a:spcAft>
-              <a:buNone/>
-            </a:pPr>
-            <a:r>
-              <a:rPr lang="en-US" sz="1200" i="1" dirty="0">
-                <a:solidFill>
-                  <a:srgbClr val="1C2833"/>
-                </a:solidFill>
-                <a:latin typeface="Arial" pitchFamily="34" charset="0"/>
-                <a:ea typeface="Arial" pitchFamily="34" charset="-122"/>
-                <a:cs typeface="Arial" pitchFamily="34" charset="-120"/>
-              </a:rPr>
-              <a:t>adds</a:t>
-            </a:r>
-            <a:pPr algn="l" indent="0" marL="0">
-              <a:lnSpc>
-                <a:spcPts val="1680"/>
-              </a:lnSpc>
-              <a:spcBef>
-                <a:spcPts val="300"/>
-              </a:spcBef>
-              <a:spcAft>
-                <a:spcPts val="300"/>
-              </a:spcAft>
-              <a:buNone/>
-            </a:pPr>
-            <a:r>
-              <a:rPr lang="en-US" sz="1200" dirty="0">
-                <a:solidFill>
-                  <a:srgbClr val="1C2833"/>
-                </a:solidFill>
-                <a:latin typeface="Arial" pitchFamily="34" charset="0"/>
-                <a:ea typeface="Arial" pitchFamily="34" charset="-122"/>
-                <a:cs typeface="Arial" pitchFamily="34" charset="-120"/>
-              </a:rPr>
-              <a:t>; we still perceive lower qualities in higher elements (e.g. water has all four — sound, touch, form, taste — but its </a:t>
-            </a:r>
-            <a:pPr algn="l" indent="0" marL="0">
-              <a:lnSpc>
-                <a:spcPts val="1680"/>
-              </a:lnSpc>
-              <a:spcBef>
-                <a:spcPts val="300"/>
-              </a:spcBef>
-              <a:spcAft>
-                <a:spcPts val="300"/>
-              </a:spcAft>
-              <a:buNone/>
-            </a:pPr>
-            <a:r>
-              <a:rPr lang="en-US" sz="1200" i="1" dirty="0">
-                <a:solidFill>
-                  <a:srgbClr val="1C2833"/>
-                </a:solidFill>
-                <a:latin typeface="Arial" pitchFamily="34" charset="0"/>
-                <a:ea typeface="Arial" pitchFamily="34" charset="-122"/>
-                <a:cs typeface="Arial" pitchFamily="34" charset="-120"/>
-              </a:rPr>
-              <a:t>defining</a:t>
-            </a:r>
-            <a:pPr algn="l" indent="0" marL="0">
-              <a:lnSpc>
-                <a:spcPts val="1680"/>
-              </a:lnSpc>
-              <a:spcBef>
-                <a:spcPts val="300"/>
-              </a:spcBef>
-              <a:spcAft>
-                <a:spcPts val="300"/>
-              </a:spcAft>
-              <a:buNone/>
-            </a:pPr>
-            <a:r>
-              <a:rPr lang="en-US" sz="1200" dirty="0">
-                <a:solidFill>
-                  <a:srgbClr val="1C2833"/>
-                </a:solidFill>
-                <a:latin typeface="Arial" pitchFamily="34" charset="0"/>
-                <a:ea typeface="Arial" pitchFamily="34" charset="-122"/>
-                <a:cs typeface="Arial" pitchFamily="34" charset="-120"/>
-              </a:rPr>
-              <a:t> contribution is taste/coolness). – Sanskrit </a:t>
-            </a:r>
-            <a:pPr algn="l" indent="0" marL="0">
-              <a:lnSpc>
-                <a:spcPts val="1680"/>
-              </a:lnSpc>
-              <a:spcBef>
-                <a:spcPts val="300"/>
-              </a:spcBef>
-              <a:spcAft>
-                <a:spcPts val="300"/>
-              </a:spcAft>
-              <a:buNone/>
-            </a:pPr>
-            <a:r>
-              <a:rPr lang="en-US" sz="1200" i="1" dirty="0">
-                <a:solidFill>
-                  <a:srgbClr val="1C2833"/>
-                </a:solidFill>
-                <a:latin typeface="Arial" pitchFamily="34" charset="0"/>
-                <a:ea typeface="Arial" pitchFamily="34" charset="-122"/>
-                <a:cs typeface="Arial" pitchFamily="34" charset="-120"/>
-              </a:rPr>
-              <a:t>guṇa</a:t>
-            </a:r>
-            <a:pPr algn="l" indent="0" marL="0">
-              <a:lnSpc>
-                <a:spcPts val="1680"/>
-              </a:lnSpc>
-              <a:spcBef>
-                <a:spcPts val="300"/>
-              </a:spcBef>
-              <a:spcAft>
-                <a:spcPts val="300"/>
-              </a:spcAft>
-              <a:buNone/>
-            </a:pPr>
-            <a:r>
-              <a:rPr lang="en-US" sz="1200" dirty="0">
-                <a:solidFill>
-                  <a:srgbClr val="1C2833"/>
-                </a:solidFill>
-                <a:latin typeface="Arial" pitchFamily="34" charset="0"/>
-                <a:ea typeface="Arial" pitchFamily="34" charset="-122"/>
-                <a:cs typeface="Arial" pitchFamily="34" charset="-120"/>
-              </a:rPr>
-              <a:t> has a deeper meaning in Sāṅkhya philosophy (sattva/rajas/tamas). At Middle band, don't open that door — say "we'll meet a different meaning of </a:t>
-            </a:r>
-            <a:pPr algn="l" indent="0" marL="0">
-              <a:lnSpc>
-                <a:spcPts val="1680"/>
-              </a:lnSpc>
-              <a:spcBef>
-                <a:spcPts val="300"/>
-              </a:spcBef>
-              <a:spcAft>
-                <a:spcPts val="300"/>
-              </a:spcAft>
-              <a:buNone/>
-            </a:pPr>
-            <a:r>
-              <a:rPr lang="en-US" sz="1200" i="1" dirty="0">
-                <a:solidFill>
-                  <a:srgbClr val="1C2833"/>
-                </a:solidFill>
-                <a:latin typeface="Arial" pitchFamily="34" charset="0"/>
-                <a:ea typeface="Arial" pitchFamily="34" charset="-122"/>
-                <a:cs typeface="Arial" pitchFamily="34" charset="-120"/>
-              </a:rPr>
-              <a:t>guṇa</a:t>
-            </a:r>
-            <a:pPr algn="l" indent="0" marL="0">
-              <a:lnSpc>
-                <a:spcPts val="1680"/>
-              </a:lnSpc>
-              <a:spcBef>
-                <a:spcPts val="300"/>
-              </a:spcBef>
-              <a:spcAft>
-                <a:spcPts val="300"/>
-              </a:spcAft>
-              <a:buNone/>
-            </a:pPr>
-            <a:r>
-              <a:rPr lang="en-US" sz="1200" dirty="0">
-                <a:solidFill>
-                  <a:srgbClr val="1C2833"/>
-                </a:solidFill>
-                <a:latin typeface="Arial" pitchFamily="34" charset="0"/>
-                <a:ea typeface="Arial" pitchFamily="34" charset="-122"/>
-                <a:cs typeface="Arial" pitchFamily="34" charset="-120"/>
-              </a:rPr>
-              <a:t> in a later module."</a:t>
+              <a:t>"In my drawing, the reason X is the outer ring is ___."</a:t>
             </a:r>
             <a:endParaRPr lang="en-US" sz="1200" dirty="0"/>
           </a:p>
@@ -3385,6 +4001,2220 @@
                 <a:ea typeface="Georgia" pitchFamily="34" charset="-122"/>
                 <a:cs typeface="Georgia" pitchFamily="34" charset="-120"/>
               </a:rPr>
+              <a:t>Activity (15 min) — Draw your own diagram (cont.)</a:t>
+            </a:r>
+            <a:endParaRPr lang="en-US" sz="1800" dirty="0"/>
+          </a:p>
+        </p:txBody>
+      </p:sp>
+      <p:sp>
+        <p:nvSpPr>
+          <p:cNvPr id="4" name="Text 2"/>
+          <p:cNvSpPr/>
+          <p:nvPr/>
+        </p:nvSpPr>
+        <p:spPr>
+          <a:xfrm>
+            <a:off x="406301" y="870942"/>
+            <a:ext cx="8498026" cy="426541"/>
+          </a:xfrm>
+          <a:prstGeom prst="rect">
+            <a:avLst/>
+          </a:prstGeom>
+          <a:noFill/>
+          <a:ln/>
+        </p:spPr>
+        <p:txBody>
+          <a:bodyPr wrap="square" lIns="0" tIns="0" rIns="0" bIns="0" rtlCol="0" anchor="t"/>
+          <a:lstStyle/>
+          <a:p>
+            <a:pPr algn="l" indent="0" marL="0">
+              <a:lnSpc>
+                <a:spcPts val="1680"/>
+              </a:lnSpc>
+              <a:spcBef>
+                <a:spcPts val="300"/>
+              </a:spcBef>
+              <a:spcAft>
+                <a:spcPts val="300"/>
+              </a:spcAft>
+              <a:buNone/>
+            </a:pPr>
+            <a:r>
+              <a:rPr lang="en-US" sz="1200" dirty="0">
+                <a:solidFill>
+                  <a:srgbClr val="1C2833"/>
+                </a:solidFill>
+                <a:latin typeface="Arial" pitchFamily="34" charset="0"/>
+                <a:ea typeface="Arial" pitchFamily="34" charset="-122"/>
+                <a:cs typeface="Arial" pitchFamily="34" charset="-120"/>
+              </a:rPr>
+              <a:t>Walk around. If a student draws </a:t>
+            </a:r>
+            <a:pPr algn="l" indent="0" marL="0">
+              <a:lnSpc>
+                <a:spcPts val="1680"/>
+              </a:lnSpc>
+              <a:spcBef>
+                <a:spcPts val="300"/>
+              </a:spcBef>
+              <a:spcAft>
+                <a:spcPts val="300"/>
+              </a:spcAft>
+              <a:buNone/>
+            </a:pPr>
+            <a:r>
+              <a:rPr lang="en-US" sz="1200" i="1" dirty="0">
+                <a:solidFill>
+                  <a:srgbClr val="1C2833"/>
+                </a:solidFill>
+                <a:latin typeface="Arial" pitchFamily="34" charset="0"/>
+                <a:ea typeface="Arial" pitchFamily="34" charset="-122"/>
+                <a:cs typeface="Arial" pitchFamily="34" charset="-120"/>
+              </a:rPr>
+              <a:t>earth</a:t>
+            </a:r>
+            <a:pPr algn="l" indent="0" marL="0">
+              <a:lnSpc>
+                <a:spcPts val="1680"/>
+              </a:lnSpc>
+              <a:spcBef>
+                <a:spcPts val="300"/>
+              </a:spcBef>
+              <a:spcAft>
+                <a:spcPts val="300"/>
+              </a:spcAft>
+              <a:buNone/>
+            </a:pPr>
+            <a:r>
+              <a:rPr lang="en-US" sz="1200" dirty="0">
+                <a:solidFill>
+                  <a:srgbClr val="1C2833"/>
+                </a:solidFill>
+                <a:latin typeface="Arial" pitchFamily="34" charset="0"/>
+                <a:ea typeface="Arial" pitchFamily="34" charset="-122"/>
+                <a:cs typeface="Arial" pitchFamily="34" charset="-120"/>
+              </a:rPr>
+              <a:t> as the smallest, "central" element, that's also defensible — celebrate the reasoning, and gently distinguish: the SB sequence is about </a:t>
+            </a:r>
+            <a:pPr algn="l" indent="0" marL="0">
+              <a:lnSpc>
+                <a:spcPts val="1680"/>
+              </a:lnSpc>
+              <a:spcBef>
+                <a:spcPts val="300"/>
+              </a:spcBef>
+              <a:spcAft>
+                <a:spcPts val="300"/>
+              </a:spcAft>
+              <a:buNone/>
+            </a:pPr>
+            <a:r>
+              <a:rPr lang="en-US" sz="1200" i="1" dirty="0">
+                <a:solidFill>
+                  <a:srgbClr val="1C2833"/>
+                </a:solidFill>
+                <a:latin typeface="Arial" pitchFamily="34" charset="0"/>
+                <a:ea typeface="Arial" pitchFamily="34" charset="-122"/>
+                <a:cs typeface="Arial" pitchFamily="34" charset="-120"/>
+              </a:rPr>
+              <a:t>order of appearance</a:t>
+            </a:r>
+            <a:pPr algn="l" indent="0" marL="0">
+              <a:lnSpc>
+                <a:spcPts val="1680"/>
+              </a:lnSpc>
+              <a:spcBef>
+                <a:spcPts val="300"/>
+              </a:spcBef>
+              <a:spcAft>
+                <a:spcPts val="300"/>
+              </a:spcAft>
+              <a:buNone/>
+            </a:pPr>
+            <a:r>
+              <a:rPr lang="en-US" sz="1200" dirty="0">
+                <a:solidFill>
+                  <a:srgbClr val="1C2833"/>
+                </a:solidFill>
+                <a:latin typeface="Arial" pitchFamily="34" charset="0"/>
+                <a:ea typeface="Arial" pitchFamily="34" charset="-122"/>
+                <a:cs typeface="Arial" pitchFamily="34" charset="-120"/>
+              </a:rPr>
+              <a:t>, not size or importance.</a:t>
+            </a:r>
+            <a:endParaRPr lang="en-US" sz="1200" dirty="0"/>
+          </a:p>
+        </p:txBody>
+      </p:sp>
+      <p:sp>
+        <p:nvSpPr>
+          <p:cNvPr id="5" name="Text 3"/>
+          <p:cNvSpPr/>
+          <p:nvPr/>
+        </p:nvSpPr>
+        <p:spPr>
+          <a:xfrm>
+            <a:off x="406301" y="4434929"/>
+            <a:ext cx="8498026" cy="213271"/>
+          </a:xfrm>
+          <a:prstGeom prst="rect">
+            <a:avLst/>
+          </a:prstGeom>
+          <a:noFill/>
+          <a:ln/>
+        </p:spPr>
+        <p:txBody>
+          <a:bodyPr wrap="square" lIns="0" tIns="0" rIns="0" bIns="0" rtlCol="0" anchor="t"/>
+          <a:lstStyle/>
+          <a:p>
+            <a:pPr algn="l" indent="0" marL="0">
+              <a:lnSpc>
+                <a:spcPts val="1680"/>
+              </a:lnSpc>
+              <a:spcBef>
+                <a:spcPts val="300"/>
+              </a:spcBef>
+              <a:spcAft>
+                <a:spcPts val="300"/>
+              </a:spcAft>
+              <a:buNone/>
+            </a:pPr>
+            <a:r>
+              <a:rPr lang="en-US" sz="1200" dirty="0">
+                <a:solidFill>
+                  <a:srgbClr val="1C2833"/>
+                </a:solidFill>
+                <a:latin typeface="Arial" pitchFamily="34" charset="0"/>
+                <a:ea typeface="Arial" pitchFamily="34" charset="-122"/>
+                <a:cs typeface="Arial" pitchFamily="34" charset="-120"/>
+              </a:rPr>
+              <a:t>Middle ·  · IKS Curriculum</a:t>
+            </a:r>
+            <a:endParaRPr lang="en-US" sz="1200" dirty="0"/>
+          </a:p>
+        </p:txBody>
+      </p:sp>
+    </p:spTree>
+  </p:cSld>
+  <p:clrMapOvr>
+    <a:masterClrMapping/>
+  </p:clrMapOvr>
+</p:sld>
+</file>
+
+<file path=ppt/slides/slide14.xml><?xml version="1.0" encoding="utf-8"?>
+<p:sld xmlns:a="http://schemas.openxmlformats.org/drawingml/2006/main" xmlns:r="http://schemas.openxmlformats.org/officeDocument/2006/relationships" xmlns:p="http://schemas.openxmlformats.org/presentationml/2006/main">
+  <p:cSld name="Slide 14">
+    <p:bg>
+      <p:bgPr>
+        <a:solidFill>
+          <a:srgbClr val="FFFFFF"/>
+        </a:solidFill>
+      </p:bgPr>
+    </p:bg>
+    <p:spTree>
+      <p:nvGrpSpPr>
+        <p:cNvPr id="1" name=""/>
+        <p:cNvGrpSpPr/>
+        <p:nvPr/>
+      </p:nvGrpSpPr>
+      <p:grpSpPr>
+        <a:xfrm>
+          <a:off x="0" y="0"/>
+          <a:ext cx="0" cy="0"/>
+          <a:chOff x="0" y="0"/>
+          <a:chExt cx="0" cy="0"/>
+        </a:xfrm>
+      </p:grpSpPr>
+      <p:sp>
+        <p:nvSpPr>
+          <p:cNvPr id="2" name="Text 0"/>
+          <p:cNvSpPr/>
+          <p:nvPr/>
+        </p:nvSpPr>
+        <p:spPr>
+          <a:xfrm>
+            <a:off x="0" y="0"/>
+            <a:ext cx="9144000" cy="101501"/>
+          </a:xfrm>
+          <a:prstGeom prst="rect">
+            <a:avLst/>
+          </a:prstGeom>
+          <a:solidFill>
+            <a:srgbClr val="277884"/>
+          </a:solidFill>
+          <a:ln/>
+        </p:spPr>
+        <p:txBody>
+          <a:bodyPr wrap="square" rtlCol="0" anchor="ctr"/>
+          <a:lstStyle/>
+          <a:p>
+            <a:pPr indent="0" marL="0">
+              <a:buNone/>
+            </a:pPr>
+            <a:endParaRPr lang="en-US" dirty="0"/>
+          </a:p>
+        </p:txBody>
+      </p:sp>
+      <p:sp>
+        <p:nvSpPr>
+          <p:cNvPr id="3" name="Text 1"/>
+          <p:cNvSpPr/>
+          <p:nvPr/>
+        </p:nvSpPr>
+        <p:spPr>
+          <a:xfrm>
+            <a:off x="406301" y="457051"/>
+            <a:ext cx="8498026" cy="274290"/>
+          </a:xfrm>
+          <a:prstGeom prst="rect">
+            <a:avLst/>
+          </a:prstGeom>
+          <a:noFill/>
+          <a:ln/>
+        </p:spPr>
+        <p:txBody>
+          <a:bodyPr wrap="square" lIns="0" tIns="0" rIns="0" bIns="0" rtlCol="0" anchor="t"/>
+          <a:lstStyle/>
+          <a:p>
+            <a:pPr algn="l" indent="0" marL="0">
+              <a:lnSpc>
+                <a:spcPts val="2160"/>
+              </a:lnSpc>
+              <a:spcBef>
+                <a:spcPts val="600"/>
+              </a:spcBef>
+              <a:spcAft>
+                <a:spcPts val="800"/>
+              </a:spcAft>
+              <a:buNone/>
+            </a:pPr>
+            <a:r>
+              <a:rPr lang="en-US" sz="1800" b="1" dirty="0">
+                <a:solidFill>
+                  <a:srgbClr val="FE4447"/>
+                </a:solidFill>
+                <a:latin typeface="Georgia" pitchFamily="34" charset="0"/>
+                <a:ea typeface="Georgia" pitchFamily="34" charset="-122"/>
+                <a:cs typeface="Georgia" pitchFamily="34" charset="-120"/>
+              </a:rPr>
+              <a:t>Wrap-up (5 min)</a:t>
+            </a:r>
+            <a:endParaRPr lang="en-US" sz="1800" dirty="0"/>
+          </a:p>
+        </p:txBody>
+      </p:sp>
+      <p:sp>
+        <p:nvSpPr>
+          <p:cNvPr id="4" name="Text 2"/>
+          <p:cNvSpPr/>
+          <p:nvPr/>
+        </p:nvSpPr>
+        <p:spPr>
+          <a:xfrm>
+            <a:off x="634901" y="883593"/>
+            <a:ext cx="8102798" cy="937022"/>
+          </a:xfrm>
+          <a:prstGeom prst="rect">
+            <a:avLst/>
+          </a:prstGeom>
+          <a:noFill/>
+          <a:ln/>
+        </p:spPr>
+        <p:txBody>
+          <a:bodyPr wrap="square" lIns="0" tIns="0" rIns="0" bIns="0" rtlCol="0" anchor="t"/>
+          <a:lstStyle/>
+          <a:p>
+            <a:pPr algn="l" marL="342900" indent="-342900">
+              <a:lnSpc>
+                <a:spcPts val="1620"/>
+              </a:lnSpc>
+              <a:spcAft>
+                <a:spcPts val="300"/>
+              </a:spcAft>
+              <a:buSzPct val="100000"/>
+              <a:buChar char="•"/>
+            </a:pPr>
+            <a:r>
+              <a:rPr lang="en-US" sz="1200" dirty="0">
+                <a:solidFill>
+                  <a:srgbClr val="1C2833"/>
+                </a:solidFill>
+                <a:latin typeface="Arial" pitchFamily="34" charset="0"/>
+                <a:ea typeface="Arial" pitchFamily="34" charset="-122"/>
+                <a:cs typeface="Arial" pitchFamily="34" charset="-120"/>
+              </a:rPr>
+              <a:t>Exit ticket (written, 1 sentence, on a slip of paper turned in): </a:t>
+            </a:r>
+            <a:pPr algn="l" indent="0" marL="0">
+              <a:lnSpc>
+                <a:spcPts val="1620"/>
+              </a:lnSpc>
+              <a:spcAft>
+                <a:spcPts val="300"/>
+              </a:spcAft>
+              <a:buNone/>
+            </a:pPr>
+            <a:r>
+              <a:rPr lang="en-US" sz="1200" i="1" dirty="0">
+                <a:solidFill>
+                  <a:srgbClr val="1C2833"/>
+                </a:solidFill>
+                <a:latin typeface="Arial" pitchFamily="34" charset="0"/>
+                <a:ea typeface="Arial" pitchFamily="34" charset="-122"/>
+                <a:cs typeface="Arial" pitchFamily="34" charset="-120"/>
+              </a:rPr>
+              <a:t>"If a friend asked you 'why does space come first?', what would you say?"</a:t>
+            </a:r>
+            <a:endParaRPr lang="en-US" sz="1200" dirty="0"/>
+          </a:p>
+          <a:p>
+            <a:pPr algn="l" marL="342900" indent="-342900">
+              <a:lnSpc>
+                <a:spcPts val="1620"/>
+              </a:lnSpc>
+              <a:spcAft>
+                <a:spcPts val="300"/>
+              </a:spcAft>
+              <a:buSzPct val="100000"/>
+              <a:buChar char="•"/>
+            </a:pPr>
+            <a:r>
+              <a:rPr lang="en-US" sz="1200" dirty="0">
+                <a:solidFill>
+                  <a:srgbClr val="1C2833"/>
+                </a:solidFill>
+                <a:latin typeface="Arial" pitchFamily="34" charset="0"/>
+                <a:ea typeface="Arial" pitchFamily="34" charset="-122"/>
+                <a:cs typeface="Arial" pitchFamily="34" charset="-120"/>
+              </a:rPr>
+              <a:t>Preview: "Tomorrow we'll meet the qualities themselves — sound, touch, form, taste, smell — and see how each one connects to one of your five senses."</a:t>
+            </a:r>
+            <a:endParaRPr lang="en-US" sz="1200" dirty="0"/>
+          </a:p>
+        </p:txBody>
+      </p:sp>
+      <p:sp>
+        <p:nvSpPr>
+          <p:cNvPr id="5" name="Text 3"/>
+          <p:cNvSpPr/>
+          <p:nvPr/>
+        </p:nvSpPr>
+        <p:spPr>
+          <a:xfrm>
+            <a:off x="406301" y="4434929"/>
+            <a:ext cx="8498026" cy="213271"/>
+          </a:xfrm>
+          <a:prstGeom prst="rect">
+            <a:avLst/>
+          </a:prstGeom>
+          <a:noFill/>
+          <a:ln/>
+        </p:spPr>
+        <p:txBody>
+          <a:bodyPr wrap="square" lIns="0" tIns="0" rIns="0" bIns="0" rtlCol="0" anchor="t"/>
+          <a:lstStyle/>
+          <a:p>
+            <a:pPr algn="l" indent="0" marL="0">
+              <a:lnSpc>
+                <a:spcPts val="1680"/>
+              </a:lnSpc>
+              <a:spcBef>
+                <a:spcPts val="300"/>
+              </a:spcBef>
+              <a:spcAft>
+                <a:spcPts val="300"/>
+              </a:spcAft>
+              <a:buNone/>
+            </a:pPr>
+            <a:r>
+              <a:rPr lang="en-US" sz="1200" dirty="0">
+                <a:solidFill>
+                  <a:srgbClr val="1C2833"/>
+                </a:solidFill>
+                <a:latin typeface="Arial" pitchFamily="34" charset="0"/>
+                <a:ea typeface="Arial" pitchFamily="34" charset="-122"/>
+                <a:cs typeface="Arial" pitchFamily="34" charset="-120"/>
+              </a:rPr>
+              <a:t>Middle ·  · IKS Curriculum</a:t>
+            </a:r>
+            <a:endParaRPr lang="en-US" sz="1200" dirty="0"/>
+          </a:p>
+        </p:txBody>
+      </p:sp>
+    </p:spTree>
+  </p:cSld>
+  <p:clrMapOvr>
+    <a:masterClrMapping/>
+  </p:clrMapOvr>
+</p:sld>
+</file>
+
+<file path=ppt/slides/slide15.xml><?xml version="1.0" encoding="utf-8"?>
+<p:sld xmlns:a="http://schemas.openxmlformats.org/drawingml/2006/main" xmlns:r="http://schemas.openxmlformats.org/officeDocument/2006/relationships" xmlns:p="http://schemas.openxmlformats.org/presentationml/2006/main">
+  <p:cSld name="Slide 15">
+    <p:bg>
+      <p:bgPr>
+        <a:solidFill>
+          <a:srgbClr val="FFFFFF"/>
+        </a:solidFill>
+      </p:bgPr>
+    </p:bg>
+    <p:spTree>
+      <p:nvGrpSpPr>
+        <p:cNvPr id="1" name=""/>
+        <p:cNvGrpSpPr/>
+        <p:nvPr/>
+      </p:nvGrpSpPr>
+      <p:grpSpPr>
+        <a:xfrm>
+          <a:off x="0" y="0"/>
+          <a:ext cx="0" cy="0"/>
+          <a:chOff x="0" y="0"/>
+          <a:chExt cx="0" cy="0"/>
+        </a:xfrm>
+      </p:grpSpPr>
+      <p:sp>
+        <p:nvSpPr>
+          <p:cNvPr id="2" name="Text 0"/>
+          <p:cNvSpPr/>
+          <p:nvPr/>
+        </p:nvSpPr>
+        <p:spPr>
+          <a:xfrm>
+            <a:off x="0" y="0"/>
+            <a:ext cx="9144000" cy="101501"/>
+          </a:xfrm>
+          <a:prstGeom prst="rect">
+            <a:avLst/>
+          </a:prstGeom>
+          <a:solidFill>
+            <a:srgbClr val="277884"/>
+          </a:solidFill>
+          <a:ln/>
+        </p:spPr>
+        <p:txBody>
+          <a:bodyPr wrap="square" rtlCol="0" anchor="ctr"/>
+          <a:lstStyle/>
+          <a:p>
+            <a:pPr indent="0" marL="0">
+              <a:buNone/>
+            </a:pPr>
+            <a:endParaRPr lang="en-US" dirty="0"/>
+          </a:p>
+        </p:txBody>
+      </p:sp>
+      <p:sp>
+        <p:nvSpPr>
+          <p:cNvPr id="3" name="Text 1"/>
+          <p:cNvSpPr/>
+          <p:nvPr/>
+        </p:nvSpPr>
+        <p:spPr>
+          <a:xfrm>
+            <a:off x="406301" y="457051"/>
+            <a:ext cx="8498026" cy="274290"/>
+          </a:xfrm>
+          <a:prstGeom prst="rect">
+            <a:avLst/>
+          </a:prstGeom>
+          <a:noFill/>
+          <a:ln/>
+        </p:spPr>
+        <p:txBody>
+          <a:bodyPr wrap="square" lIns="0" tIns="0" rIns="0" bIns="0" rtlCol="0" anchor="t"/>
+          <a:lstStyle/>
+          <a:p>
+            <a:pPr algn="l" indent="0" marL="0">
+              <a:lnSpc>
+                <a:spcPts val="2160"/>
+              </a:lnSpc>
+              <a:spcBef>
+                <a:spcPts val="600"/>
+              </a:spcBef>
+              <a:spcAft>
+                <a:spcPts val="800"/>
+              </a:spcAft>
+              <a:buNone/>
+            </a:pPr>
+            <a:r>
+              <a:rPr lang="en-US" sz="1800" b="1" dirty="0">
+                <a:solidFill>
+                  <a:srgbClr val="FE4447"/>
+                </a:solidFill>
+                <a:latin typeface="Georgia" pitchFamily="34" charset="0"/>
+                <a:ea typeface="Georgia" pitchFamily="34" charset="-122"/>
+                <a:cs typeface="Georgia" pitchFamily="34" charset="-120"/>
+              </a:rPr>
+              <a:t>Student-facing content</a:t>
+            </a:r>
+            <a:endParaRPr lang="en-US" sz="1800" dirty="0"/>
+          </a:p>
+        </p:txBody>
+      </p:sp>
+      <p:sp>
+        <p:nvSpPr>
+          <p:cNvPr id="4" name="Text 2"/>
+          <p:cNvSpPr/>
+          <p:nvPr/>
+        </p:nvSpPr>
+        <p:spPr>
+          <a:xfrm>
+            <a:off x="406301" y="883593"/>
+            <a:ext cx="8331398" cy="2381250"/>
+          </a:xfrm>
+          <a:prstGeom prst="rect">
+            <a:avLst/>
+          </a:prstGeom>
+          <a:solidFill>
+            <a:srgbClr val="F4F8F9"/>
+          </a:solidFill>
+          <a:ln/>
+        </p:spPr>
+        <p:txBody>
+          <a:bodyPr wrap="square" rtlCol="0" anchor="ctr"/>
+          <a:lstStyle/>
+          <a:p>
+            <a:pPr indent="0" marL="0">
+              <a:buNone/>
+            </a:pPr>
+            <a:endParaRPr lang="en-US" dirty="0"/>
+          </a:p>
+        </p:txBody>
+      </p:sp>
+      <p:sp>
+        <p:nvSpPr>
+          <p:cNvPr id="5" name="Shape 3"/>
+          <p:cNvSpPr/>
+          <p:nvPr/>
+        </p:nvSpPr>
+        <p:spPr>
+          <a:xfrm>
+            <a:off x="434876" y="883593"/>
+            <a:ext cx="0" cy="2381250"/>
+          </a:xfrm>
+          <a:prstGeom prst="line">
+            <a:avLst/>
+          </a:prstGeom>
+          <a:noFill/>
+          <a:ln w="57150">
+            <a:solidFill>
+              <a:srgbClr val="FE4447"/>
+            </a:solidFill>
+            <a:prstDash val="solid"/>
+          </a:ln>
+        </p:spPr>
+      </p:sp>
+      <p:sp>
+        <p:nvSpPr>
+          <p:cNvPr id="6" name="Text 4"/>
+          <p:cNvSpPr/>
+          <p:nvPr/>
+        </p:nvSpPr>
+        <p:spPr>
+          <a:xfrm>
+            <a:off x="692051" y="1074093"/>
+            <a:ext cx="7973389" cy="230981"/>
+          </a:xfrm>
+          <a:prstGeom prst="rect">
+            <a:avLst/>
+          </a:prstGeom>
+          <a:noFill/>
+          <a:ln/>
+        </p:spPr>
+        <p:txBody>
+          <a:bodyPr wrap="square" lIns="0" tIns="0" rIns="0" bIns="0" rtlCol="0" anchor="t"/>
+          <a:lstStyle/>
+          <a:p>
+            <a:pPr algn="l" indent="0" marL="0">
+              <a:lnSpc>
+                <a:spcPts val="1820"/>
+              </a:lnSpc>
+              <a:spcBef>
+                <a:spcPts val="300"/>
+              </a:spcBef>
+              <a:spcAft>
+                <a:spcPts val="300"/>
+              </a:spcAft>
+              <a:buNone/>
+            </a:pPr>
+            <a:r>
+              <a:rPr lang="en-US" sz="1300" b="1" i="1" dirty="0">
+                <a:solidFill>
+                  <a:srgbClr val="1C2833"/>
+                </a:solidFill>
+                <a:latin typeface="Georgia" pitchFamily="34" charset="0"/>
+                <a:ea typeface="Georgia" pitchFamily="34" charset="-122"/>
+                <a:cs typeface="Georgia" pitchFamily="34" charset="-120"/>
+              </a:rPr>
+              <a:t>The Five Elements emerge in a sequence</a:t>
+            </a:r>
+            <a:endParaRPr lang="en-US" sz="1300" dirty="0"/>
+          </a:p>
+        </p:txBody>
+      </p:sp>
+      <p:sp>
+        <p:nvSpPr>
+          <p:cNvPr id="7" name="Text 5"/>
+          <p:cNvSpPr/>
+          <p:nvPr/>
+        </p:nvSpPr>
+        <p:spPr>
+          <a:xfrm>
+            <a:off x="692051" y="1343174"/>
+            <a:ext cx="7973389" cy="230981"/>
+          </a:xfrm>
+          <a:prstGeom prst="rect">
+            <a:avLst/>
+          </a:prstGeom>
+          <a:noFill/>
+          <a:ln/>
+        </p:spPr>
+        <p:txBody>
+          <a:bodyPr wrap="square" lIns="0" tIns="0" rIns="0" bIns="0" rtlCol="0" anchor="t"/>
+          <a:lstStyle/>
+          <a:p>
+            <a:pPr algn="l" indent="0" marL="0">
+              <a:lnSpc>
+                <a:spcPts val="1820"/>
+              </a:lnSpc>
+              <a:spcBef>
+                <a:spcPts val="300"/>
+              </a:spcBef>
+              <a:spcAft>
+                <a:spcPts val="300"/>
+              </a:spcAft>
+              <a:buNone/>
+            </a:pPr>
+            <a:r>
+              <a:rPr lang="en-US" sz="1300" i="1" dirty="0">
+                <a:solidFill>
+                  <a:srgbClr val="1C2833"/>
+                </a:solidFill>
+                <a:latin typeface="Georgia" pitchFamily="34" charset="0"/>
+                <a:ea typeface="Georgia" pitchFamily="34" charset="-122"/>
+                <a:cs typeface="Georgia" pitchFamily="34" charset="-120"/>
+              </a:rPr>
+              <a:t>ākāśa</a:t>
+            </a:r>
+            <a:pPr algn="l" indent="0" marL="0">
+              <a:lnSpc>
+                <a:spcPts val="1820"/>
+              </a:lnSpc>
+              <a:spcBef>
+                <a:spcPts val="300"/>
+              </a:spcBef>
+              <a:spcAft>
+                <a:spcPts val="300"/>
+              </a:spcAft>
+              <a:buNone/>
+            </a:pPr>
+            <a:r>
+              <a:rPr lang="en-US" sz="1300" dirty="0">
+                <a:solidFill>
+                  <a:srgbClr val="1C2833"/>
+                </a:solidFill>
+                <a:latin typeface="Georgia" pitchFamily="34" charset="0"/>
+                <a:ea typeface="Georgia" pitchFamily="34" charset="-122"/>
+                <a:cs typeface="Georgia" pitchFamily="34" charset="-120"/>
+              </a:rPr>
+              <a:t> (space) → </a:t>
+            </a:r>
+            <a:pPr algn="l" indent="0" marL="0">
+              <a:lnSpc>
+                <a:spcPts val="1820"/>
+              </a:lnSpc>
+              <a:spcBef>
+                <a:spcPts val="300"/>
+              </a:spcBef>
+              <a:spcAft>
+                <a:spcPts val="300"/>
+              </a:spcAft>
+              <a:buNone/>
+            </a:pPr>
+            <a:r>
+              <a:rPr lang="en-US" sz="1300" i="1" dirty="0">
+                <a:solidFill>
+                  <a:srgbClr val="1C2833"/>
+                </a:solidFill>
+                <a:latin typeface="Georgia" pitchFamily="34" charset="0"/>
+                <a:ea typeface="Georgia" pitchFamily="34" charset="-122"/>
+                <a:cs typeface="Georgia" pitchFamily="34" charset="-120"/>
+              </a:rPr>
+              <a:t>vāyu</a:t>
+            </a:r>
+            <a:pPr algn="l" indent="0" marL="0">
+              <a:lnSpc>
+                <a:spcPts val="1820"/>
+              </a:lnSpc>
+              <a:spcBef>
+                <a:spcPts val="300"/>
+              </a:spcBef>
+              <a:spcAft>
+                <a:spcPts val="300"/>
+              </a:spcAft>
+              <a:buNone/>
+            </a:pPr>
+            <a:r>
+              <a:rPr lang="en-US" sz="1300" dirty="0">
+                <a:solidFill>
+                  <a:srgbClr val="1C2833"/>
+                </a:solidFill>
+                <a:latin typeface="Georgia" pitchFamily="34" charset="0"/>
+                <a:ea typeface="Georgia" pitchFamily="34" charset="-122"/>
+                <a:cs typeface="Georgia" pitchFamily="34" charset="-120"/>
+              </a:rPr>
+              <a:t> (air) → </a:t>
+            </a:r>
+            <a:pPr algn="l" indent="0" marL="0">
+              <a:lnSpc>
+                <a:spcPts val="1820"/>
+              </a:lnSpc>
+              <a:spcBef>
+                <a:spcPts val="300"/>
+              </a:spcBef>
+              <a:spcAft>
+                <a:spcPts val="300"/>
+              </a:spcAft>
+              <a:buNone/>
+            </a:pPr>
+            <a:r>
+              <a:rPr lang="en-US" sz="1300" i="1" dirty="0">
+                <a:solidFill>
+                  <a:srgbClr val="1C2833"/>
+                </a:solidFill>
+                <a:latin typeface="Georgia" pitchFamily="34" charset="0"/>
+                <a:ea typeface="Georgia" pitchFamily="34" charset="-122"/>
+                <a:cs typeface="Georgia" pitchFamily="34" charset="-120"/>
+              </a:rPr>
+              <a:t>tejas</a:t>
+            </a:r>
+            <a:pPr algn="l" indent="0" marL="0">
+              <a:lnSpc>
+                <a:spcPts val="1820"/>
+              </a:lnSpc>
+              <a:spcBef>
+                <a:spcPts val="300"/>
+              </a:spcBef>
+              <a:spcAft>
+                <a:spcPts val="300"/>
+              </a:spcAft>
+              <a:buNone/>
+            </a:pPr>
+            <a:r>
+              <a:rPr lang="en-US" sz="1300" dirty="0">
+                <a:solidFill>
+                  <a:srgbClr val="1C2833"/>
+                </a:solidFill>
+                <a:latin typeface="Georgia" pitchFamily="34" charset="0"/>
+                <a:ea typeface="Georgia" pitchFamily="34" charset="-122"/>
+                <a:cs typeface="Georgia" pitchFamily="34" charset="-120"/>
+              </a:rPr>
+              <a:t> (fire) → </a:t>
+            </a:r>
+            <a:pPr algn="l" indent="0" marL="0">
+              <a:lnSpc>
+                <a:spcPts val="1820"/>
+              </a:lnSpc>
+              <a:spcBef>
+                <a:spcPts val="300"/>
+              </a:spcBef>
+              <a:spcAft>
+                <a:spcPts val="300"/>
+              </a:spcAft>
+              <a:buNone/>
+            </a:pPr>
+            <a:r>
+              <a:rPr lang="en-US" sz="1300" i="1" dirty="0">
+                <a:solidFill>
+                  <a:srgbClr val="1C2833"/>
+                </a:solidFill>
+                <a:latin typeface="Georgia" pitchFamily="34" charset="0"/>
+                <a:ea typeface="Georgia" pitchFamily="34" charset="-122"/>
+                <a:cs typeface="Georgia" pitchFamily="34" charset="-120"/>
+              </a:rPr>
+              <a:t>ap</a:t>
+            </a:r>
+            <a:pPr algn="l" indent="0" marL="0">
+              <a:lnSpc>
+                <a:spcPts val="1820"/>
+              </a:lnSpc>
+              <a:spcBef>
+                <a:spcPts val="300"/>
+              </a:spcBef>
+              <a:spcAft>
+                <a:spcPts val="300"/>
+              </a:spcAft>
+              <a:buNone/>
+            </a:pPr>
+            <a:r>
+              <a:rPr lang="en-US" sz="1300" dirty="0">
+                <a:solidFill>
+                  <a:srgbClr val="1C2833"/>
+                </a:solidFill>
+                <a:latin typeface="Georgia" pitchFamily="34" charset="0"/>
+                <a:ea typeface="Georgia" pitchFamily="34" charset="-122"/>
+                <a:cs typeface="Georgia" pitchFamily="34" charset="-120"/>
+              </a:rPr>
+              <a:t> (water) → </a:t>
+            </a:r>
+            <a:pPr algn="l" indent="0" marL="0">
+              <a:lnSpc>
+                <a:spcPts val="1820"/>
+              </a:lnSpc>
+              <a:spcBef>
+                <a:spcPts val="300"/>
+              </a:spcBef>
+              <a:spcAft>
+                <a:spcPts val="300"/>
+              </a:spcAft>
+              <a:buNone/>
+            </a:pPr>
+            <a:r>
+              <a:rPr lang="en-US" sz="1300" i="1" dirty="0">
+                <a:solidFill>
+                  <a:srgbClr val="1C2833"/>
+                </a:solidFill>
+                <a:latin typeface="Georgia" pitchFamily="34" charset="0"/>
+                <a:ea typeface="Georgia" pitchFamily="34" charset="-122"/>
+                <a:cs typeface="Georgia" pitchFamily="34" charset="-120"/>
+              </a:rPr>
+              <a:t>pṛthvī</a:t>
+            </a:r>
+            <a:pPr algn="l" indent="0" marL="0">
+              <a:lnSpc>
+                <a:spcPts val="1820"/>
+              </a:lnSpc>
+              <a:spcBef>
+                <a:spcPts val="300"/>
+              </a:spcBef>
+              <a:spcAft>
+                <a:spcPts val="300"/>
+              </a:spcAft>
+              <a:buNone/>
+            </a:pPr>
+            <a:r>
+              <a:rPr lang="en-US" sz="1300" dirty="0">
+                <a:solidFill>
+                  <a:srgbClr val="1C2833"/>
+                </a:solidFill>
+                <a:latin typeface="Georgia" pitchFamily="34" charset="0"/>
+                <a:ea typeface="Georgia" pitchFamily="34" charset="-122"/>
+                <a:cs typeface="Georgia" pitchFamily="34" charset="-120"/>
+              </a:rPr>
+              <a:t> (earth)</a:t>
+            </a:r>
+            <a:endParaRPr lang="en-US" sz="1300" dirty="0"/>
+          </a:p>
+        </p:txBody>
+      </p:sp>
+      <p:sp>
+        <p:nvSpPr>
+          <p:cNvPr id="8" name="Text 6"/>
+          <p:cNvSpPr/>
+          <p:nvPr/>
+        </p:nvSpPr>
+        <p:spPr>
+          <a:xfrm>
+            <a:off x="692051" y="1612255"/>
+            <a:ext cx="7973389" cy="461963"/>
+          </a:xfrm>
+          <a:prstGeom prst="rect">
+            <a:avLst/>
+          </a:prstGeom>
+          <a:noFill/>
+          <a:ln/>
+        </p:spPr>
+        <p:txBody>
+          <a:bodyPr wrap="square" lIns="0" tIns="0" rIns="0" bIns="0" rtlCol="0" anchor="t"/>
+          <a:lstStyle/>
+          <a:p>
+            <a:pPr algn="l" indent="0" marL="0">
+              <a:lnSpc>
+                <a:spcPts val="1820"/>
+              </a:lnSpc>
+              <a:spcBef>
+                <a:spcPts val="300"/>
+              </a:spcBef>
+              <a:spcAft>
+                <a:spcPts val="300"/>
+              </a:spcAft>
+              <a:buNone/>
+            </a:pPr>
+            <a:r>
+              <a:rPr lang="en-US" sz="1300" i="1" dirty="0">
+                <a:solidFill>
+                  <a:srgbClr val="1C2833"/>
+                </a:solidFill>
+                <a:latin typeface="Georgia" pitchFamily="34" charset="0"/>
+                <a:ea typeface="Georgia" pitchFamily="34" charset="-122"/>
+                <a:cs typeface="Georgia" pitchFamily="34" charset="-120"/>
+              </a:rPr>
+              <a:t>Each new element carries forward the qualities of the ones before it and adds one new quality of its own. So earth has all five, while space has just one — sound.</a:t>
+            </a:r>
+            <a:endParaRPr lang="en-US" sz="1300" dirty="0"/>
+          </a:p>
+        </p:txBody>
+      </p:sp>
+      <p:sp>
+        <p:nvSpPr>
+          <p:cNvPr id="9" name="Text 7"/>
+          <p:cNvSpPr/>
+          <p:nvPr/>
+        </p:nvSpPr>
+        <p:spPr>
+          <a:xfrm>
+            <a:off x="692051" y="2112318"/>
+            <a:ext cx="7973389" cy="461963"/>
+          </a:xfrm>
+          <a:prstGeom prst="rect">
+            <a:avLst/>
+          </a:prstGeom>
+          <a:noFill/>
+          <a:ln/>
+        </p:spPr>
+        <p:txBody>
+          <a:bodyPr wrap="square" lIns="0" tIns="0" rIns="0" bIns="0" rtlCol="0" anchor="t"/>
+          <a:lstStyle/>
+          <a:p>
+            <a:pPr algn="l" indent="0" marL="0">
+              <a:lnSpc>
+                <a:spcPts val="1820"/>
+              </a:lnSpc>
+              <a:spcBef>
+                <a:spcPts val="300"/>
+              </a:spcBef>
+              <a:spcAft>
+                <a:spcPts val="300"/>
+              </a:spcAft>
+              <a:buNone/>
+            </a:pPr>
+            <a:r>
+              <a:rPr lang="en-US" sz="1300" dirty="0">
+                <a:solidFill>
+                  <a:srgbClr val="1C2833"/>
+                </a:solidFill>
+                <a:latin typeface="Georgia" pitchFamily="34" charset="0"/>
+                <a:ea typeface="Georgia" pitchFamily="34" charset="-122"/>
+                <a:cs typeface="Georgia" pitchFamily="34" charset="-120"/>
+              </a:rPr>
+              <a:t>&gt; "</a:t>
+            </a:r>
+            <a:pPr algn="l" indent="0" marL="0">
+              <a:lnSpc>
+                <a:spcPts val="1820"/>
+              </a:lnSpc>
+              <a:spcBef>
+                <a:spcPts val="300"/>
+              </a:spcBef>
+              <a:spcAft>
+                <a:spcPts val="300"/>
+              </a:spcAft>
+              <a:buNone/>
+            </a:pPr>
+            <a:r>
+              <a:rPr lang="en-US" sz="1300" i="1" dirty="0">
+                <a:solidFill>
+                  <a:srgbClr val="1C2833"/>
+                </a:solidFill>
+                <a:latin typeface="Georgia" pitchFamily="34" charset="0"/>
+                <a:ea typeface="Georgia" pitchFamily="34" charset="-122"/>
+                <a:cs typeface="Georgia" pitchFamily="34" charset="-120"/>
+              </a:rPr>
+              <a:t>mahīṁ gandha-guṇām ādhāt ...</a:t>
+            </a:r>
+            <a:pPr algn="l" indent="0" marL="0">
+              <a:lnSpc>
+                <a:spcPts val="1820"/>
+              </a:lnSpc>
+              <a:spcBef>
+                <a:spcPts val="300"/>
+              </a:spcBef>
+              <a:spcAft>
+                <a:spcPts val="300"/>
+              </a:spcAft>
+              <a:buNone/>
+            </a:pPr>
+            <a:r>
+              <a:rPr lang="en-US" sz="1300" dirty="0">
+                <a:solidFill>
+                  <a:srgbClr val="1C2833"/>
+                </a:solidFill>
+                <a:latin typeface="Georgia" pitchFamily="34" charset="0"/>
+                <a:ea typeface="Georgia" pitchFamily="34" charset="-122"/>
+                <a:cs typeface="Georgia" pitchFamily="34" charset="-120"/>
+              </a:rPr>
+              <a:t>" — "The earth was endowed with the quality of smell, by the impulse of time." &gt; — Śrīmad-Bhāgavatam 3.5.36</a:t>
+            </a:r>
+            <a:endParaRPr lang="en-US" sz="1300" dirty="0"/>
+          </a:p>
+        </p:txBody>
+      </p:sp>
+      <p:sp>
+        <p:nvSpPr>
+          <p:cNvPr id="10" name="Text 8"/>
+          <p:cNvSpPr/>
+          <p:nvPr/>
+        </p:nvSpPr>
+        <p:spPr>
+          <a:xfrm>
+            <a:off x="692051" y="2612380"/>
+            <a:ext cx="7973389" cy="461963"/>
+          </a:xfrm>
+          <a:prstGeom prst="rect">
+            <a:avLst/>
+          </a:prstGeom>
+          <a:noFill/>
+          <a:ln/>
+        </p:spPr>
+        <p:txBody>
+          <a:bodyPr wrap="square" lIns="0" tIns="0" rIns="0" bIns="0" rtlCol="0" anchor="t"/>
+          <a:lstStyle/>
+          <a:p>
+            <a:pPr algn="l" indent="0" marL="0">
+              <a:lnSpc>
+                <a:spcPts val="1820"/>
+              </a:lnSpc>
+              <a:spcBef>
+                <a:spcPts val="300"/>
+              </a:spcBef>
+              <a:spcAft>
+                <a:spcPts val="300"/>
+              </a:spcAft>
+              <a:buNone/>
+            </a:pPr>
+            <a:r>
+              <a:rPr lang="en-US" sz="1300" b="1" i="1" dirty="0">
+                <a:solidFill>
+                  <a:srgbClr val="1C2833"/>
+                </a:solidFill>
+                <a:latin typeface="Georgia" pitchFamily="34" charset="0"/>
+                <a:ea typeface="Georgia" pitchFamily="34" charset="-122"/>
+                <a:cs typeface="Georgia" pitchFamily="34" charset="-120"/>
+              </a:rPr>
+              <a:t>In your notebook, draw the five elements as nested layers, label each with its qualities, and write one sentence explaining why this order makes sense to you.</a:t>
+            </a:r>
+            <a:endParaRPr lang="en-US" sz="1300" dirty="0"/>
+          </a:p>
+        </p:txBody>
+      </p:sp>
+      <p:sp>
+        <p:nvSpPr>
+          <p:cNvPr id="11" name="Text 9"/>
+          <p:cNvSpPr/>
+          <p:nvPr/>
+        </p:nvSpPr>
+        <p:spPr>
+          <a:xfrm>
+            <a:off x="406301" y="4434929"/>
+            <a:ext cx="8498026" cy="213271"/>
+          </a:xfrm>
+          <a:prstGeom prst="rect">
+            <a:avLst/>
+          </a:prstGeom>
+          <a:noFill/>
+          <a:ln/>
+        </p:spPr>
+        <p:txBody>
+          <a:bodyPr wrap="square" lIns="0" tIns="0" rIns="0" bIns="0" rtlCol="0" anchor="t"/>
+          <a:lstStyle/>
+          <a:p>
+            <a:pPr algn="l" indent="0" marL="0">
+              <a:lnSpc>
+                <a:spcPts val="1680"/>
+              </a:lnSpc>
+              <a:spcBef>
+                <a:spcPts val="300"/>
+              </a:spcBef>
+              <a:spcAft>
+                <a:spcPts val="300"/>
+              </a:spcAft>
+              <a:buNone/>
+            </a:pPr>
+            <a:r>
+              <a:rPr lang="en-US" sz="1200" dirty="0">
+                <a:solidFill>
+                  <a:srgbClr val="1C2833"/>
+                </a:solidFill>
+                <a:latin typeface="Arial" pitchFamily="34" charset="0"/>
+                <a:ea typeface="Arial" pitchFamily="34" charset="-122"/>
+                <a:cs typeface="Arial" pitchFamily="34" charset="-120"/>
+              </a:rPr>
+              <a:t>Middle ·  · IKS Curriculum</a:t>
+            </a:r>
+            <a:endParaRPr lang="en-US" sz="1200" dirty="0"/>
+          </a:p>
+        </p:txBody>
+      </p:sp>
+    </p:spTree>
+  </p:cSld>
+  <p:clrMapOvr>
+    <a:masterClrMapping/>
+  </p:clrMapOvr>
+</p:sld>
+</file>
+
+<file path=ppt/slides/slide16.xml><?xml version="1.0" encoding="utf-8"?>
+<p:sld xmlns:a="http://schemas.openxmlformats.org/drawingml/2006/main" xmlns:r="http://schemas.openxmlformats.org/officeDocument/2006/relationships" xmlns:p="http://schemas.openxmlformats.org/presentationml/2006/main">
+  <p:cSld name="Slide 16">
+    <p:bg>
+      <p:bgPr>
+        <a:solidFill>
+          <a:srgbClr val="FFFFFF"/>
+        </a:solidFill>
+      </p:bgPr>
+    </p:bg>
+    <p:spTree>
+      <p:nvGrpSpPr>
+        <p:cNvPr id="1" name=""/>
+        <p:cNvGrpSpPr/>
+        <p:nvPr/>
+      </p:nvGrpSpPr>
+      <p:grpSpPr>
+        <a:xfrm>
+          <a:off x="0" y="0"/>
+          <a:ext cx="0" cy="0"/>
+          <a:chOff x="0" y="0"/>
+          <a:chExt cx="0" cy="0"/>
+        </a:xfrm>
+      </p:grpSpPr>
+      <p:sp>
+        <p:nvSpPr>
+          <p:cNvPr id="2" name="Text 0"/>
+          <p:cNvSpPr/>
+          <p:nvPr/>
+        </p:nvSpPr>
+        <p:spPr>
+          <a:xfrm>
+            <a:off x="0" y="0"/>
+            <a:ext cx="9144000" cy="101501"/>
+          </a:xfrm>
+          <a:prstGeom prst="rect">
+            <a:avLst/>
+          </a:prstGeom>
+          <a:solidFill>
+            <a:srgbClr val="277884"/>
+          </a:solidFill>
+          <a:ln/>
+        </p:spPr>
+        <p:txBody>
+          <a:bodyPr wrap="square" rtlCol="0" anchor="ctr"/>
+          <a:lstStyle/>
+          <a:p>
+            <a:pPr indent="0" marL="0">
+              <a:buNone/>
+            </a:pPr>
+            <a:endParaRPr lang="en-US" dirty="0"/>
+          </a:p>
+        </p:txBody>
+      </p:sp>
+      <p:sp>
+        <p:nvSpPr>
+          <p:cNvPr id="3" name="Text 1"/>
+          <p:cNvSpPr/>
+          <p:nvPr/>
+        </p:nvSpPr>
+        <p:spPr>
+          <a:xfrm>
+            <a:off x="406301" y="457051"/>
+            <a:ext cx="8498026" cy="274290"/>
+          </a:xfrm>
+          <a:prstGeom prst="rect">
+            <a:avLst/>
+          </a:prstGeom>
+          <a:noFill/>
+          <a:ln/>
+        </p:spPr>
+        <p:txBody>
+          <a:bodyPr wrap="square" lIns="0" tIns="0" rIns="0" bIns="0" rtlCol="0" anchor="t"/>
+          <a:lstStyle/>
+          <a:p>
+            <a:pPr algn="l" indent="0" marL="0">
+              <a:lnSpc>
+                <a:spcPts val="2160"/>
+              </a:lnSpc>
+              <a:spcBef>
+                <a:spcPts val="600"/>
+              </a:spcBef>
+              <a:spcAft>
+                <a:spcPts val="800"/>
+              </a:spcAft>
+              <a:buNone/>
+            </a:pPr>
+            <a:r>
+              <a:rPr lang="en-US" sz="1800" b="1" dirty="0">
+                <a:solidFill>
+                  <a:srgbClr val="FE4447"/>
+                </a:solidFill>
+                <a:latin typeface="Georgia" pitchFamily="34" charset="0"/>
+                <a:ea typeface="Georgia" pitchFamily="34" charset="-122"/>
+                <a:cs typeface="Georgia" pitchFamily="34" charset="-120"/>
+              </a:rPr>
+              <a:t>Homework</a:t>
+            </a:r>
+            <a:endParaRPr lang="en-US" sz="1800" dirty="0"/>
+          </a:p>
+        </p:txBody>
+      </p:sp>
+      <p:sp>
+        <p:nvSpPr>
+          <p:cNvPr id="4" name="Text 2"/>
+          <p:cNvSpPr/>
+          <p:nvPr/>
+        </p:nvSpPr>
+        <p:spPr>
+          <a:xfrm>
+            <a:off x="634901" y="883593"/>
+            <a:ext cx="8102798" cy="487561"/>
+          </a:xfrm>
+          <a:prstGeom prst="rect">
+            <a:avLst/>
+          </a:prstGeom>
+          <a:noFill/>
+          <a:ln/>
+        </p:spPr>
+        <p:txBody>
+          <a:bodyPr wrap="square" lIns="0" tIns="0" rIns="0" bIns="0" rtlCol="0" anchor="t"/>
+          <a:lstStyle/>
+          <a:p>
+            <a:pPr algn="l" marL="342900" indent="-342900">
+              <a:lnSpc>
+                <a:spcPts val="1620"/>
+              </a:lnSpc>
+              <a:spcAft>
+                <a:spcPts val="300"/>
+              </a:spcAft>
+              <a:buSzPct val="100000"/>
+              <a:buChar char="•"/>
+            </a:pPr>
+            <a:r>
+              <a:rPr lang="en-US" sz="1200" dirty="0">
+                <a:solidFill>
+                  <a:srgbClr val="1C2833"/>
+                </a:solidFill>
+                <a:latin typeface="Arial" pitchFamily="34" charset="0"/>
+                <a:ea typeface="Arial" pitchFamily="34" charset="-122"/>
+                <a:cs typeface="Arial" pitchFamily="34" charset="-120"/>
+              </a:rPr>
+              <a:t>Find ONE thing in your home that perfectly demonstrates the "all five qualities" of </a:t>
+            </a:r>
+            <a:pPr algn="l" indent="0" marL="0">
+              <a:lnSpc>
+                <a:spcPts val="1620"/>
+              </a:lnSpc>
+              <a:spcAft>
+                <a:spcPts val="300"/>
+              </a:spcAft>
+              <a:buNone/>
+            </a:pPr>
+            <a:r>
+              <a:rPr lang="en-US" sz="1200" i="1" dirty="0">
+                <a:solidFill>
+                  <a:srgbClr val="1C2833"/>
+                </a:solidFill>
+                <a:latin typeface="Arial" pitchFamily="34" charset="0"/>
+                <a:ea typeface="Arial" pitchFamily="34" charset="-122"/>
+                <a:cs typeface="Arial" pitchFamily="34" charset="-120"/>
+              </a:rPr>
+              <a:t>pṛthvī</a:t>
+            </a:r>
+            <a:pPr algn="l" indent="0" marL="0">
+              <a:lnSpc>
+                <a:spcPts val="1620"/>
+              </a:lnSpc>
+              <a:spcAft>
+                <a:spcPts val="300"/>
+              </a:spcAft>
+              <a:buNone/>
+            </a:pPr>
+            <a:r>
+              <a:rPr lang="en-US" sz="1200" dirty="0">
+                <a:solidFill>
+                  <a:srgbClr val="1C2833"/>
+                </a:solidFill>
+                <a:latin typeface="Arial" pitchFamily="34" charset="0"/>
+                <a:ea typeface="Arial" pitchFamily="34" charset="-122"/>
+                <a:cs typeface="Arial" pitchFamily="34" charset="-120"/>
+              </a:rPr>
+              <a:t>. You should be able to hear it, touch it, see it, taste it (or imagine the taste), and smell it. Bring a 2-sentence description.</a:t>
+            </a:r>
+            <a:endParaRPr lang="en-US" sz="1200" dirty="0"/>
+          </a:p>
+        </p:txBody>
+      </p:sp>
+      <p:sp>
+        <p:nvSpPr>
+          <p:cNvPr id="5" name="Text 3"/>
+          <p:cNvSpPr/>
+          <p:nvPr/>
+        </p:nvSpPr>
+        <p:spPr>
+          <a:xfrm>
+            <a:off x="406301" y="4434929"/>
+            <a:ext cx="8498026" cy="213271"/>
+          </a:xfrm>
+          <a:prstGeom prst="rect">
+            <a:avLst/>
+          </a:prstGeom>
+          <a:noFill/>
+          <a:ln/>
+        </p:spPr>
+        <p:txBody>
+          <a:bodyPr wrap="square" lIns="0" tIns="0" rIns="0" bIns="0" rtlCol="0" anchor="t"/>
+          <a:lstStyle/>
+          <a:p>
+            <a:pPr algn="l" indent="0" marL="0">
+              <a:lnSpc>
+                <a:spcPts val="1680"/>
+              </a:lnSpc>
+              <a:spcBef>
+                <a:spcPts val="300"/>
+              </a:spcBef>
+              <a:spcAft>
+                <a:spcPts val="300"/>
+              </a:spcAft>
+              <a:buNone/>
+            </a:pPr>
+            <a:r>
+              <a:rPr lang="en-US" sz="1200" dirty="0">
+                <a:solidFill>
+                  <a:srgbClr val="1C2833"/>
+                </a:solidFill>
+                <a:latin typeface="Arial" pitchFamily="34" charset="0"/>
+                <a:ea typeface="Arial" pitchFamily="34" charset="-122"/>
+                <a:cs typeface="Arial" pitchFamily="34" charset="-120"/>
+              </a:rPr>
+              <a:t>Middle ·  · IKS Curriculum</a:t>
+            </a:r>
+            <a:endParaRPr lang="en-US" sz="1200" dirty="0"/>
+          </a:p>
+        </p:txBody>
+      </p:sp>
+    </p:spTree>
+  </p:cSld>
+  <p:clrMapOvr>
+    <a:masterClrMapping/>
+  </p:clrMapOvr>
+</p:sld>
+</file>
+
+<file path=ppt/slides/slide17.xml><?xml version="1.0" encoding="utf-8"?>
+<p:sld xmlns:a="http://schemas.openxmlformats.org/drawingml/2006/main" xmlns:r="http://schemas.openxmlformats.org/officeDocument/2006/relationships" xmlns:p="http://schemas.openxmlformats.org/presentationml/2006/main">
+  <p:cSld name="Slide 17">
+    <p:bg>
+      <p:bgPr>
+        <a:solidFill>
+          <a:srgbClr val="FFFFFF"/>
+        </a:solidFill>
+      </p:bgPr>
+    </p:bg>
+    <p:spTree>
+      <p:nvGrpSpPr>
+        <p:cNvPr id="1" name=""/>
+        <p:cNvGrpSpPr/>
+        <p:nvPr/>
+      </p:nvGrpSpPr>
+      <p:grpSpPr>
+        <a:xfrm>
+          <a:off x="0" y="0"/>
+          <a:ext cx="0" cy="0"/>
+          <a:chOff x="0" y="0"/>
+          <a:chExt cx="0" cy="0"/>
+        </a:xfrm>
+      </p:grpSpPr>
+      <p:sp>
+        <p:nvSpPr>
+          <p:cNvPr id="2" name="Text 0"/>
+          <p:cNvSpPr/>
+          <p:nvPr/>
+        </p:nvSpPr>
+        <p:spPr>
+          <a:xfrm>
+            <a:off x="0" y="0"/>
+            <a:ext cx="9144000" cy="101501"/>
+          </a:xfrm>
+          <a:prstGeom prst="rect">
+            <a:avLst/>
+          </a:prstGeom>
+          <a:solidFill>
+            <a:srgbClr val="277884"/>
+          </a:solidFill>
+          <a:ln/>
+        </p:spPr>
+        <p:txBody>
+          <a:bodyPr wrap="square" rtlCol="0" anchor="ctr"/>
+          <a:lstStyle/>
+          <a:p>
+            <a:pPr indent="0" marL="0">
+              <a:buNone/>
+            </a:pPr>
+            <a:endParaRPr lang="en-US" dirty="0"/>
+          </a:p>
+        </p:txBody>
+      </p:sp>
+      <p:sp>
+        <p:nvSpPr>
+          <p:cNvPr id="3" name="Text 1"/>
+          <p:cNvSpPr/>
+          <p:nvPr/>
+        </p:nvSpPr>
+        <p:spPr>
+          <a:xfrm>
+            <a:off x="406301" y="457051"/>
+            <a:ext cx="8498026" cy="274290"/>
+          </a:xfrm>
+          <a:prstGeom prst="rect">
+            <a:avLst/>
+          </a:prstGeom>
+          <a:noFill/>
+          <a:ln/>
+        </p:spPr>
+        <p:txBody>
+          <a:bodyPr wrap="square" lIns="0" tIns="0" rIns="0" bIns="0" rtlCol="0" anchor="t"/>
+          <a:lstStyle/>
+          <a:p>
+            <a:pPr algn="l" indent="0" marL="0">
+              <a:lnSpc>
+                <a:spcPts val="2160"/>
+              </a:lnSpc>
+              <a:spcBef>
+                <a:spcPts val="600"/>
+              </a:spcBef>
+              <a:spcAft>
+                <a:spcPts val="800"/>
+              </a:spcAft>
+              <a:buNone/>
+            </a:pPr>
+            <a:r>
+              <a:rPr lang="en-US" sz="1800" b="1" dirty="0">
+                <a:solidFill>
+                  <a:srgbClr val="FE4447"/>
+                </a:solidFill>
+                <a:latin typeface="Georgia" pitchFamily="34" charset="0"/>
+                <a:ea typeface="Georgia" pitchFamily="34" charset="-122"/>
+                <a:cs typeface="Georgia" pitchFamily="34" charset="-120"/>
+              </a:rPr>
+              <a:t>Differentiation</a:t>
+            </a:r>
+            <a:endParaRPr lang="en-US" sz="1800" dirty="0"/>
+          </a:p>
+        </p:txBody>
+      </p:sp>
+      <p:sp>
+        <p:nvSpPr>
+          <p:cNvPr id="4" name="Text 2"/>
+          <p:cNvSpPr/>
+          <p:nvPr/>
+        </p:nvSpPr>
+        <p:spPr>
+          <a:xfrm>
+            <a:off x="634901" y="883593"/>
+            <a:ext cx="8102798" cy="937022"/>
+          </a:xfrm>
+          <a:prstGeom prst="rect">
+            <a:avLst/>
+          </a:prstGeom>
+          <a:noFill/>
+          <a:ln/>
+        </p:spPr>
+        <p:txBody>
+          <a:bodyPr wrap="square" lIns="0" tIns="0" rIns="0" bIns="0" rtlCol="0" anchor="t"/>
+          <a:lstStyle/>
+          <a:p>
+            <a:pPr algn="l" marL="342900" indent="-342900">
+              <a:lnSpc>
+                <a:spcPts val="1620"/>
+              </a:lnSpc>
+              <a:spcAft>
+                <a:spcPts val="300"/>
+              </a:spcAft>
+              <a:buSzPct val="100000"/>
+              <a:buChar char="•"/>
+            </a:pPr>
+            <a:r>
+              <a:rPr lang="en-US" sz="1200" b="1" dirty="0">
+                <a:solidFill>
+                  <a:srgbClr val="1C2833"/>
+                </a:solidFill>
+                <a:latin typeface="Arial" pitchFamily="34" charset="0"/>
+                <a:ea typeface="Arial" pitchFamily="34" charset="-122"/>
+                <a:cs typeface="Arial" pitchFamily="34" charset="-120"/>
+              </a:rPr>
+              <a:t>One tier up:</a:t>
+            </a:r>
+            <a:pPr algn="l" indent="0" marL="0">
+              <a:lnSpc>
+                <a:spcPts val="1620"/>
+              </a:lnSpc>
+              <a:spcAft>
+                <a:spcPts val="300"/>
+              </a:spcAft>
+              <a:buNone/>
+            </a:pPr>
+            <a:r>
+              <a:rPr lang="en-US" sz="1200" dirty="0">
+                <a:solidFill>
+                  <a:srgbClr val="1C2833"/>
+                </a:solidFill>
+                <a:latin typeface="Arial" pitchFamily="34" charset="0"/>
+                <a:ea typeface="Arial" pitchFamily="34" charset="-122"/>
+                <a:cs typeface="Arial" pitchFamily="34" charset="-120"/>
+              </a:rPr>
+              <a:t> Modern physics has electric and magnetic fields — would they fit into this sequence? If so, where? Defend your answer.</a:t>
+            </a:r>
+            <a:endParaRPr lang="en-US" sz="1200" dirty="0"/>
+          </a:p>
+          <a:p>
+            <a:pPr algn="l" marL="342900" indent="-342900">
+              <a:lnSpc>
+                <a:spcPts val="1620"/>
+              </a:lnSpc>
+              <a:spcAft>
+                <a:spcPts val="300"/>
+              </a:spcAft>
+              <a:buSzPct val="100000"/>
+              <a:buChar char="•"/>
+            </a:pPr>
+            <a:r>
+              <a:rPr lang="en-US" sz="1200" b="1" dirty="0">
+                <a:solidFill>
+                  <a:srgbClr val="1C2833"/>
+                </a:solidFill>
+                <a:latin typeface="Arial" pitchFamily="34" charset="0"/>
+                <a:ea typeface="Arial" pitchFamily="34" charset="-122"/>
+                <a:cs typeface="Arial" pitchFamily="34" charset="-120"/>
+              </a:rPr>
+              <a:t>One tier down:</a:t>
+            </a:r>
+            <a:pPr algn="l" indent="0" marL="0">
+              <a:lnSpc>
+                <a:spcPts val="1620"/>
+              </a:lnSpc>
+              <a:spcAft>
+                <a:spcPts val="300"/>
+              </a:spcAft>
+              <a:buNone/>
+            </a:pPr>
+            <a:r>
+              <a:rPr lang="en-US" sz="1200" dirty="0">
+                <a:solidFill>
+                  <a:srgbClr val="1C2833"/>
+                </a:solidFill>
+                <a:latin typeface="Arial" pitchFamily="34" charset="0"/>
+                <a:ea typeface="Arial" pitchFamily="34" charset="-122"/>
+                <a:cs typeface="Arial" pitchFamily="34" charset="-120"/>
+              </a:rPr>
+              <a:t> Just remember the order — space, air, fire, water, earth — and that earth has the most qualities. The "why" can come on Day 3.</a:t>
+            </a:r>
+            <a:endParaRPr lang="en-US" sz="1200" dirty="0"/>
+          </a:p>
+        </p:txBody>
+      </p:sp>
+      <p:sp>
+        <p:nvSpPr>
+          <p:cNvPr id="5" name="Text 3"/>
+          <p:cNvSpPr/>
+          <p:nvPr/>
+        </p:nvSpPr>
+        <p:spPr>
+          <a:xfrm>
+            <a:off x="406301" y="4434929"/>
+            <a:ext cx="8498026" cy="213271"/>
+          </a:xfrm>
+          <a:prstGeom prst="rect">
+            <a:avLst/>
+          </a:prstGeom>
+          <a:noFill/>
+          <a:ln/>
+        </p:spPr>
+        <p:txBody>
+          <a:bodyPr wrap="square" lIns="0" tIns="0" rIns="0" bIns="0" rtlCol="0" anchor="t"/>
+          <a:lstStyle/>
+          <a:p>
+            <a:pPr algn="l" indent="0" marL="0">
+              <a:lnSpc>
+                <a:spcPts val="1680"/>
+              </a:lnSpc>
+              <a:spcBef>
+                <a:spcPts val="300"/>
+              </a:spcBef>
+              <a:spcAft>
+                <a:spcPts val="300"/>
+              </a:spcAft>
+              <a:buNone/>
+            </a:pPr>
+            <a:r>
+              <a:rPr lang="en-US" sz="1200" dirty="0">
+                <a:solidFill>
+                  <a:srgbClr val="1C2833"/>
+                </a:solidFill>
+                <a:latin typeface="Arial" pitchFamily="34" charset="0"/>
+                <a:ea typeface="Arial" pitchFamily="34" charset="-122"/>
+                <a:cs typeface="Arial" pitchFamily="34" charset="-120"/>
+              </a:rPr>
+              <a:t>Middle ·  · IKS Curriculum</a:t>
+            </a:r>
+            <a:endParaRPr lang="en-US" sz="1200" dirty="0"/>
+          </a:p>
+        </p:txBody>
+      </p:sp>
+    </p:spTree>
+  </p:cSld>
+  <p:clrMapOvr>
+    <a:masterClrMapping/>
+  </p:clrMapOvr>
+</p:sld>
+</file>
+
+<file path=ppt/slides/slide18.xml><?xml version="1.0" encoding="utf-8"?>
+<p:sld xmlns:a="http://schemas.openxmlformats.org/drawingml/2006/main" xmlns:r="http://schemas.openxmlformats.org/officeDocument/2006/relationships" xmlns:p="http://schemas.openxmlformats.org/presentationml/2006/main">
+  <p:cSld name="Slide 18">
+    <p:bg>
+      <p:bgPr>
+        <a:solidFill>
+          <a:srgbClr val="FFFFFF"/>
+        </a:solidFill>
+      </p:bgPr>
+    </p:bg>
+    <p:spTree>
+      <p:nvGrpSpPr>
+        <p:cNvPr id="1" name=""/>
+        <p:cNvGrpSpPr/>
+        <p:nvPr/>
+      </p:nvGrpSpPr>
+      <p:grpSpPr>
+        <a:xfrm>
+          <a:off x="0" y="0"/>
+          <a:ext cx="0" cy="0"/>
+          <a:chOff x="0" y="0"/>
+          <a:chExt cx="0" cy="0"/>
+        </a:xfrm>
+      </p:grpSpPr>
+      <p:sp>
+        <p:nvSpPr>
+          <p:cNvPr id="2" name="Text 0"/>
+          <p:cNvSpPr/>
+          <p:nvPr/>
+        </p:nvSpPr>
+        <p:spPr>
+          <a:xfrm>
+            <a:off x="0" y="0"/>
+            <a:ext cx="9144000" cy="101501"/>
+          </a:xfrm>
+          <a:prstGeom prst="rect">
+            <a:avLst/>
+          </a:prstGeom>
+          <a:solidFill>
+            <a:srgbClr val="277884"/>
+          </a:solidFill>
+          <a:ln/>
+        </p:spPr>
+        <p:txBody>
+          <a:bodyPr wrap="square" rtlCol="0" anchor="ctr"/>
+          <a:lstStyle/>
+          <a:p>
+            <a:pPr indent="0" marL="0">
+              <a:buNone/>
+            </a:pPr>
+            <a:endParaRPr lang="en-US" dirty="0"/>
+          </a:p>
+        </p:txBody>
+      </p:sp>
+      <p:sp>
+        <p:nvSpPr>
+          <p:cNvPr id="3" name="Text 1"/>
+          <p:cNvSpPr/>
+          <p:nvPr/>
+        </p:nvSpPr>
+        <p:spPr>
+          <a:xfrm>
+            <a:off x="406301" y="457051"/>
+            <a:ext cx="8498026" cy="274290"/>
+          </a:xfrm>
+          <a:prstGeom prst="rect">
+            <a:avLst/>
+          </a:prstGeom>
+          <a:noFill/>
+          <a:ln/>
+        </p:spPr>
+        <p:txBody>
+          <a:bodyPr wrap="square" lIns="0" tIns="0" rIns="0" bIns="0" rtlCol="0" anchor="t"/>
+          <a:lstStyle/>
+          <a:p>
+            <a:pPr algn="l" indent="0" marL="0">
+              <a:lnSpc>
+                <a:spcPts val="2160"/>
+              </a:lnSpc>
+              <a:spcBef>
+                <a:spcPts val="600"/>
+              </a:spcBef>
+              <a:spcAft>
+                <a:spcPts val="800"/>
+              </a:spcAft>
+              <a:buNone/>
+            </a:pPr>
+            <a:r>
+              <a:rPr lang="en-US" sz="1800" b="1" dirty="0">
+                <a:solidFill>
+                  <a:srgbClr val="FE4447"/>
+                </a:solidFill>
+                <a:latin typeface="Georgia" pitchFamily="34" charset="0"/>
+                <a:ea typeface="Georgia" pitchFamily="34" charset="-122"/>
+                <a:cs typeface="Georgia" pitchFamily="34" charset="-120"/>
+              </a:rPr>
+              <a:t>Teacher notes</a:t>
+            </a:r>
+            <a:endParaRPr lang="en-US" sz="1800" dirty="0"/>
+          </a:p>
+        </p:txBody>
+      </p:sp>
+      <p:sp>
+        <p:nvSpPr>
+          <p:cNvPr id="4" name="Text 2"/>
+          <p:cNvSpPr/>
+          <p:nvPr/>
+        </p:nvSpPr>
+        <p:spPr>
+          <a:xfrm>
+            <a:off x="634901" y="883593"/>
+            <a:ext cx="8102798" cy="1592163"/>
+          </a:xfrm>
+          <a:prstGeom prst="rect">
+            <a:avLst/>
+          </a:prstGeom>
+          <a:noFill/>
+          <a:ln/>
+        </p:spPr>
+        <p:txBody>
+          <a:bodyPr wrap="square" lIns="0" tIns="0" rIns="0" bIns="0" rtlCol="0" anchor="t"/>
+          <a:lstStyle/>
+          <a:p>
+            <a:pPr algn="l" marL="342900" indent="-342900">
+              <a:lnSpc>
+                <a:spcPts val="1620"/>
+              </a:lnSpc>
+              <a:spcAft>
+                <a:spcPts val="300"/>
+              </a:spcAft>
+              <a:buSzPct val="100000"/>
+              <a:buChar char="•"/>
+            </a:pPr>
+            <a:r>
+              <a:rPr lang="en-US" sz="1200" dirty="0">
+                <a:solidFill>
+                  <a:srgbClr val="1C2833"/>
+                </a:solidFill>
+                <a:latin typeface="Arial" pitchFamily="34" charset="0"/>
+                <a:ea typeface="Arial" pitchFamily="34" charset="-122"/>
+                <a:cs typeface="Arial" pitchFamily="34" charset="-120"/>
+              </a:rPr>
+              <a:t>The quality-counting rule is mathematically elegant and is the single best hook for students who like patterns. Linger here if your class is enjoying it.</a:t>
+            </a:r>
+            <a:endParaRPr lang="en-US" sz="1200" dirty="0"/>
+          </a:p>
+          <a:p>
+            <a:pPr algn="l" marL="342900" indent="-342900">
+              <a:lnSpc>
+                <a:spcPts val="1620"/>
+              </a:lnSpc>
+              <a:spcAft>
+                <a:spcPts val="300"/>
+              </a:spcAft>
+              <a:buSzPct val="100000"/>
+              <a:buChar char="•"/>
+            </a:pPr>
+            <a:r>
+              <a:rPr lang="en-US" sz="1200" dirty="0">
+                <a:solidFill>
+                  <a:srgbClr val="1C2833"/>
+                </a:solidFill>
+                <a:latin typeface="Arial" pitchFamily="34" charset="0"/>
+                <a:ea typeface="Arial" pitchFamily="34" charset="-122"/>
+                <a:cs typeface="Arial" pitchFamily="34" charset="-120"/>
+              </a:rPr>
+              <a:t>A student may ask: "But doesn't fire have a smell? Doesn't water have a colour?" — Good question. The SB framework is talking about the </a:t>
+            </a:r>
+            <a:pPr algn="l" indent="0" marL="0">
+              <a:lnSpc>
+                <a:spcPts val="1620"/>
+              </a:lnSpc>
+              <a:spcAft>
+                <a:spcPts val="300"/>
+              </a:spcAft>
+              <a:buNone/>
+            </a:pPr>
+            <a:r>
+              <a:rPr lang="en-US" sz="1200" i="1" dirty="0">
+                <a:solidFill>
+                  <a:srgbClr val="1C2833"/>
+                </a:solidFill>
+                <a:latin typeface="Arial" pitchFamily="34" charset="0"/>
+                <a:ea typeface="Arial" pitchFamily="34" charset="-122"/>
+                <a:cs typeface="Arial" pitchFamily="34" charset="-120"/>
+              </a:rPr>
+              <a:t>defining</a:t>
+            </a:r>
+            <a:pPr algn="l" indent="0" marL="0">
+              <a:lnSpc>
+                <a:spcPts val="1620"/>
+              </a:lnSpc>
+              <a:spcAft>
+                <a:spcPts val="300"/>
+              </a:spcAft>
+              <a:buNone/>
+            </a:pPr>
+            <a:r>
+              <a:rPr lang="en-US" sz="1200" dirty="0">
+                <a:solidFill>
+                  <a:srgbClr val="1C2833"/>
+                </a:solidFill>
+                <a:latin typeface="Arial" pitchFamily="34" charset="0"/>
+                <a:ea typeface="Arial" pitchFamily="34" charset="-122"/>
+                <a:cs typeface="Arial" pitchFamily="34" charset="-120"/>
+              </a:rPr>
+              <a:t> quality each element </a:t>
+            </a:r>
+            <a:pPr algn="l" indent="0" marL="0">
+              <a:lnSpc>
+                <a:spcPts val="1620"/>
+              </a:lnSpc>
+              <a:spcAft>
+                <a:spcPts val="300"/>
+              </a:spcAft>
+              <a:buNone/>
+            </a:pPr>
+            <a:r>
+              <a:rPr lang="en-US" sz="1200" i="1" dirty="0">
+                <a:solidFill>
+                  <a:srgbClr val="1C2833"/>
+                </a:solidFill>
+                <a:latin typeface="Arial" pitchFamily="34" charset="0"/>
+                <a:ea typeface="Arial" pitchFamily="34" charset="-122"/>
+                <a:cs typeface="Arial" pitchFamily="34" charset="-120"/>
+              </a:rPr>
+              <a:t>adds</a:t>
+            </a:r>
+            <a:pPr algn="l" indent="0" marL="0">
+              <a:lnSpc>
+                <a:spcPts val="1620"/>
+              </a:lnSpc>
+              <a:spcAft>
+                <a:spcPts val="300"/>
+              </a:spcAft>
+              <a:buNone/>
+            </a:pPr>
+            <a:r>
+              <a:rPr lang="en-US" sz="1200" dirty="0">
+                <a:solidFill>
+                  <a:srgbClr val="1C2833"/>
+                </a:solidFill>
+                <a:latin typeface="Arial" pitchFamily="34" charset="0"/>
+                <a:ea typeface="Arial" pitchFamily="34" charset="-122"/>
+                <a:cs typeface="Arial" pitchFamily="34" charset="-120"/>
+              </a:rPr>
+              <a:t>; we still perceive lower qualities in higher elements (e.g. water has all four — sound, touch, form, taste — but its </a:t>
+            </a:r>
+            <a:pPr algn="l" indent="0" marL="0">
+              <a:lnSpc>
+                <a:spcPts val="1620"/>
+              </a:lnSpc>
+              <a:spcAft>
+                <a:spcPts val="300"/>
+              </a:spcAft>
+              <a:buNone/>
+            </a:pPr>
+            <a:r>
+              <a:rPr lang="en-US" sz="1200" i="1" dirty="0">
+                <a:solidFill>
+                  <a:srgbClr val="1C2833"/>
+                </a:solidFill>
+                <a:latin typeface="Arial" pitchFamily="34" charset="0"/>
+                <a:ea typeface="Arial" pitchFamily="34" charset="-122"/>
+                <a:cs typeface="Arial" pitchFamily="34" charset="-120"/>
+              </a:rPr>
+              <a:t>defining</a:t>
+            </a:r>
+            <a:pPr algn="l" indent="0" marL="0">
+              <a:lnSpc>
+                <a:spcPts val="1620"/>
+              </a:lnSpc>
+              <a:spcAft>
+                <a:spcPts val="300"/>
+              </a:spcAft>
+              <a:buNone/>
+            </a:pPr>
+            <a:r>
+              <a:rPr lang="en-US" sz="1200" dirty="0">
+                <a:solidFill>
+                  <a:srgbClr val="1C2833"/>
+                </a:solidFill>
+                <a:latin typeface="Arial" pitchFamily="34" charset="0"/>
+                <a:ea typeface="Arial" pitchFamily="34" charset="-122"/>
+                <a:cs typeface="Arial" pitchFamily="34" charset="-120"/>
+              </a:rPr>
+              <a:t> contribution is taste/coolness).</a:t>
+            </a:r>
+            <a:endParaRPr lang="en-US" sz="1200" dirty="0"/>
+          </a:p>
+          <a:p>
+            <a:pPr algn="l" marL="342900" indent="-342900">
+              <a:lnSpc>
+                <a:spcPts val="1620"/>
+              </a:lnSpc>
+              <a:spcAft>
+                <a:spcPts val="300"/>
+              </a:spcAft>
+              <a:buSzPct val="100000"/>
+              <a:buChar char="•"/>
+            </a:pPr>
+            <a:r>
+              <a:rPr lang="en-US" sz="1200" dirty="0">
+                <a:solidFill>
+                  <a:srgbClr val="1C2833"/>
+                </a:solidFill>
+                <a:latin typeface="Arial" pitchFamily="34" charset="0"/>
+                <a:ea typeface="Arial" pitchFamily="34" charset="-122"/>
+                <a:cs typeface="Arial" pitchFamily="34" charset="-120"/>
+              </a:rPr>
+              <a:t>Sanskrit </a:t>
+            </a:r>
+            <a:pPr algn="l" indent="0" marL="0">
+              <a:lnSpc>
+                <a:spcPts val="1620"/>
+              </a:lnSpc>
+              <a:spcAft>
+                <a:spcPts val="300"/>
+              </a:spcAft>
+              <a:buNone/>
+            </a:pPr>
+            <a:r>
+              <a:rPr lang="en-US" sz="1200" i="1" dirty="0">
+                <a:solidFill>
+                  <a:srgbClr val="1C2833"/>
+                </a:solidFill>
+                <a:latin typeface="Arial" pitchFamily="34" charset="0"/>
+                <a:ea typeface="Arial" pitchFamily="34" charset="-122"/>
+                <a:cs typeface="Arial" pitchFamily="34" charset="-120"/>
+              </a:rPr>
+              <a:t>guṇa</a:t>
+            </a:r>
+            <a:pPr algn="l" indent="0" marL="0">
+              <a:lnSpc>
+                <a:spcPts val="1620"/>
+              </a:lnSpc>
+              <a:spcAft>
+                <a:spcPts val="300"/>
+              </a:spcAft>
+              <a:buNone/>
+            </a:pPr>
+            <a:r>
+              <a:rPr lang="en-US" sz="1200" dirty="0">
+                <a:solidFill>
+                  <a:srgbClr val="1C2833"/>
+                </a:solidFill>
+                <a:latin typeface="Arial" pitchFamily="34" charset="0"/>
+                <a:ea typeface="Arial" pitchFamily="34" charset="-122"/>
+                <a:cs typeface="Arial" pitchFamily="34" charset="-120"/>
+              </a:rPr>
+              <a:t> has a deeper meaning in Sāṅkhya philosophy (sattva/rajas/tamas). At Middle band, don't open that door — say "we'll meet a different meaning of </a:t>
+            </a:r>
+            <a:pPr algn="l" indent="0" marL="0">
+              <a:lnSpc>
+                <a:spcPts val="1620"/>
+              </a:lnSpc>
+              <a:spcAft>
+                <a:spcPts val="300"/>
+              </a:spcAft>
+              <a:buNone/>
+            </a:pPr>
+            <a:r>
+              <a:rPr lang="en-US" sz="1200" i="1" dirty="0">
+                <a:solidFill>
+                  <a:srgbClr val="1C2833"/>
+                </a:solidFill>
+                <a:latin typeface="Arial" pitchFamily="34" charset="0"/>
+                <a:ea typeface="Arial" pitchFamily="34" charset="-122"/>
+                <a:cs typeface="Arial" pitchFamily="34" charset="-120"/>
+              </a:rPr>
+              <a:t>guṇa</a:t>
+            </a:r>
+            <a:pPr algn="l" indent="0" marL="0">
+              <a:lnSpc>
+                <a:spcPts val="1620"/>
+              </a:lnSpc>
+              <a:spcAft>
+                <a:spcPts val="300"/>
+              </a:spcAft>
+              <a:buNone/>
+            </a:pPr>
+            <a:r>
+              <a:rPr lang="en-US" sz="1200" dirty="0">
+                <a:solidFill>
+                  <a:srgbClr val="1C2833"/>
+                </a:solidFill>
+                <a:latin typeface="Arial" pitchFamily="34" charset="0"/>
+                <a:ea typeface="Arial" pitchFamily="34" charset="-122"/>
+                <a:cs typeface="Arial" pitchFamily="34" charset="-120"/>
+              </a:rPr>
+              <a:t> in a later module."</a:t>
+            </a:r>
+            <a:endParaRPr lang="en-US" sz="1200" dirty="0"/>
+          </a:p>
+        </p:txBody>
+      </p:sp>
+      <p:sp>
+        <p:nvSpPr>
+          <p:cNvPr id="5" name="Text 3"/>
+          <p:cNvSpPr/>
+          <p:nvPr/>
+        </p:nvSpPr>
+        <p:spPr>
+          <a:xfrm>
+            <a:off x="406301" y="4434929"/>
+            <a:ext cx="8498026" cy="213271"/>
+          </a:xfrm>
+          <a:prstGeom prst="rect">
+            <a:avLst/>
+          </a:prstGeom>
+          <a:noFill/>
+          <a:ln/>
+        </p:spPr>
+        <p:txBody>
+          <a:bodyPr wrap="square" lIns="0" tIns="0" rIns="0" bIns="0" rtlCol="0" anchor="t"/>
+          <a:lstStyle/>
+          <a:p>
+            <a:pPr algn="l" indent="0" marL="0">
+              <a:lnSpc>
+                <a:spcPts val="1680"/>
+              </a:lnSpc>
+              <a:spcBef>
+                <a:spcPts val="300"/>
+              </a:spcBef>
+              <a:spcAft>
+                <a:spcPts val="300"/>
+              </a:spcAft>
+              <a:buNone/>
+            </a:pPr>
+            <a:r>
+              <a:rPr lang="en-US" sz="1200" dirty="0">
+                <a:solidFill>
+                  <a:srgbClr val="1C2833"/>
+                </a:solidFill>
+                <a:latin typeface="Arial" pitchFamily="34" charset="0"/>
+                <a:ea typeface="Arial" pitchFamily="34" charset="-122"/>
+                <a:cs typeface="Arial" pitchFamily="34" charset="-120"/>
+              </a:rPr>
+              <a:t>Middle ·  · IKS Curriculum</a:t>
+            </a:r>
+            <a:endParaRPr lang="en-US" sz="1200" dirty="0"/>
+          </a:p>
+        </p:txBody>
+      </p:sp>
+    </p:spTree>
+  </p:cSld>
+  <p:clrMapOvr>
+    <a:masterClrMapping/>
+  </p:clrMapOvr>
+</p:sld>
+</file>
+
+<file path=ppt/slides/slide19.xml><?xml version="1.0" encoding="utf-8"?>
+<p:sld xmlns:a="http://schemas.openxmlformats.org/drawingml/2006/main" xmlns:r="http://schemas.openxmlformats.org/officeDocument/2006/relationships" xmlns:p="http://schemas.openxmlformats.org/presentationml/2006/main">
+  <p:cSld name="Slide 19">
+    <p:bg>
+      <p:bgPr>
+        <a:solidFill>
+          <a:srgbClr val="FFFFFF"/>
+        </a:solidFill>
+      </p:bgPr>
+    </p:bg>
+    <p:spTree>
+      <p:nvGrpSpPr>
+        <p:cNvPr id="1" name=""/>
+        <p:cNvGrpSpPr/>
+        <p:nvPr/>
+      </p:nvGrpSpPr>
+      <p:grpSpPr>
+        <a:xfrm>
+          <a:off x="0" y="0"/>
+          <a:ext cx="0" cy="0"/>
+          <a:chOff x="0" y="0"/>
+          <a:chExt cx="0" cy="0"/>
+        </a:xfrm>
+      </p:grpSpPr>
+      <p:sp>
+        <p:nvSpPr>
+          <p:cNvPr id="2" name="Text 0"/>
+          <p:cNvSpPr/>
+          <p:nvPr/>
+        </p:nvSpPr>
+        <p:spPr>
+          <a:xfrm>
+            <a:off x="0" y="0"/>
+            <a:ext cx="9144000" cy="101501"/>
+          </a:xfrm>
+          <a:prstGeom prst="rect">
+            <a:avLst/>
+          </a:prstGeom>
+          <a:solidFill>
+            <a:srgbClr val="277884"/>
+          </a:solidFill>
+          <a:ln/>
+        </p:spPr>
+        <p:txBody>
+          <a:bodyPr wrap="square" rtlCol="0" anchor="ctr"/>
+          <a:lstStyle/>
+          <a:p>
+            <a:pPr indent="0" marL="0">
+              <a:buNone/>
+            </a:pPr>
+            <a:endParaRPr lang="en-US" dirty="0"/>
+          </a:p>
+        </p:txBody>
+      </p:sp>
+      <p:sp>
+        <p:nvSpPr>
+          <p:cNvPr id="3" name="Text 1"/>
+          <p:cNvSpPr/>
+          <p:nvPr/>
+        </p:nvSpPr>
+        <p:spPr>
+          <a:xfrm>
+            <a:off x="406301" y="457051"/>
+            <a:ext cx="8498026" cy="274290"/>
+          </a:xfrm>
+          <a:prstGeom prst="rect">
+            <a:avLst/>
+          </a:prstGeom>
+          <a:noFill/>
+          <a:ln/>
+        </p:spPr>
+        <p:txBody>
+          <a:bodyPr wrap="square" lIns="0" tIns="0" rIns="0" bIns="0" rtlCol="0" anchor="t"/>
+          <a:lstStyle/>
+          <a:p>
+            <a:pPr algn="l" indent="0" marL="0">
+              <a:lnSpc>
+                <a:spcPts val="2160"/>
+              </a:lnSpc>
+              <a:spcBef>
+                <a:spcPts val="600"/>
+              </a:spcBef>
+              <a:spcAft>
+                <a:spcPts val="800"/>
+              </a:spcAft>
+              <a:buNone/>
+            </a:pPr>
+            <a:r>
+              <a:rPr lang="en-US" sz="1800" b="1" dirty="0">
+                <a:solidFill>
+                  <a:srgbClr val="FE4447"/>
+                </a:solidFill>
+                <a:latin typeface="Georgia" pitchFamily="34" charset="0"/>
+                <a:ea typeface="Georgia" pitchFamily="34" charset="-122"/>
+                <a:cs typeface="Georgia" pitchFamily="34" charset="-120"/>
+              </a:rPr>
               <a:t>Citation(s) used in this lesson</a:t>
             </a:r>
             <a:endParaRPr lang="en-US" sz="1800" dirty="0"/>
@@ -3693,7 +6523,7 @@
                 <a:ea typeface="Georgia" pitchFamily="34" charset="-122"/>
                 <a:cs typeface="Georgia" pitchFamily="34" charset="-120"/>
               </a:rPr>
-              <a:t>Materials</a:t>
+              <a:t>Learning objective</a:t>
             </a:r>
             <a:endParaRPr lang="en-US" sz="1800" dirty="0"/>
           </a:p>
@@ -3708,7 +6538,7 @@
         <p:spPr>
           <a:xfrm>
             <a:off x="406301" y="870942"/>
-            <a:ext cx="8498026" cy="213271"/>
+            <a:ext cx="8498026" cy="426541"/>
           </a:xfrm>
           <a:prstGeom prst="rect">
             <a:avLst/>
@@ -3741,7 +6571,7 @@
                 <a:ea typeface="Arial" pitchFamily="34" charset="-122"/>
                 <a:cs typeface="Arial" pitchFamily="34" charset="-120"/>
               </a:rPr>
-              <a:t>– Board / large chart paper – Coloured markers (5 colours, one per element) – Each student needs: their notebook, a ruler</a:t>
+              <a:t>By the end of this lesson, students will draw a diagram showing the five elements emerging in the Sāṅkhya creation sequence (space → air → fire → water → earth) and label what new quality each one adds.</a:t>
             </a:r>
             <a:endParaRPr lang="en-US" sz="1200" dirty="0"/>
           </a:p>
@@ -3899,7 +6729,7 @@
                 <a:ea typeface="Georgia" pitchFamily="34" charset="-122"/>
                 <a:cs typeface="Georgia" pitchFamily="34" charset="-120"/>
               </a:rPr>
-              <a:t>Vocabulary introduced today</a:t>
+              <a:t>Materials</a:t>
             </a:r>
             <a:endParaRPr lang="en-US" sz="1800" dirty="0"/>
           </a:p>
@@ -3914,7 +6744,7 @@
         <p:spPr>
           <a:xfrm>
             <a:off x="634901" y="883593"/>
-            <a:ext cx="8102798" cy="281880"/>
+            <a:ext cx="8102798" cy="769441"/>
           </a:xfrm>
           <a:prstGeom prst="rect">
             <a:avLst/>
@@ -3937,24 +6767,28 @@
               <a:buChar char="•"/>
             </a:pPr>
             <a:r>
-              <a:rPr lang="en-US" sz="1200" i="1" dirty="0">
-                <a:solidFill>
-                  <a:srgbClr val="1C2833"/>
-                </a:solidFill>
-                <a:latin typeface="Arial" pitchFamily="34" charset="0"/>
-                <a:ea typeface="Arial" pitchFamily="34" charset="-122"/>
-                <a:cs typeface="Arial" pitchFamily="34" charset="-120"/>
-              </a:rPr>
-              <a:t>guṇa</a:t>
-            </a:r>
-            <a:pPr algn="l" indent="0" marL="0">
+              <a:rPr lang="en-US" sz="1200" dirty="0">
+                <a:solidFill>
+                  <a:srgbClr val="1C2833"/>
+                </a:solidFill>
+                <a:latin typeface="Arial" pitchFamily="34" charset="0"/>
+                <a:ea typeface="Arial" pitchFamily="34" charset="-122"/>
+                <a:cs typeface="Arial" pitchFamily="34" charset="-120"/>
+              </a:rPr>
+              <a:t>Board / large chart paper</a:t>
+            </a:r>
+            <a:endParaRPr lang="en-US" sz="1200" dirty="0"/>
+          </a:p>
+          <a:p>
+            <a:pPr algn="l" marL="342900" indent="-342900">
               <a:lnSpc>
                 <a:spcPts val="1620"/>
               </a:lnSpc>
               <a:spcAft>
                 <a:spcPts val="300"/>
               </a:spcAft>
-              <a:buNone/>
+              <a:buSzPct val="100000"/>
+              <a:buChar char="•"/>
             </a:pPr>
             <a:r>
               <a:rPr lang="en-US" sz="1200" dirty="0">
@@ -3965,7 +6799,31 @@
                 <a:ea typeface="Arial" pitchFamily="34" charset="-122"/>
                 <a:cs typeface="Arial" pitchFamily="34" charset="-120"/>
               </a:rPr>
-              <a:t> (IAST: guṇa; lit. "thread, quality, attribute") — at this band, treat as "quality" or "property."</a:t>
+              <a:t>Coloured markers (5 colours, one per element)</a:t>
+            </a:r>
+            <a:endParaRPr lang="en-US" sz="1200" dirty="0"/>
+          </a:p>
+          <a:p>
+            <a:pPr algn="l" marL="342900" indent="-342900">
+              <a:lnSpc>
+                <a:spcPts val="1620"/>
+              </a:lnSpc>
+              <a:spcAft>
+                <a:spcPts val="300"/>
+              </a:spcAft>
+              <a:buSzPct val="100000"/>
+              <a:buChar char="•"/>
+            </a:pPr>
+            <a:r>
+              <a:rPr lang="en-US" sz="1200" dirty="0">
+                <a:solidFill>
+                  <a:srgbClr val="1C2833"/>
+                </a:solidFill>
+                <a:latin typeface="Arial" pitchFamily="34" charset="0"/>
+                <a:ea typeface="Arial" pitchFamily="34" charset="-122"/>
+                <a:cs typeface="Arial" pitchFamily="34" charset="-120"/>
+              </a:rPr>
+              <a:t>Each student needs: their notebook, a ruler</a:t>
             </a:r>
             <a:endParaRPr lang="en-US" sz="1200" dirty="0"/>
           </a:p>
@@ -4123,7 +6981,7 @@
                 <a:ea typeface="Georgia" pitchFamily="34" charset="-122"/>
                 <a:cs typeface="Georgia" pitchFamily="34" charset="-120"/>
               </a:rPr>
-              <a:t>Lesson flow</a:t>
+              <a:t>Vocabulary introduced today</a:t>
             </a:r>
             <a:endParaRPr lang="en-US" sz="1800" dirty="0"/>
           </a:p>
@@ -4132,6 +6990,72 @@
       <p:sp>
         <p:nvSpPr>
           <p:cNvPr id="4" name="Text 2"/>
+          <p:cNvSpPr/>
+          <p:nvPr/>
+        </p:nvSpPr>
+        <p:spPr>
+          <a:xfrm>
+            <a:off x="634901" y="883593"/>
+            <a:ext cx="8102798" cy="281880"/>
+          </a:xfrm>
+          <a:prstGeom prst="rect">
+            <a:avLst/>
+          </a:prstGeom>
+          <a:noFill/>
+          <a:ln/>
+        </p:spPr>
+        <p:txBody>
+          <a:bodyPr wrap="square" lIns="0" tIns="0" rIns="0" bIns="0" rtlCol="0" anchor="t"/>
+          <a:lstStyle/>
+          <a:p>
+            <a:pPr algn="l" marL="342900" indent="-342900">
+              <a:lnSpc>
+                <a:spcPts val="1620"/>
+              </a:lnSpc>
+              <a:spcAft>
+                <a:spcPts val="300"/>
+              </a:spcAft>
+              <a:buSzPct val="100000"/>
+              <a:buChar char="•"/>
+            </a:pPr>
+            <a:r>
+              <a:rPr lang="en-US" sz="1200" i="1" dirty="0">
+                <a:solidFill>
+                  <a:srgbClr val="1C2833"/>
+                </a:solidFill>
+                <a:latin typeface="Arial" pitchFamily="34" charset="0"/>
+                <a:ea typeface="Arial" pitchFamily="34" charset="-122"/>
+                <a:cs typeface="Arial" pitchFamily="34" charset="-120"/>
+              </a:rPr>
+              <a:t>guṇa</a:t>
+            </a:r>
+            <a:pPr algn="l" indent="0" marL="0">
+              <a:lnSpc>
+                <a:spcPts val="1620"/>
+              </a:lnSpc>
+              <a:spcAft>
+                <a:spcPts val="300"/>
+              </a:spcAft>
+              <a:buNone/>
+            </a:pPr>
+            <a:r>
+              <a:rPr lang="en-US" sz="1200" dirty="0">
+                <a:solidFill>
+                  <a:srgbClr val="1C2833"/>
+                </a:solidFill>
+                <a:latin typeface="Arial" pitchFamily="34" charset="0"/>
+                <a:ea typeface="Arial" pitchFamily="34" charset="-122"/>
+                <a:cs typeface="Arial" pitchFamily="34" charset="-120"/>
+              </a:rPr>
+              <a:t> (IAST: guṇa; lit. "thread, quality, attribute") — at this band, treat as "quality" or "property."</a:t>
+            </a:r>
+            <a:endParaRPr lang="en-US" sz="1200" dirty="0"/>
+          </a:p>
+        </p:txBody>
+      </p:sp>
+      <p:sp>
+        <p:nvSpPr>
+          <p:cNvPr id="5" name="Text 3"/>
           <p:cNvSpPr/>
           <p:nvPr/>
         </p:nvSpPr>
@@ -4281,7 +7205,7 @@
                 <a:ea typeface="Georgia" pitchFamily="34" charset="-122"/>
                 <a:cs typeface="Georgia" pitchFamily="34" charset="-120"/>
               </a:rPr>
-              <a:t>Warm-up (5 min)</a:t>
+              <a:t>Lesson flow</a:t>
             </a:r>
             <a:endParaRPr lang="en-US" sz="1800" dirty="0"/>
           </a:p>
@@ -4290,100 +7214,6 @@
       <p:sp>
         <p:nvSpPr>
           <p:cNvPr id="4" name="Text 2"/>
-          <p:cNvSpPr/>
-          <p:nvPr/>
-        </p:nvSpPr>
-        <p:spPr>
-          <a:xfrm>
-            <a:off x="406301" y="870942"/>
-            <a:ext cx="8498026" cy="639812"/>
-          </a:xfrm>
-          <a:prstGeom prst="rect">
-            <a:avLst/>
-          </a:prstGeom>
-          <a:noFill/>
-          <a:ln/>
-        </p:spPr>
-        <p:txBody>
-          <a:bodyPr wrap="square" lIns="0" tIns="0" rIns="0" bIns="0" rtlCol="0" anchor="t"/>
-          <a:lstStyle/>
-          <a:p>
-            <a:pPr algn="l" indent="0" marL="0">
-              <a:lnSpc>
-                <a:spcPts val="1680"/>
-              </a:lnSpc>
-              <a:spcBef>
-                <a:spcPts val="300"/>
-              </a:spcBef>
-              <a:spcAft>
-                <a:spcPts val="300"/>
-              </a:spcAft>
-              <a:buNone/>
-            </a:pPr>
-            <a:r>
-              <a:rPr lang="en-US" sz="1200" dirty="0">
-                <a:solidFill>
-                  <a:srgbClr val="1C2833"/>
-                </a:solidFill>
-                <a:latin typeface="Arial" pitchFamily="34" charset="0"/>
-                <a:ea typeface="Arial" pitchFamily="34" charset="-122"/>
-                <a:cs typeface="Arial" pitchFamily="34" charset="-120"/>
-              </a:rPr>
-              <a:t>– Question on the board (same daily prompt): </a:t>
-            </a:r>
-            <a:pPr algn="l" indent="0" marL="0">
-              <a:lnSpc>
-                <a:spcPts val="1680"/>
-              </a:lnSpc>
-              <a:spcBef>
-                <a:spcPts val="300"/>
-              </a:spcBef>
-              <a:spcAft>
-                <a:spcPts val="300"/>
-              </a:spcAft>
-              <a:buNone/>
-            </a:pPr>
-            <a:r>
-              <a:rPr lang="en-US" sz="1200" i="1" dirty="0">
-                <a:solidFill>
-                  <a:srgbClr val="1C2833"/>
-                </a:solidFill>
-                <a:latin typeface="Arial" pitchFamily="34" charset="0"/>
-                <a:ea typeface="Arial" pitchFamily="34" charset="-122"/>
-                <a:cs typeface="Arial" pitchFamily="34" charset="-120"/>
-              </a:rPr>
-              <a:t>"Which element did you notice most yesterday? Why?"</a:t>
-            </a:r>
-            <a:pPr algn="l" indent="0" marL="0">
-              <a:lnSpc>
-                <a:spcPts val="1680"/>
-              </a:lnSpc>
-              <a:spcBef>
-                <a:spcPts val="300"/>
-              </a:spcBef>
-              <a:spcAft>
-                <a:spcPts val="300"/>
-              </a:spcAft>
-              <a:buNone/>
-            </a:pPr>
-            <a:r>
-              <a:rPr lang="en-US" sz="1200" dirty="0">
-                <a:solidFill>
-                  <a:srgbClr val="1C2833"/>
-                </a:solidFill>
-                <a:latin typeface="Arial" pitchFamily="34" charset="0"/>
-                <a:ea typeface="Arial" pitchFamily="34" charset="-122"/>
-                <a:cs typeface="Arial" pitchFamily="34" charset="-120"/>
-              </a:rPr>
-              <a:t> — 2 students share for 30 seconds each. – Quick recall: hold up each of the 5 objects from Day 1; students call out the Sanskrit name in chorus.</a:t>
-            </a:r>
-            <a:endParaRPr lang="en-US" sz="1200" dirty="0"/>
-          </a:p>
-        </p:txBody>
-      </p:sp>
-      <p:sp>
-        <p:nvSpPr>
-          <p:cNvPr id="5" name="Text 3"/>
           <p:cNvSpPr/>
           <p:nvPr/>
         </p:nvSpPr>
@@ -4533,7 +7363,7 @@
                 <a:ea typeface="Georgia" pitchFamily="34" charset="-122"/>
                 <a:cs typeface="Georgia" pitchFamily="34" charset="-120"/>
               </a:rPr>
-              <a:t>Core (20 min)</a:t>
+              <a:t>Warm-up (5 min)</a:t>
             </a:r>
             <a:endParaRPr lang="en-US" sz="1800" dirty="0"/>
           </a:p>
@@ -4548,7 +7378,7 @@
         <p:spPr>
           <a:xfrm>
             <a:off x="634901" y="883593"/>
-            <a:ext cx="8102798" cy="487561"/>
+            <a:ext cx="8102798" cy="731341"/>
           </a:xfrm>
           <a:prstGeom prst="rect">
             <a:avLst/>
@@ -4571,15 +7401,15 @@
               <a:buChar char="•"/>
             </a:pPr>
             <a:r>
-              <a:rPr lang="en-US" sz="1200" b="1" dirty="0">
-                <a:solidFill>
-                  <a:srgbClr val="1C2833"/>
-                </a:solidFill>
-                <a:latin typeface="Arial" pitchFamily="34" charset="0"/>
-                <a:ea typeface="Arial" pitchFamily="34" charset="-122"/>
-                <a:cs typeface="Arial" pitchFamily="34" charset="-120"/>
-              </a:rPr>
-              <a:t>Teacher prompt:</a:t>
+              <a:rPr lang="en-US" sz="1200" dirty="0">
+                <a:solidFill>
+                  <a:srgbClr val="1C2833"/>
+                </a:solidFill>
+                <a:latin typeface="Arial" pitchFamily="34" charset="0"/>
+                <a:ea typeface="Arial" pitchFamily="34" charset="-122"/>
+                <a:cs typeface="Arial" pitchFamily="34" charset="-120"/>
+              </a:rPr>
+              <a:t>Question on the board (same daily prompt): </a:t>
             </a:r>
             <a:pPr algn="l" indent="0" marL="0">
               <a:lnSpc>
@@ -4591,6 +7421,26 @@
               <a:buNone/>
             </a:pPr>
             <a:r>
+              <a:rPr lang="en-US" sz="1200" i="1" dirty="0">
+                <a:solidFill>
+                  <a:srgbClr val="1C2833"/>
+                </a:solidFill>
+                <a:latin typeface="Arial" pitchFamily="34" charset="0"/>
+                <a:ea typeface="Arial" pitchFamily="34" charset="-122"/>
+                <a:cs typeface="Arial" pitchFamily="34" charset="-120"/>
+              </a:rPr>
+              <a:t>"Which element did you notice most yesterday? Why?"</a:t>
+            </a:r>
+            <a:pPr algn="l" indent="0" marL="0">
+              <a:lnSpc>
+                <a:spcPts val="1620"/>
+              </a:lnSpc>
+              <a:spcAft>
+                <a:spcPts val="300"/>
+              </a:spcAft>
+              <a:buNone/>
+            </a:pPr>
+            <a:r>
               <a:rPr lang="en-US" sz="1200" dirty="0">
                 <a:solidFill>
                   <a:srgbClr val="1C2833"/>
@@ -4599,200 +7449,10 @@
                 <a:ea typeface="Arial" pitchFamily="34" charset="-122"/>
                 <a:cs typeface="Arial" pitchFamily="34" charset="-120"/>
               </a:rPr>
-              <a:t> "If you had to </a:t>
-            </a:r>
-            <a:pPr algn="l" indent="0" marL="0">
-              <a:lnSpc>
-                <a:spcPts val="1620"/>
-              </a:lnSpc>
-              <a:spcAft>
-                <a:spcPts val="300"/>
-              </a:spcAft>
-              <a:buNone/>
-            </a:pPr>
-            <a:r>
-              <a:rPr lang="en-US" sz="1200" i="1" dirty="0">
-                <a:solidFill>
-                  <a:srgbClr val="1C2833"/>
-                </a:solidFill>
-                <a:latin typeface="Arial" pitchFamily="34" charset="0"/>
-                <a:ea typeface="Arial" pitchFamily="34" charset="-122"/>
-                <a:cs typeface="Arial" pitchFamily="34" charset="-120"/>
-              </a:rPr>
-              <a:t>invent</a:t>
-            </a:r>
-            <a:pPr algn="l" indent="0" marL="0">
-              <a:lnSpc>
-                <a:spcPts val="1620"/>
-              </a:lnSpc>
-              <a:spcAft>
-                <a:spcPts val="300"/>
-              </a:spcAft>
-              <a:buNone/>
-            </a:pPr>
-            <a:r>
-              <a:rPr lang="en-US" sz="1200" dirty="0">
-                <a:solidFill>
-                  <a:srgbClr val="1C2833"/>
-                </a:solidFill>
-                <a:latin typeface="Arial" pitchFamily="34" charset="0"/>
-                <a:ea typeface="Arial" pitchFamily="34" charset="-122"/>
-                <a:cs typeface="Arial" pitchFamily="34" charset="-120"/>
-              </a:rPr>
-              <a:t> the universe — start with nothing and make all matter — which element would you make </a:t>
-            </a:r>
-            <a:pPr algn="l" indent="0" marL="0">
-              <a:lnSpc>
-                <a:spcPts val="1620"/>
-              </a:lnSpc>
-              <a:spcAft>
-                <a:spcPts val="300"/>
-              </a:spcAft>
-              <a:buNone/>
-            </a:pPr>
-            <a:r>
-              <a:rPr lang="en-US" sz="1200" i="1" dirty="0">
-                <a:solidFill>
-                  <a:srgbClr val="1C2833"/>
-                </a:solidFill>
-                <a:latin typeface="Arial" pitchFamily="34" charset="0"/>
-                <a:ea typeface="Arial" pitchFamily="34" charset="-122"/>
-                <a:cs typeface="Arial" pitchFamily="34" charset="-120"/>
-              </a:rPr>
-              <a:t>first</a:t>
-            </a:r>
-            <a:pPr algn="l" indent="0" marL="0">
-              <a:lnSpc>
-                <a:spcPts val="1620"/>
-              </a:lnSpc>
-              <a:spcAft>
-                <a:spcPts val="300"/>
-              </a:spcAft>
-              <a:buNone/>
-            </a:pPr>
-            <a:r>
-              <a:rPr lang="en-US" sz="1200" dirty="0">
-                <a:solidFill>
-                  <a:srgbClr val="1C2833"/>
-                </a:solidFill>
-                <a:latin typeface="Arial" pitchFamily="34" charset="0"/>
-                <a:ea typeface="Arial" pitchFamily="34" charset="-122"/>
-                <a:cs typeface="Arial" pitchFamily="34" charset="-120"/>
-              </a:rPr>
-              <a:t>? Which </a:t>
-            </a:r>
-            <a:pPr algn="l" indent="0" marL="0">
-              <a:lnSpc>
-                <a:spcPts val="1620"/>
-              </a:lnSpc>
-              <a:spcAft>
-                <a:spcPts val="300"/>
-              </a:spcAft>
-              <a:buNone/>
-            </a:pPr>
-            <a:r>
-              <a:rPr lang="en-US" sz="1200" i="1" dirty="0">
-                <a:solidFill>
-                  <a:srgbClr val="1C2833"/>
-                </a:solidFill>
-                <a:latin typeface="Arial" pitchFamily="34" charset="0"/>
-                <a:ea typeface="Arial" pitchFamily="34" charset="-122"/>
-                <a:cs typeface="Arial" pitchFamily="34" charset="-120"/>
-              </a:rPr>
-              <a:t>last</a:t>
-            </a:r>
-            <a:pPr algn="l" indent="0" marL="0">
-              <a:lnSpc>
-                <a:spcPts val="1620"/>
-              </a:lnSpc>
-              <a:spcAft>
-                <a:spcPts val="300"/>
-              </a:spcAft>
-              <a:buNone/>
-            </a:pPr>
-            <a:r>
-              <a:rPr lang="en-US" sz="1200" dirty="0">
-                <a:solidFill>
-                  <a:srgbClr val="1C2833"/>
-                </a:solidFill>
-                <a:latin typeface="Arial" pitchFamily="34" charset="0"/>
-                <a:ea typeface="Arial" pitchFamily="34" charset="-122"/>
-                <a:cs typeface="Arial" pitchFamily="34" charset="-120"/>
-              </a:rPr>
-              <a:t>? Why?"</a:t>
+              <a:t> — 2 students share for 30 seconds each.</a:t>
             </a:r>
             <a:endParaRPr lang="en-US" sz="1200" dirty="0"/>
           </a:p>
-        </p:txBody>
-      </p:sp>
-      <p:sp>
-        <p:nvSpPr>
-          <p:cNvPr id="5" name="Text 3"/>
-          <p:cNvSpPr/>
-          <p:nvPr/>
-        </p:nvSpPr>
-        <p:spPr>
-          <a:xfrm>
-            <a:off x="406301" y="1460004"/>
-            <a:ext cx="8498026" cy="213271"/>
-          </a:xfrm>
-          <a:prstGeom prst="rect">
-            <a:avLst/>
-          </a:prstGeom>
-          <a:noFill/>
-          <a:ln/>
-        </p:spPr>
-        <p:txBody>
-          <a:bodyPr wrap="square" lIns="0" tIns="0" rIns="0" bIns="0" rtlCol="0" anchor="t"/>
-          <a:lstStyle/>
-          <a:p>
-            <a:pPr algn="l" indent="0" marL="0">
-              <a:lnSpc>
-                <a:spcPts val="1680"/>
-              </a:lnSpc>
-              <a:spcBef>
-                <a:spcPts val="300"/>
-              </a:spcBef>
-              <a:spcAft>
-                <a:spcPts val="300"/>
-              </a:spcAft>
-              <a:buNone/>
-            </a:pPr>
-            <a:r>
-              <a:rPr lang="en-US" sz="1200" dirty="0">
-                <a:solidFill>
-                  <a:srgbClr val="1C2833"/>
-                </a:solidFill>
-                <a:latin typeface="Arial" pitchFamily="34" charset="0"/>
-                <a:ea typeface="Arial" pitchFamily="34" charset="-122"/>
-                <a:cs typeface="Arial" pitchFamily="34" charset="-120"/>
-              </a:rPr>
-              <a:t>– Take 3–4 student answers. Don't judge them. Note: most will say earth first or water first.</a:t>
-            </a:r>
-            <a:endParaRPr lang="en-US" sz="1200" dirty="0"/>
-          </a:p>
-        </p:txBody>
-      </p:sp>
-      <p:sp>
-        <p:nvSpPr>
-          <p:cNvPr id="6" name="Text 4"/>
-          <p:cNvSpPr/>
-          <p:nvPr/>
-        </p:nvSpPr>
-        <p:spPr>
-          <a:xfrm>
-            <a:off x="634901" y="1762125"/>
-            <a:ext cx="8102798" cy="281880"/>
-          </a:xfrm>
-          <a:prstGeom prst="rect">
-            <a:avLst/>
-          </a:prstGeom>
-          <a:noFill/>
-          <a:ln/>
-        </p:spPr>
-        <p:txBody>
-          <a:bodyPr wrap="square" lIns="0" tIns="0" rIns="0" bIns="0" rtlCol="0" anchor="t"/>
-          <a:lstStyle/>
           <a:p>
             <a:pPr algn="l" marL="342900" indent="-342900">
               <a:lnSpc>
@@ -4805,15 +7465,15 @@
               <a:buChar char="•"/>
             </a:pPr>
             <a:r>
-              <a:rPr lang="en-US" sz="1200" b="1" dirty="0">
-                <a:solidFill>
-                  <a:srgbClr val="1C2833"/>
-                </a:solidFill>
-                <a:latin typeface="Arial" pitchFamily="34" charset="0"/>
-                <a:ea typeface="Arial" pitchFamily="34" charset="-122"/>
-                <a:cs typeface="Arial" pitchFamily="34" charset="-120"/>
-              </a:rPr>
-              <a:t>Reveal the Sāṅkhya answer (write on board, large):</a:t>
+              <a:rPr lang="en-US" sz="1200" dirty="0">
+                <a:solidFill>
+                  <a:srgbClr val="1C2833"/>
+                </a:solidFill>
+                <a:latin typeface="Arial" pitchFamily="34" charset="0"/>
+                <a:ea typeface="Arial" pitchFamily="34" charset="-122"/>
+                <a:cs typeface="Arial" pitchFamily="34" charset="-120"/>
+              </a:rPr>
+              <a:t>Quick recall: hold up each of the 5 objects from Day 1; students call out the Sanskrit name in chorus.</a:t>
             </a:r>
             <a:endParaRPr lang="en-US" sz="1200" dirty="0"/>
           </a:p>
@@ -4821,1007 +7481,13 @@
       </p:sp>
       <p:sp>
         <p:nvSpPr>
-          <p:cNvPr id="7" name="Text 5"/>
-          <p:cNvSpPr/>
-          <p:nvPr/>
-        </p:nvSpPr>
-        <p:spPr>
-          <a:xfrm>
-            <a:off x="406301" y="2145506"/>
-            <a:ext cx="8331398" cy="603052"/>
-          </a:xfrm>
-          <a:prstGeom prst="rect">
-            <a:avLst/>
-          </a:prstGeom>
-          <a:solidFill>
-            <a:srgbClr val="F4F8F9"/>
-          </a:solidFill>
-          <a:ln/>
-        </p:spPr>
-        <p:txBody>
-          <a:bodyPr wrap="square" rtlCol="0" anchor="ctr"/>
-          <a:lstStyle/>
-          <a:p>
-            <a:pPr indent="0" marL="0">
-              <a:buNone/>
-            </a:pPr>
-            <a:endParaRPr lang="en-US" dirty="0"/>
-          </a:p>
-        </p:txBody>
-      </p:sp>
-      <p:sp>
-        <p:nvSpPr>
-          <p:cNvPr id="8" name="Shape 6"/>
-          <p:cNvSpPr/>
-          <p:nvPr/>
-        </p:nvSpPr>
-        <p:spPr>
-          <a:xfrm>
-            <a:off x="430113" y="2145506"/>
-            <a:ext cx="0" cy="603052"/>
-          </a:xfrm>
-          <a:prstGeom prst="line">
-            <a:avLst/>
-          </a:prstGeom>
-          <a:noFill/>
-          <a:ln w="47625">
-            <a:solidFill>
-              <a:srgbClr val="277884"/>
-            </a:solidFill>
-            <a:prstDash val="solid"/>
-          </a:ln>
-        </p:spPr>
-      </p:sp>
-      <p:sp>
-        <p:nvSpPr>
-          <p:cNvPr id="9" name="Text 7"/>
-          <p:cNvSpPr/>
-          <p:nvPr/>
-        </p:nvSpPr>
-        <p:spPr>
-          <a:xfrm>
-            <a:off x="631627" y="2272457"/>
-            <a:ext cx="8086939" cy="174575"/>
-          </a:xfrm>
-          <a:prstGeom prst="rect">
-            <a:avLst/>
-          </a:prstGeom>
-          <a:noFill/>
-          <a:ln/>
-        </p:spPr>
-        <p:txBody>
-          <a:bodyPr wrap="square" lIns="0" tIns="0" rIns="0" bIns="0" rtlCol="0" anchor="t"/>
-          <a:lstStyle/>
-          <a:p>
-            <a:pPr algn="l" indent="0" marL="0">
-              <a:lnSpc>
-                <a:spcPts val="1375"/>
-              </a:lnSpc>
-              <a:buNone/>
-            </a:pPr>
-            <a:r>
-              <a:rPr lang="en-US" sz="1100" dirty="0">
-                <a:solidFill>
-                  <a:srgbClr val="1C2833"/>
-                </a:solidFill>
-                <a:latin typeface="Courier New" pitchFamily="34" charset="0"/>
-                <a:ea typeface="Courier New" pitchFamily="34" charset="-122"/>
-                <a:cs typeface="Courier New" pitchFamily="34" charset="-120"/>
-              </a:rPr>
-              <a:t>ākāśa  →  vāyu  →  tejas  →  ap  →  pṛthvī</a:t>
-            </a:r>
-            <a:endParaRPr lang="en-US" sz="1100" dirty="0"/>
-          </a:p>
-        </p:txBody>
-      </p:sp>
-      <p:sp>
-        <p:nvSpPr>
-          <p:cNvPr id="10" name="Text 8"/>
-          <p:cNvSpPr/>
-          <p:nvPr/>
-        </p:nvSpPr>
-        <p:spPr>
-          <a:xfrm>
-            <a:off x="631627" y="2447032"/>
-            <a:ext cx="8086939" cy="174575"/>
-          </a:xfrm>
-          <a:prstGeom prst="rect">
-            <a:avLst/>
-          </a:prstGeom>
-          <a:noFill/>
-          <a:ln/>
-        </p:spPr>
-        <p:txBody>
-          <a:bodyPr wrap="square" lIns="0" tIns="0" rIns="0" bIns="0" rtlCol="0" anchor="t"/>
-          <a:lstStyle/>
-          <a:p>
-            <a:pPr algn="l" indent="0" marL="0">
-              <a:lnSpc>
-                <a:spcPts val="1375"/>
-              </a:lnSpc>
-              <a:buNone/>
-            </a:pPr>
-            <a:r>
-              <a:rPr lang="en-US" sz="1100" dirty="0">
-                <a:solidFill>
-                  <a:srgbClr val="1C2833"/>
-                </a:solidFill>
-                <a:latin typeface="Courier New" pitchFamily="34" charset="0"/>
-                <a:ea typeface="Courier New" pitchFamily="34" charset="-122"/>
-                <a:cs typeface="Courier New" pitchFamily="34" charset="-120"/>
-              </a:rPr>
-              <a:t>(space)   (air)    (fire)   (water)  (earth)</a:t>
-            </a:r>
-            <a:endParaRPr lang="en-US" sz="1100" dirty="0"/>
-          </a:p>
-        </p:txBody>
-      </p:sp>
-      <p:sp>
-        <p:nvSpPr>
-          <p:cNvPr id="11" name="Text 9"/>
-          <p:cNvSpPr/>
-          <p:nvPr/>
-        </p:nvSpPr>
-        <p:spPr>
-          <a:xfrm>
-            <a:off x="406301" y="2837408"/>
-            <a:ext cx="8498026" cy="213271"/>
-          </a:xfrm>
-          <a:prstGeom prst="rect">
-            <a:avLst/>
-          </a:prstGeom>
-          <a:noFill/>
-          <a:ln/>
-        </p:spPr>
-        <p:txBody>
-          <a:bodyPr wrap="square" lIns="0" tIns="0" rIns="0" bIns="0" rtlCol="0" anchor="t"/>
-          <a:lstStyle/>
-          <a:p>
-            <a:pPr algn="l" indent="0" marL="0">
-              <a:lnSpc>
-                <a:spcPts val="1680"/>
-              </a:lnSpc>
-              <a:spcBef>
-                <a:spcPts val="300"/>
-              </a:spcBef>
-              <a:spcAft>
-                <a:spcPts val="300"/>
-              </a:spcAft>
-              <a:buNone/>
-            </a:pPr>
-            <a:r>
-              <a:rPr lang="en-US" sz="1200" dirty="0">
-                <a:solidFill>
-                  <a:srgbClr val="1C2833"/>
-                </a:solidFill>
-                <a:latin typeface="Arial" pitchFamily="34" charset="0"/>
-                <a:ea typeface="Arial" pitchFamily="34" charset="-122"/>
-                <a:cs typeface="Arial" pitchFamily="34" charset="-120"/>
-              </a:rPr>
-              <a:t>"The tradition says the </a:t>
-            </a:r>
-            <a:pPr algn="l" indent="0" marL="0">
-              <a:lnSpc>
-                <a:spcPts val="1680"/>
-              </a:lnSpc>
-              <a:spcBef>
-                <a:spcPts val="300"/>
-              </a:spcBef>
-              <a:spcAft>
-                <a:spcPts val="300"/>
-              </a:spcAft>
-              <a:buNone/>
-            </a:pPr>
-            <a:r>
-              <a:rPr lang="en-US" sz="1200" i="1" dirty="0">
-                <a:solidFill>
-                  <a:srgbClr val="1C2833"/>
-                </a:solidFill>
-                <a:latin typeface="Arial" pitchFamily="34" charset="0"/>
-                <a:ea typeface="Arial" pitchFamily="34" charset="-122"/>
-                <a:cs typeface="Arial" pitchFamily="34" charset="-120"/>
-              </a:rPr>
-              <a:t>opposite</a:t>
-            </a:r>
-            <a:pPr algn="l" indent="0" marL="0">
-              <a:lnSpc>
-                <a:spcPts val="1680"/>
-              </a:lnSpc>
-              <a:spcBef>
-                <a:spcPts val="300"/>
-              </a:spcBef>
-              <a:spcAft>
-                <a:spcPts val="300"/>
-              </a:spcAft>
-              <a:buNone/>
-            </a:pPr>
-            <a:r>
-              <a:rPr lang="en-US" sz="1200" dirty="0">
-                <a:solidFill>
-                  <a:srgbClr val="1C2833"/>
-                </a:solidFill>
-                <a:latin typeface="Arial" pitchFamily="34" charset="0"/>
-                <a:ea typeface="Arial" pitchFamily="34" charset="-122"/>
-                <a:cs typeface="Arial" pitchFamily="34" charset="-120"/>
-              </a:rPr>
-              <a:t> of what most of us guess. Why might that be?"</a:t>
-            </a:r>
-            <a:endParaRPr lang="en-US" sz="1200" dirty="0"/>
-          </a:p>
-        </p:txBody>
-      </p:sp>
-      <p:sp>
-        <p:nvSpPr>
-          <p:cNvPr id="12" name="Text 10"/>
-          <p:cNvSpPr/>
-          <p:nvPr/>
-        </p:nvSpPr>
-        <p:spPr>
-          <a:xfrm>
-            <a:off x="634901" y="3139529"/>
-            <a:ext cx="8102798" cy="281880"/>
-          </a:xfrm>
-          <a:prstGeom prst="rect">
-            <a:avLst/>
-          </a:prstGeom>
-          <a:noFill/>
-          <a:ln/>
-        </p:spPr>
-        <p:txBody>
-          <a:bodyPr wrap="square" lIns="0" tIns="0" rIns="0" bIns="0" rtlCol="0" anchor="t"/>
-          <a:lstStyle/>
-          <a:p>
-            <a:pPr algn="l" marL="342900" indent="-342900">
-              <a:lnSpc>
-                <a:spcPts val="1620"/>
-              </a:lnSpc>
-              <a:spcAft>
-                <a:spcPts val="300"/>
-              </a:spcAft>
-              <a:buSzPct val="100000"/>
-              <a:buChar char="•"/>
-            </a:pPr>
-            <a:r>
-              <a:rPr lang="en-US" sz="1200" b="1" dirty="0">
-                <a:solidFill>
-                  <a:srgbClr val="1C2833"/>
-                </a:solidFill>
-                <a:latin typeface="Arial" pitchFamily="34" charset="0"/>
-                <a:ea typeface="Arial" pitchFamily="34" charset="-122"/>
-                <a:cs typeface="Arial" pitchFamily="34" charset="-120"/>
-              </a:rPr>
-              <a:t>Explain with the quality-counting rule</a:t>
-            </a:r>
-            <a:pPr algn="l" indent="0" marL="0">
-              <a:lnSpc>
-                <a:spcPts val="1620"/>
-              </a:lnSpc>
-              <a:spcAft>
-                <a:spcPts val="300"/>
-              </a:spcAft>
-              <a:buNone/>
-            </a:pPr>
-            <a:r>
-              <a:rPr lang="en-US" sz="1200" dirty="0">
-                <a:solidFill>
-                  <a:srgbClr val="1C2833"/>
-                </a:solidFill>
-                <a:latin typeface="Arial" pitchFamily="34" charset="0"/>
-                <a:ea typeface="Arial" pitchFamily="34" charset="-122"/>
-                <a:cs typeface="Arial" pitchFamily="34" charset="-120"/>
-              </a:rPr>
-              <a:t> (this is the key idea — write it boxed on the board):</a:t>
-            </a:r>
-            <a:endParaRPr lang="en-US" sz="1200" dirty="0"/>
-          </a:p>
-        </p:txBody>
-      </p:sp>
-      <p:sp>
-        <p:nvSpPr>
-          <p:cNvPr id="13" name="Text 11"/>
-          <p:cNvSpPr/>
-          <p:nvPr/>
-        </p:nvSpPr>
-        <p:spPr>
-          <a:xfrm>
-            <a:off x="406301" y="3510260"/>
-            <a:ext cx="8498026" cy="213271"/>
-          </a:xfrm>
-          <a:prstGeom prst="rect">
-            <a:avLst/>
-          </a:prstGeom>
-          <a:noFill/>
-          <a:ln/>
-        </p:spPr>
-        <p:txBody>
-          <a:bodyPr wrap="square" lIns="0" tIns="0" rIns="0" bIns="0" rtlCol="0" anchor="t"/>
-          <a:lstStyle/>
-          <a:p>
-            <a:pPr algn="l" indent="0" marL="0">
-              <a:lnSpc>
-                <a:spcPts val="1680"/>
-              </a:lnSpc>
-              <a:spcBef>
-                <a:spcPts val="300"/>
-              </a:spcBef>
-              <a:spcAft>
-                <a:spcPts val="300"/>
-              </a:spcAft>
-              <a:buNone/>
-            </a:pPr>
-            <a:r>
-              <a:rPr lang="en-US" sz="1200" dirty="0">
-                <a:solidFill>
-                  <a:srgbClr val="1C2833"/>
-                </a:solidFill>
-                <a:latin typeface="Arial" pitchFamily="34" charset="0"/>
-                <a:ea typeface="Arial" pitchFamily="34" charset="-122"/>
-                <a:cs typeface="Arial" pitchFamily="34" charset="-120"/>
-              </a:rPr>
-              <a:t>&gt; </a:t>
-            </a:r>
-            <a:pPr algn="l" indent="0" marL="0">
-              <a:lnSpc>
-                <a:spcPts val="1680"/>
-              </a:lnSpc>
-              <a:spcBef>
-                <a:spcPts val="300"/>
-              </a:spcBef>
-              <a:spcAft>
-                <a:spcPts val="300"/>
-              </a:spcAft>
-              <a:buNone/>
-            </a:pPr>
-            <a:r>
-              <a:rPr lang="en-US" sz="1200" b="1" dirty="0">
-                <a:solidFill>
-                  <a:srgbClr val="1C2833"/>
-                </a:solidFill>
-                <a:latin typeface="Arial" pitchFamily="34" charset="0"/>
-                <a:ea typeface="Arial" pitchFamily="34" charset="-122"/>
-                <a:cs typeface="Arial" pitchFamily="34" charset="-120"/>
-              </a:rPr>
-              <a:t>Each element carries forward all the qualities of the elements before it, and adds one new quality of its own.</a:t>
-            </a:r>
-            <a:endParaRPr lang="en-US" sz="1200" dirty="0"/>
-          </a:p>
-        </p:txBody>
-      </p:sp>
-      <p:sp>
-        <p:nvSpPr>
-          <p:cNvPr id="14" name="Text 12"/>
-          <p:cNvSpPr/>
-          <p:nvPr/>
-        </p:nvSpPr>
-        <p:spPr>
-          <a:xfrm>
-            <a:off x="406301" y="3799731"/>
-            <a:ext cx="8498026" cy="213271"/>
-          </a:xfrm>
-          <a:prstGeom prst="rect">
-            <a:avLst/>
-          </a:prstGeom>
-          <a:noFill/>
-          <a:ln/>
-        </p:spPr>
-        <p:txBody>
-          <a:bodyPr wrap="square" lIns="0" tIns="0" rIns="0" bIns="0" rtlCol="0" anchor="t"/>
-          <a:lstStyle/>
-          <a:p>
-            <a:pPr algn="l" indent="0" marL="0">
-              <a:lnSpc>
-                <a:spcPts val="1680"/>
-              </a:lnSpc>
-              <a:spcBef>
-                <a:spcPts val="300"/>
-              </a:spcBef>
-              <a:spcAft>
-                <a:spcPts val="300"/>
-              </a:spcAft>
-              <a:buNone/>
-            </a:pPr>
-            <a:r>
-              <a:rPr lang="en-US" sz="1200" dirty="0">
-                <a:solidFill>
-                  <a:srgbClr val="1C2833"/>
-                </a:solidFill>
-                <a:latin typeface="Arial" pitchFamily="34" charset="0"/>
-                <a:ea typeface="Arial" pitchFamily="34" charset="-122"/>
-                <a:cs typeface="Arial" pitchFamily="34" charset="-120"/>
-              </a:rPr>
-              <a:t>Build the table on the board, filling row by row:</a:t>
-            </a:r>
-            <a:endParaRPr lang="en-US" sz="1200" dirty="0"/>
-          </a:p>
-        </p:txBody>
-      </p:sp>
-      <p:sp>
-        <p:nvSpPr>
-          <p:cNvPr id="15" name="Text 13"/>
-          <p:cNvSpPr/>
-          <p:nvPr/>
-        </p:nvSpPr>
-        <p:spPr>
-          <a:xfrm>
-            <a:off x="406301" y="4089202"/>
-            <a:ext cx="8498026" cy="213271"/>
-          </a:xfrm>
-          <a:prstGeom prst="rect">
-            <a:avLst/>
-          </a:prstGeom>
-          <a:noFill/>
-          <a:ln/>
-        </p:spPr>
-        <p:txBody>
-          <a:bodyPr wrap="square" lIns="0" tIns="0" rIns="0" bIns="0" rtlCol="0" anchor="t"/>
-          <a:lstStyle/>
-          <a:p>
-            <a:pPr algn="l" indent="0" marL="0">
-              <a:lnSpc>
-                <a:spcPts val="1680"/>
-              </a:lnSpc>
-              <a:spcBef>
-                <a:spcPts val="300"/>
-              </a:spcBef>
-              <a:spcAft>
-                <a:spcPts val="300"/>
-              </a:spcAft>
-              <a:buNone/>
-            </a:pPr>
-            <a:r>
-              <a:rPr lang="en-US" sz="1200" i="1" dirty="0">
-                <a:solidFill>
-                  <a:srgbClr val="1C2833"/>
-                </a:solidFill>
-                <a:latin typeface="Arial" pitchFamily="34" charset="0"/>
-                <a:ea typeface="Arial" pitchFamily="34" charset="-122"/>
-                <a:cs typeface="Arial" pitchFamily="34" charset="-120"/>
-              </a:rPr>
-              <a:t>Each row: Element · Qualities.</a:t>
-            </a:r>
-            <a:endParaRPr lang="en-US" sz="1200" dirty="0"/>
-          </a:p>
-        </p:txBody>
-      </p:sp>
-      <p:sp>
-        <p:nvSpPr>
-          <p:cNvPr id="16" name="Text 14"/>
-          <p:cNvSpPr/>
-          <p:nvPr/>
-        </p:nvSpPr>
-        <p:spPr>
-          <a:xfrm>
-            <a:off x="634901" y="4391323"/>
-            <a:ext cx="8102798" cy="1257002"/>
-          </a:xfrm>
-          <a:prstGeom prst="rect">
-            <a:avLst/>
-          </a:prstGeom>
-          <a:noFill/>
-          <a:ln/>
-        </p:spPr>
-        <p:txBody>
-          <a:bodyPr wrap="square" lIns="0" tIns="0" rIns="0" bIns="0" rtlCol="0" anchor="t"/>
-          <a:lstStyle/>
-          <a:p>
-            <a:pPr algn="l" marL="342900" indent="-342900">
-              <a:lnSpc>
-                <a:spcPts val="1620"/>
-              </a:lnSpc>
-              <a:spcAft>
-                <a:spcPts val="300"/>
-              </a:spcAft>
-              <a:buSzPct val="100000"/>
-              <a:buChar char="•"/>
-            </a:pPr>
-            <a:r>
-              <a:rPr lang="en-US" sz="1200" i="1" dirty="0">
-                <a:solidFill>
-                  <a:srgbClr val="1C2833"/>
-                </a:solidFill>
-                <a:latin typeface="Arial" pitchFamily="34" charset="0"/>
-                <a:ea typeface="Arial" pitchFamily="34" charset="-122"/>
-                <a:cs typeface="Arial" pitchFamily="34" charset="-120"/>
-              </a:rPr>
-              <a:t>ākāśa</a:t>
-            </a:r>
-            <a:pPr algn="l" indent="0" marL="0">
-              <a:lnSpc>
-                <a:spcPts val="1620"/>
-              </a:lnSpc>
-              <a:spcAft>
-                <a:spcPts val="300"/>
-              </a:spcAft>
-              <a:buNone/>
-            </a:pPr>
-            <a:r>
-              <a:rPr lang="en-US" sz="1200" dirty="0">
-                <a:solidFill>
-                  <a:srgbClr val="1C2833"/>
-                </a:solidFill>
-                <a:latin typeface="Arial" pitchFamily="34" charset="0"/>
-                <a:ea typeface="Arial" pitchFamily="34" charset="-122"/>
-                <a:cs typeface="Arial" pitchFamily="34" charset="-120"/>
-              </a:rPr>
-              <a:t> (space) — 1 — sound</a:t>
-            </a:r>
-            <a:endParaRPr lang="en-US" sz="1200" dirty="0"/>
-          </a:p>
-          <a:p>
-            <a:pPr algn="l" marL="342900" indent="-342900">
-              <a:lnSpc>
-                <a:spcPts val="1620"/>
-              </a:lnSpc>
-              <a:spcAft>
-                <a:spcPts val="300"/>
-              </a:spcAft>
-              <a:buSzPct val="100000"/>
-              <a:buChar char="•"/>
-            </a:pPr>
-            <a:r>
-              <a:rPr lang="en-US" sz="1200" i="1" dirty="0">
-                <a:solidFill>
-                  <a:srgbClr val="1C2833"/>
-                </a:solidFill>
-                <a:latin typeface="Arial" pitchFamily="34" charset="0"/>
-                <a:ea typeface="Arial" pitchFamily="34" charset="-122"/>
-                <a:cs typeface="Arial" pitchFamily="34" charset="-120"/>
-              </a:rPr>
-              <a:t>vāyu</a:t>
-            </a:r>
-            <a:pPr algn="l" indent="0" marL="0">
-              <a:lnSpc>
-                <a:spcPts val="1620"/>
-              </a:lnSpc>
-              <a:spcAft>
-                <a:spcPts val="300"/>
-              </a:spcAft>
-              <a:buNone/>
-            </a:pPr>
-            <a:r>
-              <a:rPr lang="en-US" sz="1200" dirty="0">
-                <a:solidFill>
-                  <a:srgbClr val="1C2833"/>
-                </a:solidFill>
-                <a:latin typeface="Arial" pitchFamily="34" charset="0"/>
-                <a:ea typeface="Arial" pitchFamily="34" charset="-122"/>
-                <a:cs typeface="Arial" pitchFamily="34" charset="-120"/>
-              </a:rPr>
-              <a:t> (air) — 2 — sound, touch</a:t>
-            </a:r>
-            <a:endParaRPr lang="en-US" sz="1200" dirty="0"/>
-          </a:p>
-          <a:p>
-            <a:pPr algn="l" marL="342900" indent="-342900">
-              <a:lnSpc>
-                <a:spcPts val="1620"/>
-              </a:lnSpc>
-              <a:spcAft>
-                <a:spcPts val="300"/>
-              </a:spcAft>
-              <a:buSzPct val="100000"/>
-              <a:buChar char="•"/>
-            </a:pPr>
-            <a:r>
-              <a:rPr lang="en-US" sz="1200" i="1" dirty="0">
-                <a:solidFill>
-                  <a:srgbClr val="1C2833"/>
-                </a:solidFill>
-                <a:latin typeface="Arial" pitchFamily="34" charset="0"/>
-                <a:ea typeface="Arial" pitchFamily="34" charset="-122"/>
-                <a:cs typeface="Arial" pitchFamily="34" charset="-120"/>
-              </a:rPr>
-              <a:t>tejas</a:t>
-            </a:r>
-            <a:pPr algn="l" indent="0" marL="0">
-              <a:lnSpc>
-                <a:spcPts val="1620"/>
-              </a:lnSpc>
-              <a:spcAft>
-                <a:spcPts val="300"/>
-              </a:spcAft>
-              <a:buNone/>
-            </a:pPr>
-            <a:r>
-              <a:rPr lang="en-US" sz="1200" dirty="0">
-                <a:solidFill>
-                  <a:srgbClr val="1C2833"/>
-                </a:solidFill>
-                <a:latin typeface="Arial" pitchFamily="34" charset="0"/>
-                <a:ea typeface="Arial" pitchFamily="34" charset="-122"/>
-                <a:cs typeface="Arial" pitchFamily="34" charset="-120"/>
-              </a:rPr>
-              <a:t> (fire) — 3 — sound, touch, form</a:t>
-            </a:r>
-            <a:endParaRPr lang="en-US" sz="1200" dirty="0"/>
-          </a:p>
-          <a:p>
-            <a:pPr algn="l" marL="342900" indent="-342900">
-              <a:lnSpc>
-                <a:spcPts val="1620"/>
-              </a:lnSpc>
-              <a:spcAft>
-                <a:spcPts val="300"/>
-              </a:spcAft>
-              <a:buSzPct val="100000"/>
-              <a:buChar char="•"/>
-            </a:pPr>
-            <a:r>
-              <a:rPr lang="en-US" sz="1200" i="1" dirty="0">
-                <a:solidFill>
-                  <a:srgbClr val="1C2833"/>
-                </a:solidFill>
-                <a:latin typeface="Arial" pitchFamily="34" charset="0"/>
-                <a:ea typeface="Arial" pitchFamily="34" charset="-122"/>
-                <a:cs typeface="Arial" pitchFamily="34" charset="-120"/>
-              </a:rPr>
-              <a:t>ap</a:t>
-            </a:r>
-            <a:pPr algn="l" indent="0" marL="0">
-              <a:lnSpc>
-                <a:spcPts val="1620"/>
-              </a:lnSpc>
-              <a:spcAft>
-                <a:spcPts val="300"/>
-              </a:spcAft>
-              <a:buNone/>
-            </a:pPr>
-            <a:r>
-              <a:rPr lang="en-US" sz="1200" dirty="0">
-                <a:solidFill>
-                  <a:srgbClr val="1C2833"/>
-                </a:solidFill>
-                <a:latin typeface="Arial" pitchFamily="34" charset="0"/>
-                <a:ea typeface="Arial" pitchFamily="34" charset="-122"/>
-                <a:cs typeface="Arial" pitchFamily="34" charset="-120"/>
-              </a:rPr>
-              <a:t> (water) — 4 — sound, touch, form, taste</a:t>
-            </a:r>
-            <a:endParaRPr lang="en-US" sz="1200" dirty="0"/>
-          </a:p>
-          <a:p>
-            <a:pPr algn="l" marL="342900" indent="-342900">
-              <a:lnSpc>
-                <a:spcPts val="1620"/>
-              </a:lnSpc>
-              <a:spcAft>
-                <a:spcPts val="300"/>
-              </a:spcAft>
-              <a:buSzPct val="100000"/>
-              <a:buChar char="•"/>
-            </a:pPr>
-            <a:r>
-              <a:rPr lang="en-US" sz="1200" i="1" dirty="0">
-                <a:solidFill>
-                  <a:srgbClr val="1C2833"/>
-                </a:solidFill>
-                <a:latin typeface="Arial" pitchFamily="34" charset="0"/>
-                <a:ea typeface="Arial" pitchFamily="34" charset="-122"/>
-                <a:cs typeface="Arial" pitchFamily="34" charset="-120"/>
-              </a:rPr>
-              <a:t>pṛthvī</a:t>
-            </a:r>
-            <a:pPr algn="l" indent="0" marL="0">
-              <a:lnSpc>
-                <a:spcPts val="1620"/>
-              </a:lnSpc>
-              <a:spcAft>
-                <a:spcPts val="300"/>
-              </a:spcAft>
-              <a:buNone/>
-            </a:pPr>
-            <a:r>
-              <a:rPr lang="en-US" sz="1200" dirty="0">
-                <a:solidFill>
-                  <a:srgbClr val="1C2833"/>
-                </a:solidFill>
-                <a:latin typeface="Arial" pitchFamily="34" charset="0"/>
-                <a:ea typeface="Arial" pitchFamily="34" charset="-122"/>
-                <a:cs typeface="Arial" pitchFamily="34" charset="-120"/>
-              </a:rPr>
-              <a:t> (earth) — 5 — sound, touch, form, taste, smell</a:t>
-            </a:r>
-            <a:endParaRPr lang="en-US" sz="1200" dirty="0"/>
-          </a:p>
-        </p:txBody>
-      </p:sp>
-      <p:sp>
-        <p:nvSpPr>
-          <p:cNvPr id="17" name="Text 15"/>
-          <p:cNvSpPr/>
-          <p:nvPr/>
-        </p:nvSpPr>
-        <p:spPr>
-          <a:xfrm>
-            <a:off x="406301" y="5737175"/>
-            <a:ext cx="8498026" cy="426541"/>
-          </a:xfrm>
-          <a:prstGeom prst="rect">
-            <a:avLst/>
-          </a:prstGeom>
-          <a:noFill/>
-          <a:ln/>
-        </p:spPr>
-        <p:txBody>
-          <a:bodyPr wrap="square" lIns="0" tIns="0" rIns="0" bIns="0" rtlCol="0" anchor="t"/>
-          <a:lstStyle/>
-          <a:p>
-            <a:pPr algn="l" indent="0" marL="0">
-              <a:lnSpc>
-                <a:spcPts val="1680"/>
-              </a:lnSpc>
-              <a:spcBef>
-                <a:spcPts val="300"/>
-              </a:spcBef>
-              <a:spcAft>
-                <a:spcPts val="300"/>
-              </a:spcAft>
-              <a:buNone/>
-            </a:pPr>
-            <a:r>
-              <a:rPr lang="en-US" sz="1200" dirty="0">
-                <a:solidFill>
-                  <a:srgbClr val="1C2833"/>
-                </a:solidFill>
-                <a:latin typeface="Arial" pitchFamily="34" charset="0"/>
-                <a:ea typeface="Arial" pitchFamily="34" charset="-122"/>
-                <a:cs typeface="Arial" pitchFamily="34" charset="-120"/>
-              </a:rPr>
-              <a:t>Source paraphrase: "Earth has five qualities, water has four, fire has three, air has two, and the sky has only one quality, sound."    — Śrīmad-Bhāgavatam 3.26.50</a:t>
-            </a:r>
-            <a:endParaRPr lang="en-US" sz="1200" dirty="0"/>
-          </a:p>
-        </p:txBody>
-      </p:sp>
-      <p:sp>
-        <p:nvSpPr>
-          <p:cNvPr id="18" name="Text 16"/>
-          <p:cNvSpPr/>
-          <p:nvPr/>
-        </p:nvSpPr>
-        <p:spPr>
-          <a:xfrm>
-            <a:off x="634901" y="6252567"/>
-            <a:ext cx="8102798" cy="281880"/>
-          </a:xfrm>
-          <a:prstGeom prst="rect">
-            <a:avLst/>
-          </a:prstGeom>
-          <a:noFill/>
-          <a:ln/>
-        </p:spPr>
-        <p:txBody>
-          <a:bodyPr wrap="square" lIns="0" tIns="0" rIns="0" bIns="0" rtlCol="0" anchor="t"/>
-          <a:lstStyle/>
-          <a:p>
-            <a:pPr algn="l" marL="342900" indent="-342900">
-              <a:lnSpc>
-                <a:spcPts val="1620"/>
-              </a:lnSpc>
-              <a:spcAft>
-                <a:spcPts val="300"/>
-              </a:spcAft>
-              <a:buSzPct val="100000"/>
-              <a:buChar char="•"/>
-            </a:pPr>
-            <a:r>
-              <a:rPr lang="en-US" sz="1200" b="1" dirty="0">
-                <a:solidFill>
-                  <a:srgbClr val="1C2833"/>
-                </a:solidFill>
-                <a:latin typeface="Arial" pitchFamily="34" charset="0"/>
-                <a:ea typeface="Arial" pitchFamily="34" charset="-122"/>
-                <a:cs typeface="Arial" pitchFamily="34" charset="-120"/>
-              </a:rPr>
-              <a:t>Check:</a:t>
-            </a:r>
-            <a:pPr algn="l" indent="0" marL="0">
-              <a:lnSpc>
-                <a:spcPts val="1620"/>
-              </a:lnSpc>
-              <a:spcAft>
-                <a:spcPts val="300"/>
-              </a:spcAft>
-              <a:buNone/>
-            </a:pPr>
-            <a:r>
-              <a:rPr lang="en-US" sz="1200" dirty="0">
-                <a:solidFill>
-                  <a:srgbClr val="1C2833"/>
-                </a:solidFill>
-                <a:latin typeface="Arial" pitchFamily="34" charset="0"/>
-                <a:ea typeface="Arial" pitchFamily="34" charset="-122"/>
-                <a:cs typeface="Arial" pitchFamily="34" charset="-120"/>
-              </a:rPr>
-              <a:t> "Why does it make sense that </a:t>
-            </a:r>
-            <a:pPr algn="l" indent="0" marL="0">
-              <a:lnSpc>
-                <a:spcPts val="1620"/>
-              </a:lnSpc>
-              <a:spcAft>
-                <a:spcPts val="300"/>
-              </a:spcAft>
-              <a:buNone/>
-            </a:pPr>
-            <a:r>
-              <a:rPr lang="en-US" sz="1200" i="1" dirty="0">
-                <a:solidFill>
-                  <a:srgbClr val="1C2833"/>
-                </a:solidFill>
-                <a:latin typeface="Arial" pitchFamily="34" charset="0"/>
-                <a:ea typeface="Arial" pitchFamily="34" charset="-122"/>
-                <a:cs typeface="Arial" pitchFamily="34" charset="-120"/>
-              </a:rPr>
-              <a:t>earth</a:t>
-            </a:r>
-            <a:pPr algn="l" indent="0" marL="0">
-              <a:lnSpc>
-                <a:spcPts val="1620"/>
-              </a:lnSpc>
-              <a:spcAft>
-                <a:spcPts val="300"/>
-              </a:spcAft>
-              <a:buNone/>
-            </a:pPr>
-            <a:r>
-              <a:rPr lang="en-US" sz="1200" dirty="0">
-                <a:solidFill>
-                  <a:srgbClr val="1C2833"/>
-                </a:solidFill>
-                <a:latin typeface="Arial" pitchFamily="34" charset="0"/>
-                <a:ea typeface="Arial" pitchFamily="34" charset="-122"/>
-                <a:cs typeface="Arial" pitchFamily="34" charset="-120"/>
-              </a:rPr>
-              <a:t> has all five qualities? Why does it make sense that </a:t>
-            </a:r>
-            <a:pPr algn="l" indent="0" marL="0">
-              <a:lnSpc>
-                <a:spcPts val="1620"/>
-              </a:lnSpc>
-              <a:spcAft>
-                <a:spcPts val="300"/>
-              </a:spcAft>
-              <a:buNone/>
-            </a:pPr>
-            <a:r>
-              <a:rPr lang="en-US" sz="1200" i="1" dirty="0">
-                <a:solidFill>
-                  <a:srgbClr val="1C2833"/>
-                </a:solidFill>
-                <a:latin typeface="Arial" pitchFamily="34" charset="0"/>
-                <a:ea typeface="Arial" pitchFamily="34" charset="-122"/>
-                <a:cs typeface="Arial" pitchFamily="34" charset="-120"/>
-              </a:rPr>
-              <a:t>space</a:t>
-            </a:r>
-            <a:pPr algn="l" indent="0" marL="0">
-              <a:lnSpc>
-                <a:spcPts val="1620"/>
-              </a:lnSpc>
-              <a:spcAft>
-                <a:spcPts val="300"/>
-              </a:spcAft>
-              <a:buNone/>
-            </a:pPr>
-            <a:r>
-              <a:rPr lang="en-US" sz="1200" dirty="0">
-                <a:solidFill>
-                  <a:srgbClr val="1C2833"/>
-                </a:solidFill>
-                <a:latin typeface="Arial" pitchFamily="34" charset="0"/>
-                <a:ea typeface="Arial" pitchFamily="34" charset="-122"/>
-                <a:cs typeface="Arial" pitchFamily="34" charset="-120"/>
-              </a:rPr>
-              <a:t> has only one?"</a:t>
-            </a:r>
-            <a:endParaRPr lang="en-US" sz="1200" dirty="0"/>
-          </a:p>
-        </p:txBody>
-      </p:sp>
-      <p:sp>
-        <p:nvSpPr>
-          <p:cNvPr id="19" name="Text 17"/>
-          <p:cNvSpPr/>
-          <p:nvPr/>
-        </p:nvSpPr>
-        <p:spPr>
-          <a:xfrm>
-            <a:off x="406301" y="6623298"/>
-            <a:ext cx="8498026" cy="426541"/>
-          </a:xfrm>
-          <a:prstGeom prst="rect">
-            <a:avLst/>
-          </a:prstGeom>
-          <a:noFill/>
-          <a:ln/>
-        </p:spPr>
-        <p:txBody>
-          <a:bodyPr wrap="square" lIns="0" tIns="0" rIns="0" bIns="0" rtlCol="0" anchor="t"/>
-          <a:lstStyle/>
-          <a:p>
-            <a:pPr algn="l" indent="0" marL="0">
-              <a:lnSpc>
-                <a:spcPts val="1680"/>
-              </a:lnSpc>
-              <a:spcBef>
-                <a:spcPts val="300"/>
-              </a:spcBef>
-              <a:spcAft>
-                <a:spcPts val="300"/>
-              </a:spcAft>
-              <a:buNone/>
-            </a:pPr>
-            <a:r>
-              <a:rPr lang="en-US" sz="1200" dirty="0">
-                <a:solidFill>
-                  <a:srgbClr val="1C2833"/>
-                </a:solidFill>
-                <a:latin typeface="Arial" pitchFamily="34" charset="0"/>
-                <a:ea typeface="Arial" pitchFamily="34" charset="-122"/>
-                <a:cs typeface="Arial" pitchFamily="34" charset="-120"/>
-              </a:rPr>
-              <a:t>– Push toward: solid things are perceivable in </a:t>
-            </a:r>
-            <a:pPr algn="l" indent="0" marL="0">
-              <a:lnSpc>
-                <a:spcPts val="1680"/>
-              </a:lnSpc>
-              <a:spcBef>
-                <a:spcPts val="300"/>
-              </a:spcBef>
-              <a:spcAft>
-                <a:spcPts val="300"/>
-              </a:spcAft>
-              <a:buNone/>
-            </a:pPr>
-            <a:r>
-              <a:rPr lang="en-US" sz="1200" i="1" dirty="0">
-                <a:solidFill>
-                  <a:srgbClr val="1C2833"/>
-                </a:solidFill>
-                <a:latin typeface="Arial" pitchFamily="34" charset="0"/>
-                <a:ea typeface="Arial" pitchFamily="34" charset="-122"/>
-                <a:cs typeface="Arial" pitchFamily="34" charset="-120"/>
-              </a:rPr>
-              <a:t>every</a:t>
-            </a:r>
-            <a:pPr algn="l" indent="0" marL="0">
-              <a:lnSpc>
-                <a:spcPts val="1680"/>
-              </a:lnSpc>
-              <a:spcBef>
-                <a:spcPts val="300"/>
-              </a:spcBef>
-              <a:spcAft>
-                <a:spcPts val="300"/>
-              </a:spcAft>
-              <a:buNone/>
-            </a:pPr>
-            <a:r>
-              <a:rPr lang="en-US" sz="1200" dirty="0">
-                <a:solidFill>
-                  <a:srgbClr val="1C2833"/>
-                </a:solidFill>
-                <a:latin typeface="Arial" pitchFamily="34" charset="0"/>
-                <a:ea typeface="Arial" pitchFamily="34" charset="-122"/>
-                <a:cs typeface="Arial" pitchFamily="34" charset="-120"/>
-              </a:rPr>
-              <a:t> way — you can hear, touch, see, taste, smell soil. Empty space has no smell, taste, form, or touch — but you can hear sound in it.</a:t>
-            </a:r>
-            <a:endParaRPr lang="en-US" sz="1200" dirty="0"/>
-          </a:p>
-        </p:txBody>
-      </p:sp>
-      <p:sp>
-        <p:nvSpPr>
-          <p:cNvPr id="20" name="Text 18"/>
-          <p:cNvSpPr/>
-          <p:nvPr/>
-        </p:nvSpPr>
-        <p:spPr>
-          <a:xfrm>
-            <a:off x="406301" y="7202239"/>
+          <p:cNvPr id="5" name="Text 3"/>
+          <p:cNvSpPr/>
+          <p:nvPr/>
+        </p:nvSpPr>
+        <p:spPr>
+          <a:xfrm>
+            <a:off x="406301" y="4434929"/>
             <a:ext cx="8498026" cy="213271"/>
           </a:xfrm>
           <a:prstGeom prst="rect">
@@ -5965,7 +7631,7 @@
                 <a:ea typeface="Georgia" pitchFamily="34" charset="-122"/>
                 <a:cs typeface="Georgia" pitchFamily="34" charset="-120"/>
               </a:rPr>
-              <a:t>Activity (15 min) — Draw your own diagram</a:t>
+              <a:t>Core (20 min)</a:t>
             </a:r>
             <a:endParaRPr lang="en-US" sz="1800" dirty="0"/>
           </a:p>
@@ -5979,8 +7645,8 @@
         </p:nvSpPr>
         <p:spPr>
           <a:xfrm>
-            <a:off x="406301" y="870942"/>
-            <a:ext cx="8498026" cy="853083"/>
+            <a:off x="634901" y="883593"/>
+            <a:ext cx="8102798" cy="487561"/>
           </a:xfrm>
           <a:prstGeom prst="rect">
             <a:avLst/>
@@ -5992,13 +7658,31 @@
           <a:bodyPr wrap="square" lIns="0" tIns="0" rIns="0" bIns="0" rtlCol="0" anchor="t"/>
           <a:lstStyle/>
           <a:p>
-            <a:pPr algn="l" indent="0" marL="0">
-              <a:lnSpc>
-                <a:spcPts val="1680"/>
-              </a:lnSpc>
-              <a:spcBef>
-                <a:spcPts val="300"/>
-              </a:spcBef>
+            <a:pPr algn="l" marL="342900" indent="-342900">
+              <a:lnSpc>
+                <a:spcPts val="1620"/>
+              </a:lnSpc>
+              <a:spcAft>
+                <a:spcPts val="300"/>
+              </a:spcAft>
+              <a:buSzPct val="100000"/>
+              <a:buChar char="•"/>
+            </a:pPr>
+            <a:r>
+              <a:rPr lang="en-US" sz="1200" b="1" dirty="0">
+                <a:solidFill>
+                  <a:srgbClr val="1C2833"/>
+                </a:solidFill>
+                <a:latin typeface="Arial" pitchFamily="34" charset="0"/>
+                <a:ea typeface="Arial" pitchFamily="34" charset="-122"/>
+                <a:cs typeface="Arial" pitchFamily="34" charset="-120"/>
+              </a:rPr>
+              <a:t>Teacher prompt:</a:t>
+            </a:r>
+            <a:pPr algn="l" indent="0" marL="0">
+              <a:lnSpc>
+                <a:spcPts val="1620"/>
+              </a:lnSpc>
               <a:spcAft>
                 <a:spcPts val="300"/>
               </a:spcAft>
@@ -6013,15 +7697,12 @@
                 <a:ea typeface="Arial" pitchFamily="34" charset="-122"/>
                 <a:cs typeface="Arial" pitchFamily="34" charset="-120"/>
               </a:rPr>
-              <a:t>– Students draw the five elements in their notebooks as a nested set of expanding "rings" or "stacked layers" — whichever visual makes sense to them. – Each layer is labelled with its element AND its quality-count. – Use coloured markers if available. – At the bottom, each student writes a one-sentence answer: </a:t>
-            </a:r>
-            <a:pPr algn="l" indent="0" marL="0">
-              <a:lnSpc>
-                <a:spcPts val="1680"/>
-              </a:lnSpc>
-              <a:spcBef>
-                <a:spcPts val="300"/>
-              </a:spcBef>
+              <a:t> "If you had to </a:t>
+            </a:r>
+            <a:pPr algn="l" indent="0" marL="0">
+              <a:lnSpc>
+                <a:spcPts val="1620"/>
+              </a:lnSpc>
               <a:spcAft>
                 <a:spcPts val="300"/>
               </a:spcAft>
@@ -6036,7 +7717,107 @@
                 <a:ea typeface="Arial" pitchFamily="34" charset="-122"/>
                 <a:cs typeface="Arial" pitchFamily="34" charset="-120"/>
               </a:rPr>
-              <a:t>"In my drawing, the reason X is the outer ring is ___."</a:t>
+              <a:t>invent</a:t>
+            </a:r>
+            <a:pPr algn="l" indent="0" marL="0">
+              <a:lnSpc>
+                <a:spcPts val="1620"/>
+              </a:lnSpc>
+              <a:spcAft>
+                <a:spcPts val="300"/>
+              </a:spcAft>
+              <a:buNone/>
+            </a:pPr>
+            <a:r>
+              <a:rPr lang="en-US" sz="1200" dirty="0">
+                <a:solidFill>
+                  <a:srgbClr val="1C2833"/>
+                </a:solidFill>
+                <a:latin typeface="Arial" pitchFamily="34" charset="0"/>
+                <a:ea typeface="Arial" pitchFamily="34" charset="-122"/>
+                <a:cs typeface="Arial" pitchFamily="34" charset="-120"/>
+              </a:rPr>
+              <a:t> the universe — start with nothing and make all matter — which element would you make </a:t>
+            </a:r>
+            <a:pPr algn="l" indent="0" marL="0">
+              <a:lnSpc>
+                <a:spcPts val="1620"/>
+              </a:lnSpc>
+              <a:spcAft>
+                <a:spcPts val="300"/>
+              </a:spcAft>
+              <a:buNone/>
+            </a:pPr>
+            <a:r>
+              <a:rPr lang="en-US" sz="1200" i="1" dirty="0">
+                <a:solidFill>
+                  <a:srgbClr val="1C2833"/>
+                </a:solidFill>
+                <a:latin typeface="Arial" pitchFamily="34" charset="0"/>
+                <a:ea typeface="Arial" pitchFamily="34" charset="-122"/>
+                <a:cs typeface="Arial" pitchFamily="34" charset="-120"/>
+              </a:rPr>
+              <a:t>first</a:t>
+            </a:r>
+            <a:pPr algn="l" indent="0" marL="0">
+              <a:lnSpc>
+                <a:spcPts val="1620"/>
+              </a:lnSpc>
+              <a:spcAft>
+                <a:spcPts val="300"/>
+              </a:spcAft>
+              <a:buNone/>
+            </a:pPr>
+            <a:r>
+              <a:rPr lang="en-US" sz="1200" dirty="0">
+                <a:solidFill>
+                  <a:srgbClr val="1C2833"/>
+                </a:solidFill>
+                <a:latin typeface="Arial" pitchFamily="34" charset="0"/>
+                <a:ea typeface="Arial" pitchFamily="34" charset="-122"/>
+                <a:cs typeface="Arial" pitchFamily="34" charset="-120"/>
+              </a:rPr>
+              <a:t>? Which </a:t>
+            </a:r>
+            <a:pPr algn="l" indent="0" marL="0">
+              <a:lnSpc>
+                <a:spcPts val="1620"/>
+              </a:lnSpc>
+              <a:spcAft>
+                <a:spcPts val="300"/>
+              </a:spcAft>
+              <a:buNone/>
+            </a:pPr>
+            <a:r>
+              <a:rPr lang="en-US" sz="1200" i="1" dirty="0">
+                <a:solidFill>
+                  <a:srgbClr val="1C2833"/>
+                </a:solidFill>
+                <a:latin typeface="Arial" pitchFamily="34" charset="0"/>
+                <a:ea typeface="Arial" pitchFamily="34" charset="-122"/>
+                <a:cs typeface="Arial" pitchFamily="34" charset="-120"/>
+              </a:rPr>
+              <a:t>last</a:t>
+            </a:r>
+            <a:pPr algn="l" indent="0" marL="0">
+              <a:lnSpc>
+                <a:spcPts val="1620"/>
+              </a:lnSpc>
+              <a:spcAft>
+                <a:spcPts val="300"/>
+              </a:spcAft>
+              <a:buNone/>
+            </a:pPr>
+            <a:r>
+              <a:rPr lang="en-US" sz="1200" dirty="0">
+                <a:solidFill>
+                  <a:srgbClr val="1C2833"/>
+                </a:solidFill>
+                <a:latin typeface="Arial" pitchFamily="34" charset="0"/>
+                <a:ea typeface="Arial" pitchFamily="34" charset="-122"/>
+                <a:cs typeface="Arial" pitchFamily="34" charset="-120"/>
+              </a:rPr>
+              <a:t>? Why?"</a:t>
             </a:r>
             <a:endParaRPr lang="en-US" sz="1200" dirty="0"/>
           </a:p>
@@ -6050,8 +7831,8 @@
         </p:nvSpPr>
         <p:spPr>
           <a:xfrm>
-            <a:off x="406301" y="1800225"/>
-            <a:ext cx="8498026" cy="426541"/>
+            <a:off x="634901" y="1472654"/>
+            <a:ext cx="8102798" cy="281880"/>
           </a:xfrm>
           <a:prstGeom prst="rect">
             <a:avLst/>
@@ -6063,17 +7844,15 @@
           <a:bodyPr wrap="square" lIns="0" tIns="0" rIns="0" bIns="0" rtlCol="0" anchor="t"/>
           <a:lstStyle/>
           <a:p>
-            <a:pPr algn="l" indent="0" marL="0">
-              <a:lnSpc>
-                <a:spcPts val="1680"/>
-              </a:lnSpc>
-              <a:spcBef>
-                <a:spcPts val="300"/>
-              </a:spcBef>
-              <a:spcAft>
-                <a:spcPts val="300"/>
-              </a:spcAft>
-              <a:buNone/>
+            <a:pPr algn="l" marL="342900" indent="-342900">
+              <a:lnSpc>
+                <a:spcPts val="1620"/>
+              </a:lnSpc>
+              <a:spcAft>
+                <a:spcPts val="300"/>
+              </a:spcAft>
+              <a:buSzPct val="100000"/>
+              <a:buChar char="•"/>
             </a:pPr>
             <a:r>
               <a:rPr lang="en-US" sz="1200" dirty="0">
@@ -6084,99 +7863,7 @@
                 <a:ea typeface="Arial" pitchFamily="34" charset="-122"/>
                 <a:cs typeface="Arial" pitchFamily="34" charset="-120"/>
               </a:rPr>
-              <a:t>Walk around. If a student draws </a:t>
-            </a:r>
-            <a:pPr algn="l" indent="0" marL="0">
-              <a:lnSpc>
-                <a:spcPts val="1680"/>
-              </a:lnSpc>
-              <a:spcBef>
-                <a:spcPts val="300"/>
-              </a:spcBef>
-              <a:spcAft>
-                <a:spcPts val="300"/>
-              </a:spcAft>
-              <a:buNone/>
-            </a:pPr>
-            <a:r>
-              <a:rPr lang="en-US" sz="1200" i="1" dirty="0">
-                <a:solidFill>
-                  <a:srgbClr val="1C2833"/>
-                </a:solidFill>
-                <a:latin typeface="Arial" pitchFamily="34" charset="0"/>
-                <a:ea typeface="Arial" pitchFamily="34" charset="-122"/>
-                <a:cs typeface="Arial" pitchFamily="34" charset="-120"/>
-              </a:rPr>
-              <a:t>earth</a:t>
-            </a:r>
-            <a:pPr algn="l" indent="0" marL="0">
-              <a:lnSpc>
-                <a:spcPts val="1680"/>
-              </a:lnSpc>
-              <a:spcBef>
-                <a:spcPts val="300"/>
-              </a:spcBef>
-              <a:spcAft>
-                <a:spcPts val="300"/>
-              </a:spcAft>
-              <a:buNone/>
-            </a:pPr>
-            <a:r>
-              <a:rPr lang="en-US" sz="1200" dirty="0">
-                <a:solidFill>
-                  <a:srgbClr val="1C2833"/>
-                </a:solidFill>
-                <a:latin typeface="Arial" pitchFamily="34" charset="0"/>
-                <a:ea typeface="Arial" pitchFamily="34" charset="-122"/>
-                <a:cs typeface="Arial" pitchFamily="34" charset="-120"/>
-              </a:rPr>
-              <a:t> as the smallest, "central" element, that's also defensible — celebrate the reasoning, and gently distinguish: the SB sequence is about </a:t>
-            </a:r>
-            <a:pPr algn="l" indent="0" marL="0">
-              <a:lnSpc>
-                <a:spcPts val="1680"/>
-              </a:lnSpc>
-              <a:spcBef>
-                <a:spcPts val="300"/>
-              </a:spcBef>
-              <a:spcAft>
-                <a:spcPts val="300"/>
-              </a:spcAft>
-              <a:buNone/>
-            </a:pPr>
-            <a:r>
-              <a:rPr lang="en-US" sz="1200" i="1" dirty="0">
-                <a:solidFill>
-                  <a:srgbClr val="1C2833"/>
-                </a:solidFill>
-                <a:latin typeface="Arial" pitchFamily="34" charset="0"/>
-                <a:ea typeface="Arial" pitchFamily="34" charset="-122"/>
-                <a:cs typeface="Arial" pitchFamily="34" charset="-120"/>
-              </a:rPr>
-              <a:t>order of appearance</a:t>
-            </a:r>
-            <a:pPr algn="l" indent="0" marL="0">
-              <a:lnSpc>
-                <a:spcPts val="1680"/>
-              </a:lnSpc>
-              <a:spcBef>
-                <a:spcPts val="300"/>
-              </a:spcBef>
-              <a:spcAft>
-                <a:spcPts val="300"/>
-              </a:spcAft>
-              <a:buNone/>
-            </a:pPr>
-            <a:r>
-              <a:rPr lang="en-US" sz="1200" dirty="0">
-                <a:solidFill>
-                  <a:srgbClr val="1C2833"/>
-                </a:solidFill>
-                <a:latin typeface="Arial" pitchFamily="34" charset="0"/>
-                <a:ea typeface="Arial" pitchFamily="34" charset="-122"/>
-                <a:cs typeface="Arial" pitchFamily="34" charset="-120"/>
-              </a:rPr>
-              <a:t>, not size or importance.</a:t>
+              <a:t>Take 3–4 student answers. Don't judge them. Note: most will say earth first or water first.</a:t>
             </a:r>
             <a:endParaRPr lang="en-US" sz="1200" dirty="0"/>
           </a:p>
@@ -6185,6 +7872,52 @@
       <p:sp>
         <p:nvSpPr>
           <p:cNvPr id="6" name="Text 4"/>
+          <p:cNvSpPr/>
+          <p:nvPr/>
+        </p:nvSpPr>
+        <p:spPr>
+          <a:xfrm>
+            <a:off x="634901" y="1856036"/>
+            <a:ext cx="8102798" cy="281880"/>
+          </a:xfrm>
+          <a:prstGeom prst="rect">
+            <a:avLst/>
+          </a:prstGeom>
+          <a:noFill/>
+          <a:ln/>
+        </p:spPr>
+        <p:txBody>
+          <a:bodyPr wrap="square" lIns="0" tIns="0" rIns="0" bIns="0" rtlCol="0" anchor="t"/>
+          <a:lstStyle/>
+          <a:p>
+            <a:pPr algn="l" marL="342900" indent="-342900">
+              <a:lnSpc>
+                <a:spcPts val="1620"/>
+              </a:lnSpc>
+              <a:spcAft>
+                <a:spcPts val="300"/>
+              </a:spcAft>
+              <a:buSzPct val="100000"/>
+              <a:buChar char="•"/>
+            </a:pPr>
+            <a:r>
+              <a:rPr lang="en-US" sz="1200" b="1" dirty="0">
+                <a:solidFill>
+                  <a:srgbClr val="1C2833"/>
+                </a:solidFill>
+                <a:latin typeface="Arial" pitchFamily="34" charset="0"/>
+                <a:ea typeface="Arial" pitchFamily="34" charset="-122"/>
+                <a:cs typeface="Arial" pitchFamily="34" charset="-120"/>
+              </a:rPr>
+              <a:t>Reveal the Sāṅkhya answer (write on board, large):</a:t>
+            </a:r>
+            <a:endParaRPr lang="en-US" sz="1200" dirty="0"/>
+          </a:p>
+        </p:txBody>
+      </p:sp>
+      <p:sp>
+        <p:nvSpPr>
+          <p:cNvPr id="7" name="Text 5"/>
           <p:cNvSpPr/>
           <p:nvPr/>
         </p:nvSpPr>
@@ -6334,7 +8067,7 @@
                 <a:ea typeface="Georgia" pitchFamily="34" charset="-122"/>
                 <a:cs typeface="Georgia" pitchFamily="34" charset="-120"/>
               </a:rPr>
-              <a:t>Wrap-up (5 min)</a:t>
+              <a:t>Core (20 min) (cont.)</a:t>
             </a:r>
             <a:endParaRPr lang="en-US" sz="1800" dirty="0"/>
           </a:p>
@@ -6348,8 +8081,61 @@
         </p:nvSpPr>
         <p:spPr>
           <a:xfrm>
-            <a:off x="406301" y="870942"/>
-            <a:ext cx="8498026" cy="639812"/>
+            <a:off x="406301" y="883593"/>
+            <a:ext cx="8331398" cy="603052"/>
+          </a:xfrm>
+          <a:prstGeom prst="rect">
+            <a:avLst/>
+          </a:prstGeom>
+          <a:solidFill>
+            <a:srgbClr val="F4F8F9"/>
+          </a:solidFill>
+          <a:ln/>
+        </p:spPr>
+        <p:txBody>
+          <a:bodyPr wrap="square" rtlCol="0" anchor="ctr"/>
+          <a:lstStyle/>
+          <a:p>
+            <a:pPr indent="0" marL="0">
+              <a:buNone/>
+            </a:pPr>
+            <a:endParaRPr lang="en-US" dirty="0"/>
+          </a:p>
+        </p:txBody>
+      </p:sp>
+      <p:sp>
+        <p:nvSpPr>
+          <p:cNvPr id="5" name="Shape 3"/>
+          <p:cNvSpPr/>
+          <p:nvPr/>
+        </p:nvSpPr>
+        <p:spPr>
+          <a:xfrm>
+            <a:off x="430113" y="883593"/>
+            <a:ext cx="0" cy="603052"/>
+          </a:xfrm>
+          <a:prstGeom prst="line">
+            <a:avLst/>
+          </a:prstGeom>
+          <a:noFill/>
+          <a:ln w="47625">
+            <a:solidFill>
+              <a:srgbClr val="277884"/>
+            </a:solidFill>
+            <a:prstDash val="solid"/>
+          </a:ln>
+        </p:spPr>
+      </p:sp>
+      <p:sp>
+        <p:nvSpPr>
+          <p:cNvPr id="6" name="Text 4"/>
+          <p:cNvSpPr/>
+          <p:nvPr/>
+        </p:nvSpPr>
+        <p:spPr>
+          <a:xfrm>
+            <a:off x="631627" y="1010543"/>
+            <a:ext cx="8086939" cy="174575"/>
           </a:xfrm>
           <a:prstGeom prst="rect">
             <a:avLst/>
@@ -6363,6 +8149,90 @@
           <a:p>
             <a:pPr algn="l" indent="0" marL="0">
               <a:lnSpc>
+                <a:spcPts val="1375"/>
+              </a:lnSpc>
+              <a:buNone/>
+            </a:pPr>
+            <a:r>
+              <a:rPr lang="en-US" sz="1100" dirty="0">
+                <a:solidFill>
+                  <a:srgbClr val="1C2833"/>
+                </a:solidFill>
+                <a:latin typeface="Courier New" pitchFamily="34" charset="0"/>
+                <a:ea typeface="Courier New" pitchFamily="34" charset="-122"/>
+                <a:cs typeface="Courier New" pitchFamily="34" charset="-120"/>
+              </a:rPr>
+              <a:t>ākāśa  →  vāyu  →  tejas  →  ap  →  pṛthvī</a:t>
+            </a:r>
+            <a:endParaRPr lang="en-US" sz="1100" dirty="0"/>
+          </a:p>
+        </p:txBody>
+      </p:sp>
+      <p:sp>
+        <p:nvSpPr>
+          <p:cNvPr id="7" name="Text 5"/>
+          <p:cNvSpPr/>
+          <p:nvPr/>
+        </p:nvSpPr>
+        <p:spPr>
+          <a:xfrm>
+            <a:off x="631627" y="1185118"/>
+            <a:ext cx="8086939" cy="174575"/>
+          </a:xfrm>
+          <a:prstGeom prst="rect">
+            <a:avLst/>
+          </a:prstGeom>
+          <a:noFill/>
+          <a:ln/>
+        </p:spPr>
+        <p:txBody>
+          <a:bodyPr wrap="square" lIns="0" tIns="0" rIns="0" bIns="0" rtlCol="0" anchor="t"/>
+          <a:lstStyle/>
+          <a:p>
+            <a:pPr algn="l" indent="0" marL="0">
+              <a:lnSpc>
+                <a:spcPts val="1375"/>
+              </a:lnSpc>
+              <a:buNone/>
+            </a:pPr>
+            <a:r>
+              <a:rPr lang="en-US" sz="1100" dirty="0">
+                <a:solidFill>
+                  <a:srgbClr val="1C2833"/>
+                </a:solidFill>
+                <a:latin typeface="Courier New" pitchFamily="34" charset="0"/>
+                <a:ea typeface="Courier New" pitchFamily="34" charset="-122"/>
+                <a:cs typeface="Courier New" pitchFamily="34" charset="-120"/>
+              </a:rPr>
+              <a:t>(space)   (air)    (fire)   (water)  (earth)</a:t>
+            </a:r>
+            <a:endParaRPr lang="en-US" sz="1100" dirty="0"/>
+          </a:p>
+        </p:txBody>
+      </p:sp>
+      <p:sp>
+        <p:nvSpPr>
+          <p:cNvPr id="8" name="Text 6"/>
+          <p:cNvSpPr/>
+          <p:nvPr/>
+        </p:nvSpPr>
+        <p:spPr>
+          <a:xfrm>
+            <a:off x="406301" y="1575495"/>
+            <a:ext cx="8498026" cy="213271"/>
+          </a:xfrm>
+          <a:prstGeom prst="rect">
+            <a:avLst/>
+          </a:prstGeom>
+          <a:noFill/>
+          <a:ln/>
+        </p:spPr>
+        <p:txBody>
+          <a:bodyPr wrap="square" lIns="0" tIns="0" rIns="0" bIns="0" rtlCol="0" anchor="t"/>
+          <a:lstStyle/>
+          <a:p>
+            <a:pPr algn="l" indent="0" marL="0">
+              <a:lnSpc>
                 <a:spcPts val="1680"/>
               </a:lnSpc>
               <a:spcBef>
@@ -6382,7 +8252,7 @@
                 <a:ea typeface="Arial" pitchFamily="34" charset="-122"/>
                 <a:cs typeface="Arial" pitchFamily="34" charset="-120"/>
               </a:rPr>
-              <a:t>– Exit ticket (written, 1 sentence, on a slip of paper turned in): </a:t>
+              <a:t>"The tradition says the </a:t>
             </a:r>
             <a:pPr algn="l" indent="0" marL="0">
               <a:lnSpc>
@@ -6405,7 +8275,7 @@
                 <a:ea typeface="Arial" pitchFamily="34" charset="-122"/>
                 <a:cs typeface="Arial" pitchFamily="34" charset="-120"/>
               </a:rPr>
-              <a:t>"If a friend asked you 'why does space come first?', what would you say?"</a:t>
+              <a:t>opposite</a:t>
             </a:r>
             <a:pPr algn="l" indent="0" marL="0">
               <a:lnSpc>
@@ -6428,7 +8298,7 @@
                 <a:ea typeface="Arial" pitchFamily="34" charset="-122"/>
                 <a:cs typeface="Arial" pitchFamily="34" charset="-120"/>
               </a:rPr>
-              <a:t> – Preview: "Tomorrow we'll meet the qualities themselves — sound, touch, form, taste, smell — and see how each one connects to one of your five senses."</a:t>
+              <a:t> of what most of us guess. Why might that be?"</a:t>
             </a:r>
             <a:endParaRPr lang="en-US" sz="1200" dirty="0"/>
           </a:p>
@@ -6436,7 +8306,7 @@
       </p:sp>
       <p:sp>
         <p:nvSpPr>
-          <p:cNvPr id="5" name="Text 3"/>
+          <p:cNvPr id="9" name="Text 7"/>
           <p:cNvSpPr/>
           <p:nvPr/>
         </p:nvSpPr>
@@ -6586,7 +8456,7 @@
                 <a:ea typeface="Georgia" pitchFamily="34" charset="-122"/>
                 <a:cs typeface="Georgia" pitchFamily="34" charset="-120"/>
               </a:rPr>
-              <a:t>Student-facing content</a:t>
+              <a:t>Core (20 min) (cont.)</a:t>
             </a:r>
             <a:endParaRPr lang="en-US" sz="1800" dirty="0"/>
           </a:p>
@@ -6600,8 +8470,74 @@
         </p:nvSpPr>
         <p:spPr>
           <a:xfrm>
-            <a:off x="406301" y="883593"/>
-            <a:ext cx="8331398" cy="2381250"/>
+            <a:off x="634901" y="883593"/>
+            <a:ext cx="8102798" cy="281880"/>
+          </a:xfrm>
+          <a:prstGeom prst="rect">
+            <a:avLst/>
+          </a:prstGeom>
+          <a:noFill/>
+          <a:ln/>
+        </p:spPr>
+        <p:txBody>
+          <a:bodyPr wrap="square" lIns="0" tIns="0" rIns="0" bIns="0" rtlCol="0" anchor="t"/>
+          <a:lstStyle/>
+          <a:p>
+            <a:pPr algn="l" marL="342900" indent="-342900">
+              <a:lnSpc>
+                <a:spcPts val="1620"/>
+              </a:lnSpc>
+              <a:spcAft>
+                <a:spcPts val="300"/>
+              </a:spcAft>
+              <a:buSzPct val="100000"/>
+              <a:buChar char="•"/>
+            </a:pPr>
+            <a:r>
+              <a:rPr lang="en-US" sz="1200" b="1" dirty="0">
+                <a:solidFill>
+                  <a:srgbClr val="1C2833"/>
+                </a:solidFill>
+                <a:latin typeface="Arial" pitchFamily="34" charset="0"/>
+                <a:ea typeface="Arial" pitchFamily="34" charset="-122"/>
+                <a:cs typeface="Arial" pitchFamily="34" charset="-120"/>
+              </a:rPr>
+              <a:t>Explain with the quality-counting rule</a:t>
+            </a:r>
+            <a:pPr algn="l" indent="0" marL="0">
+              <a:lnSpc>
+                <a:spcPts val="1620"/>
+              </a:lnSpc>
+              <a:spcAft>
+                <a:spcPts val="300"/>
+              </a:spcAft>
+              <a:buNone/>
+            </a:pPr>
+            <a:r>
+              <a:rPr lang="en-US" sz="1200" dirty="0">
+                <a:solidFill>
+                  <a:srgbClr val="1C2833"/>
+                </a:solidFill>
+                <a:latin typeface="Arial" pitchFamily="34" charset="0"/>
+                <a:ea typeface="Arial" pitchFamily="34" charset="-122"/>
+                <a:cs typeface="Arial" pitchFamily="34" charset="-120"/>
+              </a:rPr>
+              <a:t> (this is the key idea — write it boxed on the board):</a:t>
+            </a:r>
+            <a:endParaRPr lang="en-US" sz="1200" dirty="0"/>
+          </a:p>
+        </p:txBody>
+      </p:sp>
+      <p:sp>
+        <p:nvSpPr>
+          <p:cNvPr id="5" name="Text 3"/>
+          <p:cNvSpPr/>
+          <p:nvPr/>
+        </p:nvSpPr>
+        <p:spPr>
+          <a:xfrm>
+            <a:off x="406301" y="1266974"/>
+            <a:ext cx="8331398" cy="842963"/>
           </a:xfrm>
           <a:prstGeom prst="rect">
             <a:avLst/>
@@ -6624,14 +8560,14 @@
       </p:sp>
       <p:sp>
         <p:nvSpPr>
-          <p:cNvPr id="5" name="Shape 3"/>
-          <p:cNvSpPr/>
-          <p:nvPr/>
-        </p:nvSpPr>
-        <p:spPr>
-          <a:xfrm>
-            <a:off x="434876" y="883593"/>
-            <a:ext cx="0" cy="2381250"/>
+          <p:cNvPr id="6" name="Shape 4"/>
+          <p:cNvSpPr/>
+          <p:nvPr/>
+        </p:nvSpPr>
+        <p:spPr>
+          <a:xfrm>
+            <a:off x="434876" y="1266974"/>
+            <a:ext cx="0" cy="842962"/>
           </a:xfrm>
           <a:prstGeom prst="line">
             <a:avLst/>
@@ -6647,14 +8583,14 @@
       </p:sp>
       <p:sp>
         <p:nvSpPr>
-          <p:cNvPr id="6" name="Text 4"/>
-          <p:cNvSpPr/>
-          <p:nvPr/>
-        </p:nvSpPr>
-        <p:spPr>
-          <a:xfrm>
-            <a:off x="692051" y="1074093"/>
-            <a:ext cx="7973389" cy="230981"/>
+          <p:cNvPr id="7" name="Text 5"/>
+          <p:cNvSpPr/>
+          <p:nvPr/>
+        </p:nvSpPr>
+        <p:spPr>
+          <a:xfrm>
+            <a:off x="692051" y="1457474"/>
+            <a:ext cx="7973389" cy="461963"/>
           </a:xfrm>
           <a:prstGeom prst="rect">
             <a:avLst/>
@@ -6687,7 +8623,7 @@
                 <a:ea typeface="Georgia" pitchFamily="34" charset="-122"/>
                 <a:cs typeface="Georgia" pitchFamily="34" charset="-120"/>
               </a:rPr>
-              <a:t>The Five Elements emerge in a sequence</a:t>
+              <a:t>Each element carries forward all the qualities of the elements before it, and adds one new quality of its own.</a:t>
             </a:r>
             <a:endParaRPr lang="en-US" sz="1300" dirty="0"/>
           </a:p>
@@ -6695,14 +8631,14 @@
       </p:sp>
       <p:sp>
         <p:nvSpPr>
-          <p:cNvPr id="7" name="Text 5"/>
-          <p:cNvSpPr/>
-          <p:nvPr/>
-        </p:nvSpPr>
-        <p:spPr>
-          <a:xfrm>
-            <a:off x="692051" y="1343174"/>
-            <a:ext cx="7973389" cy="230981"/>
+          <p:cNvPr id="8" name="Text 6"/>
+          <p:cNvSpPr/>
+          <p:nvPr/>
+        </p:nvSpPr>
+        <p:spPr>
+          <a:xfrm>
+            <a:off x="406301" y="2198787"/>
+            <a:ext cx="8498026" cy="213271"/>
           </a:xfrm>
           <a:prstGeom prst="rect">
             <a:avLst/>
@@ -6716,7 +8652,7 @@
           <a:p>
             <a:pPr algn="l" indent="0" marL="0">
               <a:lnSpc>
-                <a:spcPts val="1820"/>
+                <a:spcPts val="1680"/>
               </a:lnSpc>
               <a:spcBef>
                 <a:spcPts val="300"/>
@@ -6727,237 +8663,30 @@
               <a:buNone/>
             </a:pPr>
             <a:r>
-              <a:rPr lang="en-US" sz="1300" i="1" dirty="0">
-                <a:solidFill>
-                  <a:srgbClr val="1C2833"/>
-                </a:solidFill>
-                <a:latin typeface="Georgia" pitchFamily="34" charset="0"/>
-                <a:ea typeface="Georgia" pitchFamily="34" charset="-122"/>
-                <a:cs typeface="Georgia" pitchFamily="34" charset="-120"/>
-              </a:rPr>
-              <a:t>ākāśa</a:t>
-            </a:r>
-            <a:pPr algn="l" indent="0" marL="0">
-              <a:lnSpc>
-                <a:spcPts val="1820"/>
-              </a:lnSpc>
-              <a:spcBef>
-                <a:spcPts val="300"/>
-              </a:spcBef>
-              <a:spcAft>
-                <a:spcPts val="300"/>
-              </a:spcAft>
-              <a:buNone/>
-            </a:pPr>
-            <a:r>
-              <a:rPr lang="en-US" sz="1300" dirty="0">
-                <a:solidFill>
-                  <a:srgbClr val="1C2833"/>
-                </a:solidFill>
-                <a:latin typeface="Georgia" pitchFamily="34" charset="0"/>
-                <a:ea typeface="Georgia" pitchFamily="34" charset="-122"/>
-                <a:cs typeface="Georgia" pitchFamily="34" charset="-120"/>
-              </a:rPr>
-              <a:t> (space) → </a:t>
-            </a:r>
-            <a:pPr algn="l" indent="0" marL="0">
-              <a:lnSpc>
-                <a:spcPts val="1820"/>
-              </a:lnSpc>
-              <a:spcBef>
-                <a:spcPts val="300"/>
-              </a:spcBef>
-              <a:spcAft>
-                <a:spcPts val="300"/>
-              </a:spcAft>
-              <a:buNone/>
-            </a:pPr>
-            <a:r>
-              <a:rPr lang="en-US" sz="1300" i="1" dirty="0">
-                <a:solidFill>
-                  <a:srgbClr val="1C2833"/>
-                </a:solidFill>
-                <a:latin typeface="Georgia" pitchFamily="34" charset="0"/>
-                <a:ea typeface="Georgia" pitchFamily="34" charset="-122"/>
-                <a:cs typeface="Georgia" pitchFamily="34" charset="-120"/>
-              </a:rPr>
-              <a:t>vāyu</a:t>
-            </a:r>
-            <a:pPr algn="l" indent="0" marL="0">
-              <a:lnSpc>
-                <a:spcPts val="1820"/>
-              </a:lnSpc>
-              <a:spcBef>
-                <a:spcPts val="300"/>
-              </a:spcBef>
-              <a:spcAft>
-                <a:spcPts val="300"/>
-              </a:spcAft>
-              <a:buNone/>
-            </a:pPr>
-            <a:r>
-              <a:rPr lang="en-US" sz="1300" dirty="0">
-                <a:solidFill>
-                  <a:srgbClr val="1C2833"/>
-                </a:solidFill>
-                <a:latin typeface="Georgia" pitchFamily="34" charset="0"/>
-                <a:ea typeface="Georgia" pitchFamily="34" charset="-122"/>
-                <a:cs typeface="Georgia" pitchFamily="34" charset="-120"/>
-              </a:rPr>
-              <a:t> (air) → </a:t>
-            </a:r>
-            <a:pPr algn="l" indent="0" marL="0">
-              <a:lnSpc>
-                <a:spcPts val="1820"/>
-              </a:lnSpc>
-              <a:spcBef>
-                <a:spcPts val="300"/>
-              </a:spcBef>
-              <a:spcAft>
-                <a:spcPts val="300"/>
-              </a:spcAft>
-              <a:buNone/>
-            </a:pPr>
-            <a:r>
-              <a:rPr lang="en-US" sz="1300" i="1" dirty="0">
-                <a:solidFill>
-                  <a:srgbClr val="1C2833"/>
-                </a:solidFill>
-                <a:latin typeface="Georgia" pitchFamily="34" charset="0"/>
-                <a:ea typeface="Georgia" pitchFamily="34" charset="-122"/>
-                <a:cs typeface="Georgia" pitchFamily="34" charset="-120"/>
-              </a:rPr>
-              <a:t>tejas</a:t>
-            </a:r>
-            <a:pPr algn="l" indent="0" marL="0">
-              <a:lnSpc>
-                <a:spcPts val="1820"/>
-              </a:lnSpc>
-              <a:spcBef>
-                <a:spcPts val="300"/>
-              </a:spcBef>
-              <a:spcAft>
-                <a:spcPts val="300"/>
-              </a:spcAft>
-              <a:buNone/>
-            </a:pPr>
-            <a:r>
-              <a:rPr lang="en-US" sz="1300" dirty="0">
-                <a:solidFill>
-                  <a:srgbClr val="1C2833"/>
-                </a:solidFill>
-                <a:latin typeface="Georgia" pitchFamily="34" charset="0"/>
-                <a:ea typeface="Georgia" pitchFamily="34" charset="-122"/>
-                <a:cs typeface="Georgia" pitchFamily="34" charset="-120"/>
-              </a:rPr>
-              <a:t> (fire) → </a:t>
-            </a:r>
-            <a:pPr algn="l" indent="0" marL="0">
-              <a:lnSpc>
-                <a:spcPts val="1820"/>
-              </a:lnSpc>
-              <a:spcBef>
-                <a:spcPts val="300"/>
-              </a:spcBef>
-              <a:spcAft>
-                <a:spcPts val="300"/>
-              </a:spcAft>
-              <a:buNone/>
-            </a:pPr>
-            <a:r>
-              <a:rPr lang="en-US" sz="1300" i="1" dirty="0">
-                <a:solidFill>
-                  <a:srgbClr val="1C2833"/>
-                </a:solidFill>
-                <a:latin typeface="Georgia" pitchFamily="34" charset="0"/>
-                <a:ea typeface="Georgia" pitchFamily="34" charset="-122"/>
-                <a:cs typeface="Georgia" pitchFamily="34" charset="-120"/>
-              </a:rPr>
-              <a:t>ap</a:t>
-            </a:r>
-            <a:pPr algn="l" indent="0" marL="0">
-              <a:lnSpc>
-                <a:spcPts val="1820"/>
-              </a:lnSpc>
-              <a:spcBef>
-                <a:spcPts val="300"/>
-              </a:spcBef>
-              <a:spcAft>
-                <a:spcPts val="300"/>
-              </a:spcAft>
-              <a:buNone/>
-            </a:pPr>
-            <a:r>
-              <a:rPr lang="en-US" sz="1300" dirty="0">
-                <a:solidFill>
-                  <a:srgbClr val="1C2833"/>
-                </a:solidFill>
-                <a:latin typeface="Georgia" pitchFamily="34" charset="0"/>
-                <a:ea typeface="Georgia" pitchFamily="34" charset="-122"/>
-                <a:cs typeface="Georgia" pitchFamily="34" charset="-120"/>
-              </a:rPr>
-              <a:t> (water) → </a:t>
-            </a:r>
-            <a:pPr algn="l" indent="0" marL="0">
-              <a:lnSpc>
-                <a:spcPts val="1820"/>
-              </a:lnSpc>
-              <a:spcBef>
-                <a:spcPts val="300"/>
-              </a:spcBef>
-              <a:spcAft>
-                <a:spcPts val="300"/>
-              </a:spcAft>
-              <a:buNone/>
-            </a:pPr>
-            <a:r>
-              <a:rPr lang="en-US" sz="1300" i="1" dirty="0">
-                <a:solidFill>
-                  <a:srgbClr val="1C2833"/>
-                </a:solidFill>
-                <a:latin typeface="Georgia" pitchFamily="34" charset="0"/>
-                <a:ea typeface="Georgia" pitchFamily="34" charset="-122"/>
-                <a:cs typeface="Georgia" pitchFamily="34" charset="-120"/>
-              </a:rPr>
-              <a:t>pṛthvī</a:t>
-            </a:r>
-            <a:pPr algn="l" indent="0" marL="0">
-              <a:lnSpc>
-                <a:spcPts val="1820"/>
-              </a:lnSpc>
-              <a:spcBef>
-                <a:spcPts val="300"/>
-              </a:spcBef>
-              <a:spcAft>
-                <a:spcPts val="300"/>
-              </a:spcAft>
-              <a:buNone/>
-            </a:pPr>
-            <a:r>
-              <a:rPr lang="en-US" sz="1300" dirty="0">
-                <a:solidFill>
-                  <a:srgbClr val="1C2833"/>
-                </a:solidFill>
-                <a:latin typeface="Georgia" pitchFamily="34" charset="0"/>
-                <a:ea typeface="Georgia" pitchFamily="34" charset="-122"/>
-                <a:cs typeface="Georgia" pitchFamily="34" charset="-120"/>
-              </a:rPr>
-              <a:t> (earth)</a:t>
-            </a:r>
-            <a:endParaRPr lang="en-US" sz="1300" dirty="0"/>
-          </a:p>
-        </p:txBody>
-      </p:sp>
-      <p:sp>
-        <p:nvSpPr>
-          <p:cNvPr id="8" name="Text 6"/>
-          <p:cNvSpPr/>
-          <p:nvPr/>
-        </p:nvSpPr>
-        <p:spPr>
-          <a:xfrm>
-            <a:off x="692051" y="1612255"/>
-            <a:ext cx="7973389" cy="461963"/>
+              <a:rPr lang="en-US" sz="1200" dirty="0">
+                <a:solidFill>
+                  <a:srgbClr val="1C2833"/>
+                </a:solidFill>
+                <a:latin typeface="Arial" pitchFamily="34" charset="0"/>
+                <a:ea typeface="Arial" pitchFamily="34" charset="-122"/>
+                <a:cs typeface="Arial" pitchFamily="34" charset="-120"/>
+              </a:rPr>
+              <a:t>Build the table on the board, filling row by row:</a:t>
+            </a:r>
+            <a:endParaRPr lang="en-US" sz="1200" dirty="0"/>
+          </a:p>
+        </p:txBody>
+      </p:sp>
+      <p:sp>
+        <p:nvSpPr>
+          <p:cNvPr id="9" name="Text 7"/>
+          <p:cNvSpPr/>
+          <p:nvPr/>
+        </p:nvSpPr>
+        <p:spPr>
+          <a:xfrm>
+            <a:off x="406301" y="2488257"/>
+            <a:ext cx="8498026" cy="213271"/>
           </a:xfrm>
           <a:prstGeom prst="rect">
             <a:avLst/>
@@ -6971,7 +8700,7 @@
           <a:p>
             <a:pPr algn="l" indent="0" marL="0">
               <a:lnSpc>
-                <a:spcPts val="1820"/>
+                <a:spcPts val="1680"/>
               </a:lnSpc>
               <a:spcBef>
                 <a:spcPts val="300"/>
@@ -6982,165 +8711,23 @@
               <a:buNone/>
             </a:pPr>
             <a:r>
-              <a:rPr lang="en-US" sz="1300" i="1" dirty="0">
-                <a:solidFill>
-                  <a:srgbClr val="1C2833"/>
-                </a:solidFill>
-                <a:latin typeface="Georgia" pitchFamily="34" charset="0"/>
-                <a:ea typeface="Georgia" pitchFamily="34" charset="-122"/>
-                <a:cs typeface="Georgia" pitchFamily="34" charset="-120"/>
-              </a:rPr>
-              <a:t>Each new element carries forward the qualities of the ones before it and adds one new quality of its own. So earth has all five, while space has just one — sound.</a:t>
-            </a:r>
-            <a:endParaRPr lang="en-US" sz="1300" dirty="0"/>
-          </a:p>
-        </p:txBody>
-      </p:sp>
-      <p:sp>
-        <p:nvSpPr>
-          <p:cNvPr id="9" name="Text 7"/>
-          <p:cNvSpPr/>
-          <p:nvPr/>
-        </p:nvSpPr>
-        <p:spPr>
-          <a:xfrm>
-            <a:off x="692051" y="2112318"/>
-            <a:ext cx="7973389" cy="461963"/>
-          </a:xfrm>
-          <a:prstGeom prst="rect">
-            <a:avLst/>
-          </a:prstGeom>
-          <a:noFill/>
-          <a:ln/>
-        </p:spPr>
-        <p:txBody>
-          <a:bodyPr wrap="square" lIns="0" tIns="0" rIns="0" bIns="0" rtlCol="0" anchor="t"/>
-          <a:lstStyle/>
-          <a:p>
-            <a:pPr algn="l" indent="0" marL="0">
-              <a:lnSpc>
-                <a:spcPts val="1820"/>
-              </a:lnSpc>
-              <a:spcBef>
-                <a:spcPts val="300"/>
-              </a:spcBef>
-              <a:spcAft>
-                <a:spcPts val="300"/>
-              </a:spcAft>
-              <a:buNone/>
-            </a:pPr>
-            <a:r>
-              <a:rPr lang="en-US" sz="1300" dirty="0">
-                <a:solidFill>
-                  <a:srgbClr val="1C2833"/>
-                </a:solidFill>
-                <a:latin typeface="Georgia" pitchFamily="34" charset="0"/>
-                <a:ea typeface="Georgia" pitchFamily="34" charset="-122"/>
-                <a:cs typeface="Georgia" pitchFamily="34" charset="-120"/>
-              </a:rPr>
-              <a:t>&gt; "</a:t>
-            </a:r>
-            <a:pPr algn="l" indent="0" marL="0">
-              <a:lnSpc>
-                <a:spcPts val="1820"/>
-              </a:lnSpc>
-              <a:spcBef>
-                <a:spcPts val="300"/>
-              </a:spcBef>
-              <a:spcAft>
-                <a:spcPts val="300"/>
-              </a:spcAft>
-              <a:buNone/>
-            </a:pPr>
-            <a:r>
-              <a:rPr lang="en-US" sz="1300" i="1" dirty="0">
-                <a:solidFill>
-                  <a:srgbClr val="1C2833"/>
-                </a:solidFill>
-                <a:latin typeface="Georgia" pitchFamily="34" charset="0"/>
-                <a:ea typeface="Georgia" pitchFamily="34" charset="-122"/>
-                <a:cs typeface="Georgia" pitchFamily="34" charset="-120"/>
-              </a:rPr>
-              <a:t>mahīṁ gandha-guṇām ādhāt ...</a:t>
-            </a:r>
-            <a:pPr algn="l" indent="0" marL="0">
-              <a:lnSpc>
-                <a:spcPts val="1820"/>
-              </a:lnSpc>
-              <a:spcBef>
-                <a:spcPts val="300"/>
-              </a:spcBef>
-              <a:spcAft>
-                <a:spcPts val="300"/>
-              </a:spcAft>
-              <a:buNone/>
-            </a:pPr>
-            <a:r>
-              <a:rPr lang="en-US" sz="1300" dirty="0">
-                <a:solidFill>
-                  <a:srgbClr val="1C2833"/>
-                </a:solidFill>
-                <a:latin typeface="Georgia" pitchFamily="34" charset="0"/>
-                <a:ea typeface="Georgia" pitchFamily="34" charset="-122"/>
-                <a:cs typeface="Georgia" pitchFamily="34" charset="-120"/>
-              </a:rPr>
-              <a:t>" — "The earth was endowed with the quality of smell, by the impulse of time." &gt; — Śrīmad-Bhāgavatam 3.5.36</a:t>
-            </a:r>
-            <a:endParaRPr lang="en-US" sz="1300" dirty="0"/>
+              <a:rPr lang="en-US" sz="1200" i="1" dirty="0">
+                <a:solidFill>
+                  <a:srgbClr val="1C2833"/>
+                </a:solidFill>
+                <a:latin typeface="Arial" pitchFamily="34" charset="0"/>
+                <a:ea typeface="Arial" pitchFamily="34" charset="-122"/>
+                <a:cs typeface="Arial" pitchFamily="34" charset="-120"/>
+              </a:rPr>
+              <a:t>Each row: Element · Qualities.</a:t>
+            </a:r>
+            <a:endParaRPr lang="en-US" sz="1200" dirty="0"/>
           </a:p>
         </p:txBody>
       </p:sp>
       <p:sp>
         <p:nvSpPr>
           <p:cNvPr id="10" name="Text 8"/>
-          <p:cNvSpPr/>
-          <p:nvPr/>
-        </p:nvSpPr>
-        <p:spPr>
-          <a:xfrm>
-            <a:off x="692051" y="2612380"/>
-            <a:ext cx="7973389" cy="461963"/>
-          </a:xfrm>
-          <a:prstGeom prst="rect">
-            <a:avLst/>
-          </a:prstGeom>
-          <a:noFill/>
-          <a:ln/>
-        </p:spPr>
-        <p:txBody>
-          <a:bodyPr wrap="square" lIns="0" tIns="0" rIns="0" bIns="0" rtlCol="0" anchor="t"/>
-          <a:lstStyle/>
-          <a:p>
-            <a:pPr algn="l" indent="0" marL="0">
-              <a:lnSpc>
-                <a:spcPts val="1820"/>
-              </a:lnSpc>
-              <a:spcBef>
-                <a:spcPts val="300"/>
-              </a:spcBef>
-              <a:spcAft>
-                <a:spcPts val="300"/>
-              </a:spcAft>
-              <a:buNone/>
-            </a:pPr>
-            <a:r>
-              <a:rPr lang="en-US" sz="1300" b="1" i="1" dirty="0">
-                <a:solidFill>
-                  <a:srgbClr val="1C2833"/>
-                </a:solidFill>
-                <a:latin typeface="Georgia" pitchFamily="34" charset="0"/>
-                <a:ea typeface="Georgia" pitchFamily="34" charset="-122"/>
-                <a:cs typeface="Georgia" pitchFamily="34" charset="-120"/>
-              </a:rPr>
-              <a:t>In your notebook, draw the five elements as nested layers, label each with its qualities, and write one sentence explaining why this order makes sense to you.</a:t>
-            </a:r>
-            <a:endParaRPr lang="en-US" sz="1300" dirty="0"/>
-          </a:p>
-        </p:txBody>
-      </p:sp>
-      <p:sp>
-        <p:nvSpPr>
-          <p:cNvPr id="11" name="Text 9"/>
           <p:cNvSpPr/>
           <p:nvPr/>
         </p:nvSpPr>
